--- a/si-portal/catalogues/TerraAlarm_Catalogue.pptx
+++ b/si-portal/catalogues/TerraAlarm_Catalogue.pptx
@@ -6,11 +6,12 @@
   </p:sldMasterIdLst>
   <p:sldIdLst>
     <p:sldId id="256" r:id="rId7"/>
-    <p:sldId id="257" r:id="rId8"/>
-    <p:sldId id="258" r:id="rId9"/>
-    <p:sldId id="259" r:id="rId10"/>
-    <p:sldId id="260" r:id="rId11"/>
-    <p:sldId id="261" r:id="rId12"/>
+    <p:sldId id="257" r:id="rId9"/>
+    <p:sldId id="258" r:id="rId10"/>
+    <p:sldId id="259" r:id="rId11"/>
+    <p:sldId id="260" r:id="rId12"/>
+    <p:sldId id="261" r:id="rId13"/>
+    <p:sldId id="262" r:id="rId14"/>
   </p:sldIdLst>
   <p:sldSz cx="12191695" cy="6858000" type="screen4x3"/>
   <p:notesSz cx="6858000" cy="9144000"/>
@@ -110,6 +111,1177 @@
     </a:lvl9pPr>
   </p:defaultTextStyle>
 </p:presentation>
+</file>
+
+<file path=ppt/notesMasters/notesMaster1.xml><?xml version="1.0" encoding="utf-8"?>
+<p:notesMaster xmlns:a="http://schemas.openxmlformats.org/drawingml/2006/main" xmlns:p="http://schemas.openxmlformats.org/presentationml/2006/main" xmlns:r="http://schemas.openxmlformats.org/officeDocument/2006/relationships">
+  <p:cSld>
+    <p:bg>
+      <p:bgRef idx="1001">
+        <a:schemeClr val="bg1"/>
+      </p:bgRef>
+    </p:bg>
+    <p:spTree>
+      <p:nvGrpSpPr>
+        <p:cNvPr id="1" name=""/>
+        <p:cNvGrpSpPr/>
+        <p:nvPr/>
+      </p:nvGrpSpPr>
+      <p:grpSpPr>
+        <a:xfrm>
+          <a:off x="0" y="0"/>
+          <a:ext cx="0" cy="0"/>
+          <a:chOff x="0" y="0"/>
+          <a:chExt cx="0" cy="0"/>
+        </a:xfrm>
+      </p:grpSpPr>
+      <p:sp>
+        <p:nvSpPr>
+          <p:cNvPr id="2" name="Header Placeholder 1"/>
+          <p:cNvSpPr>
+            <a:spLocks noGrp="1"/>
+          </p:cNvSpPr>
+          <p:nvPr>
+            <p:ph type="hdr" sz="quarter"/>
+          </p:nvPr>
+        </p:nvSpPr>
+        <p:spPr>
+          <a:xfrm>
+            <a:off x="0" y="0"/>
+            <a:ext cx="2971800" cy="457200"/>
+          </a:xfrm>
+          <a:prstGeom prst="rect">
+            <a:avLst/>
+          </a:prstGeom>
+        </p:spPr>
+        <p:txBody>
+          <a:bodyPr vert="horz" lIns="91440" tIns="45720" rIns="91440" bIns="45720" rtlCol="0"/>
+          <a:lstStyle>
+            <a:lvl1pPr algn="l">
+              <a:defRPr sz="1200"/>
+            </a:lvl1pPr>
+          </a:lstStyle>
+          <a:p>
+            <a:endParaRPr lang="en-US"/>
+          </a:p>
+        </p:txBody>
+      </p:sp>
+      <p:sp>
+        <p:nvSpPr>
+          <p:cNvPr id="3" name="Date Placeholder 2"/>
+          <p:cNvSpPr>
+            <a:spLocks noGrp="1"/>
+          </p:cNvSpPr>
+          <p:nvPr>
+            <p:ph type="dt" idx="1"/>
+          </p:nvPr>
+        </p:nvSpPr>
+        <p:spPr>
+          <a:xfrm>
+            <a:off x="3884613" y="0"/>
+            <a:ext cx="2971800" cy="457200"/>
+          </a:xfrm>
+          <a:prstGeom prst="rect">
+            <a:avLst/>
+          </a:prstGeom>
+        </p:spPr>
+        <p:txBody>
+          <a:bodyPr vert="horz" lIns="91440" tIns="45720" rIns="91440" bIns="45720" rtlCol="0"/>
+          <a:lstStyle>
+            <a:lvl1pPr algn="r">
+              <a:defRPr sz="1200"/>
+            </a:lvl1pPr>
+          </a:lstStyle>
+          <a:p>
+            <a:fld id="{0F89C1C7-3DCD-1040-A9CF-14679D8B5DDD}" type="datetimeFigureOut">
+              <a:rPr lang="en-US" smtClean="0"/>
+              <a:t>10/17/16</a:t>
+            </a:fld>
+            <a:endParaRPr lang="en-US"/>
+          </a:p>
+        </p:txBody>
+      </p:sp>
+      <p:sp>
+        <p:nvSpPr>
+          <p:cNvPr id="4" name="Slide Image Placeholder 3"/>
+          <p:cNvSpPr>
+            <a:spLocks noGrp="1" noRot="1" noChangeAspect="1"/>
+          </p:cNvSpPr>
+          <p:nvPr>
+            <p:ph type="sldImg" idx="2"/>
+          </p:nvPr>
+        </p:nvSpPr>
+        <p:spPr>
+          <a:xfrm>
+            <a:off x="1143000" y="685800"/>
+            <a:ext cx="4572000" cy="3429000"/>
+          </a:xfrm>
+          <a:prstGeom prst="rect">
+            <a:avLst/>
+          </a:prstGeom>
+          <a:noFill/>
+          <a:ln w="12700">
+            <a:solidFill>
+              <a:prstClr val="black"/>
+            </a:solidFill>
+          </a:ln>
+        </p:spPr>
+        <p:txBody>
+          <a:bodyPr vert="horz" lIns="91440" tIns="45720" rIns="91440" bIns="45720" rtlCol="0" anchor="ctr"/>
+          <a:lstStyle/>
+          <a:p>
+            <a:endParaRPr lang="en-US"/>
+          </a:p>
+        </p:txBody>
+      </p:sp>
+      <p:sp>
+        <p:nvSpPr>
+          <p:cNvPr id="5" name="Notes Placeholder 4"/>
+          <p:cNvSpPr>
+            <a:spLocks noGrp="1"/>
+          </p:cNvSpPr>
+          <p:nvPr>
+            <p:ph type="body" sz="quarter" idx="3"/>
+          </p:nvPr>
+        </p:nvSpPr>
+        <p:spPr>
+          <a:xfrm>
+            <a:off x="685800" y="4343400"/>
+            <a:ext cx="5486400" cy="4114800"/>
+          </a:xfrm>
+          <a:prstGeom prst="rect">
+            <a:avLst/>
+          </a:prstGeom>
+        </p:spPr>
+        <p:txBody>
+          <a:bodyPr vert="horz" lIns="91440" tIns="45720" rIns="91440" bIns="45720" rtlCol="0"/>
+          <a:lstStyle/>
+          <a:p>
+            <a:pPr lvl="0"/>
+            <a:r>
+              <a:rPr lang="en-US" smtClean="0"/>
+              <a:t>Click to edit Master text styles</a:t>
+            </a:r>
+          </a:p>
+          <a:p>
+            <a:pPr lvl="1"/>
+            <a:r>
+              <a:rPr lang="en-US" smtClean="0"/>
+              <a:t>Second level</a:t>
+            </a:r>
+          </a:p>
+          <a:p>
+            <a:pPr lvl="2"/>
+            <a:r>
+              <a:rPr lang="en-US" smtClean="0"/>
+              <a:t>Third level</a:t>
+            </a:r>
+          </a:p>
+          <a:p>
+            <a:pPr lvl="3"/>
+            <a:r>
+              <a:rPr lang="en-US" smtClean="0"/>
+              <a:t>Fourth level</a:t>
+            </a:r>
+          </a:p>
+          <a:p>
+            <a:pPr lvl="4"/>
+            <a:r>
+              <a:rPr lang="en-US" smtClean="0"/>
+              <a:t>Fifth level</a:t>
+            </a:r>
+            <a:endParaRPr lang="en-US"/>
+          </a:p>
+        </p:txBody>
+      </p:sp>
+      <p:sp>
+        <p:nvSpPr>
+          <p:cNvPr id="6" name="Footer Placeholder 5"/>
+          <p:cNvSpPr>
+            <a:spLocks noGrp="1"/>
+          </p:cNvSpPr>
+          <p:nvPr>
+            <p:ph type="ftr" sz="quarter" idx="4"/>
+          </p:nvPr>
+        </p:nvSpPr>
+        <p:spPr>
+          <a:xfrm>
+            <a:off x="0" y="8685213"/>
+            <a:ext cx="2971800" cy="457200"/>
+          </a:xfrm>
+          <a:prstGeom prst="rect">
+            <a:avLst/>
+          </a:prstGeom>
+        </p:spPr>
+        <p:txBody>
+          <a:bodyPr vert="horz" lIns="91440" tIns="45720" rIns="91440" bIns="45720" rtlCol="0" anchor="b"/>
+          <a:lstStyle>
+            <a:lvl1pPr algn="l">
+              <a:defRPr sz="1200"/>
+            </a:lvl1pPr>
+          </a:lstStyle>
+          <a:p>
+            <a:endParaRPr lang="en-US"/>
+          </a:p>
+        </p:txBody>
+      </p:sp>
+      <p:sp>
+        <p:nvSpPr>
+          <p:cNvPr id="7" name="Slide Number Placeholder 6"/>
+          <p:cNvSpPr>
+            <a:spLocks noGrp="1"/>
+          </p:cNvSpPr>
+          <p:nvPr>
+            <p:ph type="sldNum" sz="quarter" idx="5"/>
+          </p:nvPr>
+        </p:nvSpPr>
+        <p:spPr>
+          <a:xfrm>
+            <a:off x="3884613" y="8685213"/>
+            <a:ext cx="2971800" cy="457200"/>
+          </a:xfrm>
+          <a:prstGeom prst="rect">
+            <a:avLst/>
+          </a:prstGeom>
+        </p:spPr>
+        <p:txBody>
+          <a:bodyPr vert="horz" lIns="91440" tIns="45720" rIns="91440" bIns="45720" rtlCol="0" anchor="b"/>
+          <a:lstStyle>
+            <a:lvl1pPr algn="r">
+              <a:defRPr sz="1200"/>
+            </a:lvl1pPr>
+          </a:lstStyle>
+          <a:p>
+            <a:fld id="{BB5E49A5-4136-284D-997B-48E1D791AD67}" type="slidenum">
+              <a:rPr lang="en-US" smtClean="0"/>
+              <a:t>‹#›</a:t>
+            </a:fld>
+            <a:endParaRPr lang="en-US"/>
+          </a:p>
+        </p:txBody>
+      </p:sp>
+    </p:spTree>
+    <p:extLst>
+      <p:ext uri="{BB962C8B-B14F-4D97-AF65-F5344CB8AC3E}">
+        <p14:creationId xmlns:p14="http://schemas.microsoft.com/office/powerpoint/2010/main" val="2623252185"/>
+      </p:ext>
+    </p:extLst>
+  </p:cSld>
+  <p:clrMap bg1="lt1" tx1="dk1" bg2="lt2" tx2="dk2" accent1="accent1" accent2="accent2" accent3="accent3" accent4="accent4" accent5="accent5" accent6="accent6" hlink="hlink" folHlink="folHlink"/>
+  <p:notesStyle>
+    <a:lvl1pPr marL="0" algn="l" defTabSz="457200" rtl="0" eaLnBrk="1" latinLnBrk="0" hangingPunct="1">
+      <a:defRPr sz="1200" kern="1200">
+        <a:solidFill>
+          <a:schemeClr val="tx1"/>
+        </a:solidFill>
+        <a:latin typeface="+mn-lt"/>
+        <a:ea typeface="+mn-ea"/>
+        <a:cs typeface="+mn-cs"/>
+      </a:defRPr>
+    </a:lvl1pPr>
+    <a:lvl2pPr marL="457200" algn="l" defTabSz="457200" rtl="0" eaLnBrk="1" latinLnBrk="0" hangingPunct="1">
+      <a:defRPr sz="1200" kern="1200">
+        <a:solidFill>
+          <a:schemeClr val="tx1"/>
+        </a:solidFill>
+        <a:latin typeface="+mn-lt"/>
+        <a:ea typeface="+mn-ea"/>
+        <a:cs typeface="+mn-cs"/>
+      </a:defRPr>
+    </a:lvl2pPr>
+    <a:lvl3pPr marL="914400" algn="l" defTabSz="457200" rtl="0" eaLnBrk="1" latinLnBrk="0" hangingPunct="1">
+      <a:defRPr sz="1200" kern="1200">
+        <a:solidFill>
+          <a:schemeClr val="tx1"/>
+        </a:solidFill>
+        <a:latin typeface="+mn-lt"/>
+        <a:ea typeface="+mn-ea"/>
+        <a:cs typeface="+mn-cs"/>
+      </a:defRPr>
+    </a:lvl3pPr>
+    <a:lvl4pPr marL="1371600" algn="l" defTabSz="457200" rtl="0" eaLnBrk="1" latinLnBrk="0" hangingPunct="1">
+      <a:defRPr sz="1200" kern="1200">
+        <a:solidFill>
+          <a:schemeClr val="tx1"/>
+        </a:solidFill>
+        <a:latin typeface="+mn-lt"/>
+        <a:ea typeface="+mn-ea"/>
+        <a:cs typeface="+mn-cs"/>
+      </a:defRPr>
+    </a:lvl4pPr>
+    <a:lvl5pPr marL="1828800" algn="l" defTabSz="457200" rtl="0" eaLnBrk="1" latinLnBrk="0" hangingPunct="1">
+      <a:defRPr sz="1200" kern="1200">
+        <a:solidFill>
+          <a:schemeClr val="tx1"/>
+        </a:solidFill>
+        <a:latin typeface="+mn-lt"/>
+        <a:ea typeface="+mn-ea"/>
+        <a:cs typeface="+mn-cs"/>
+      </a:defRPr>
+    </a:lvl5pPr>
+    <a:lvl6pPr marL="2286000" algn="l" defTabSz="457200" rtl="0" eaLnBrk="1" latinLnBrk="0" hangingPunct="1">
+      <a:defRPr sz="1200" kern="1200">
+        <a:solidFill>
+          <a:schemeClr val="tx1"/>
+        </a:solidFill>
+        <a:latin typeface="+mn-lt"/>
+        <a:ea typeface="+mn-ea"/>
+        <a:cs typeface="+mn-cs"/>
+      </a:defRPr>
+    </a:lvl6pPr>
+    <a:lvl7pPr marL="2743200" algn="l" defTabSz="457200" rtl="0" eaLnBrk="1" latinLnBrk="0" hangingPunct="1">
+      <a:defRPr sz="1200" kern="1200">
+        <a:solidFill>
+          <a:schemeClr val="tx1"/>
+        </a:solidFill>
+        <a:latin typeface="+mn-lt"/>
+        <a:ea typeface="+mn-ea"/>
+        <a:cs typeface="+mn-cs"/>
+      </a:defRPr>
+    </a:lvl7pPr>
+    <a:lvl8pPr marL="3200400" algn="l" defTabSz="457200" rtl="0" eaLnBrk="1" latinLnBrk="0" hangingPunct="1">
+      <a:defRPr sz="1200" kern="1200">
+        <a:solidFill>
+          <a:schemeClr val="tx1"/>
+        </a:solidFill>
+        <a:latin typeface="+mn-lt"/>
+        <a:ea typeface="+mn-ea"/>
+        <a:cs typeface="+mn-cs"/>
+      </a:defRPr>
+    </a:lvl8pPr>
+    <a:lvl9pPr marL="3657600" algn="l" defTabSz="457200" rtl="0" eaLnBrk="1" latinLnBrk="0" hangingPunct="1">
+      <a:defRPr sz="1200" kern="1200">
+        <a:solidFill>
+          <a:schemeClr val="tx1"/>
+        </a:solidFill>
+        <a:latin typeface="+mn-lt"/>
+        <a:ea typeface="+mn-ea"/>
+        <a:cs typeface="+mn-cs"/>
+      </a:defRPr>
+    </a:lvl9pPr>
+  </p:notesStyle>
+</p:notesMaster>
+</file>
+
+<file path=ppt/notesSlides/notesSlide1.xml><?xml version="1.0" encoding="utf-8"?>
+<p:notes xmlns:a="http://schemas.openxmlformats.org/drawingml/2006/main" xmlns:p="http://schemas.openxmlformats.org/presentationml/2006/main" xmlns:r="http://schemas.openxmlformats.org/officeDocument/2006/relationships">
+  <p:cSld>
+    <p:spTree>
+      <p:nvGrpSpPr>
+        <p:cNvPr id="1" name=""/>
+        <p:cNvGrpSpPr/>
+        <p:nvPr/>
+      </p:nvGrpSpPr>
+      <p:grpSpPr>
+        <a:xfrm>
+          <a:off x="0" y="0"/>
+          <a:ext cx="0" cy="0"/>
+          <a:chOff x="0" y="0"/>
+          <a:chExt cx="0" cy="0"/>
+        </a:xfrm>
+      </p:grpSpPr>
+      <p:sp>
+        <p:nvSpPr>
+          <p:cNvPr id="2" name="Slide Image Placeholder 1"/>
+          <p:cNvSpPr>
+            <a:spLocks noGrp="1"/>
+          </p:cNvSpPr>
+          <p:nvPr>
+            <p:ph type="sldImg" idx="2"/>
+          </p:nvPr>
+        </p:nvSpPr>
+        <p:spPr/>
+      </p:sp>
+      <p:sp>
+        <p:nvSpPr>
+          <p:cNvPr id="3" name="Notes Placeholder 2"/>
+          <p:cNvSpPr>
+            <a:spLocks noGrp="1"/>
+          </p:cNvSpPr>
+          <p:nvPr>
+            <p:ph type="body" idx="3" sz="quarter"/>
+          </p:nvPr>
+        </p:nvSpPr>
+        <p:spPr/>
+        <p:txBody>
+          <a:bodyPr/>
+          <a:lstStyle/>
+          <a:p>
+            <a:r>
+              <a:t>TerraAlarm - Enterprise Product Specification</a:t>
+            </a:r>
+          </a:p>
+          <a:p>
+            <a:r>
+              <a:t>Tagline: ISA 18.2 Enterprise Alarm Lifecycle &amp; Chattering Suppression Engine</a:t>
+            </a:r>
+          </a:p>
+          <a:p/>
+          <a:p>
+            <a:r>
+              <a:t>Outcome Quote:</a:t>
+            </a:r>
+          </a:p>
+          <a:p>
+            <a:r>
+              <a:t>“ISA 18.2 based alarm system eradicating nuisance alarm floods and guiding operators to instant root-cause resolution.” (— THE OUTCOME-BASED REVOLUTION)</a:t>
+            </a:r>
+          </a:p>
+          <a:p/>
+          <a:p>
+            <a:r>
+              <a:t>Executive Overview:</a:t>
+            </a:r>
+          </a:p>
+          <a:p>
+            <a:r>
+              <a:t>TerraAlarm provides an enterprise-grade alarm management system built strictly to ANSI/ISA 18.2 and EEMUA 191 standards. Engineered with an enterprise event streaming core, it manages the complete alarm lifecycle, suppresses chattering alarms, and correlates Sequence of Events (SOE) across distributed substations and industrial plants.</a:t>
+            </a:r>
+          </a:p>
+          <a:p/>
+          <a:p>
+            <a:r>
+              <a:t>Key Telemetry Metrics:</a:t>
+            </a:r>
+          </a:p>
+          <a:p>
+            <a:r>
+              <a:t>- ALARM MANAGEMENT:: EEMUA 191 / ISA-18.2</a:t>
+            </a:r>
+          </a:p>
+          <a:p>
+            <a:r>
+              <a:t>- CHATTERING SUPPRESSION:: 99.2% Cleansed</a:t>
+            </a:r>
+          </a:p>
+          <a:p>
+            <a:r>
+              <a:t>- ROOT CAUSE TRACE:: Bayesian Directed Graph</a:t>
+            </a:r>
+          </a:p>
+          <a:p>
+            <a:r>
+              <a:t>- OPERATOR LOAD:: &lt; 1 Alarm / 10 Min</a:t>
+            </a:r>
+          </a:p>
+        </p:txBody>
+      </p:sp>
+      <p:sp>
+        <p:nvSpPr>
+          <p:cNvPr id="4" name="Slide Number Placeholder 3"/>
+          <p:cNvSpPr>
+            <a:spLocks noGrp="1"/>
+          </p:cNvSpPr>
+          <p:nvPr>
+            <p:ph type="sldNum" idx="5" sz="quarter"/>
+          </p:nvPr>
+        </p:nvSpPr>
+        <p:spPr/>
+      </p:sp>
+    </p:spTree>
+  </p:cSld>
+  <p:clrMapOvr>
+    <a:masterClrMapping/>
+  </p:clrMapOvr>
+</p:notes>
+</file>
+
+<file path=ppt/notesSlides/notesSlide2.xml><?xml version="1.0" encoding="utf-8"?>
+<p:notes xmlns:a="http://schemas.openxmlformats.org/drawingml/2006/main" xmlns:p="http://schemas.openxmlformats.org/presentationml/2006/main" xmlns:r="http://schemas.openxmlformats.org/officeDocument/2006/relationships">
+  <p:cSld>
+    <p:spTree>
+      <p:nvGrpSpPr>
+        <p:cNvPr id="1" name=""/>
+        <p:cNvGrpSpPr/>
+        <p:nvPr/>
+      </p:nvGrpSpPr>
+      <p:grpSpPr>
+        <a:xfrm>
+          <a:off x="0" y="0"/>
+          <a:ext cx="0" cy="0"/>
+          <a:chOff x="0" y="0"/>
+          <a:chExt cx="0" cy="0"/>
+        </a:xfrm>
+      </p:grpSpPr>
+      <p:sp>
+        <p:nvSpPr>
+          <p:cNvPr id="2" name="Slide Image Placeholder 1"/>
+          <p:cNvSpPr>
+            <a:spLocks noGrp="1"/>
+          </p:cNvSpPr>
+          <p:nvPr>
+            <p:ph type="sldImg" idx="2"/>
+          </p:nvPr>
+        </p:nvSpPr>
+        <p:spPr/>
+      </p:sp>
+      <p:sp>
+        <p:nvSpPr>
+          <p:cNvPr id="3" name="Notes Placeholder 2"/>
+          <p:cNvSpPr>
+            <a:spLocks noGrp="1"/>
+          </p:cNvSpPr>
+          <p:nvPr>
+            <p:ph type="body" idx="3" sz="quarter"/>
+          </p:nvPr>
+        </p:nvSpPr>
+        <p:spPr/>
+        <p:txBody>
+          <a:bodyPr/>
+          <a:lstStyle/>
+          <a:p>
+            <a:r>
+              <a:t>TerraAlarm - ANSI/ISA-101 Verified Operational Interface</a:t>
+            </a:r>
+          </a:p>
+          <a:p>
+            <a:r>
+              <a:t>Representation: TerraAlarm ANSI/ISA-101 Operational Interface &amp; Real-Time System Representation</a:t>
+            </a:r>
+          </a:p>
+          <a:p>
+            <a:r>
+              <a:t>Compliance: ANSI/ISA-101 Verified HMI</a:t>
+            </a:r>
+          </a:p>
+          <a:p>
+            <a:r>
+              <a:t>Asset File: terra_alarm_showcase.jpg</a:t>
+            </a:r>
+          </a:p>
+        </p:txBody>
+      </p:sp>
+      <p:sp>
+        <p:nvSpPr>
+          <p:cNvPr id="4" name="Slide Number Placeholder 3"/>
+          <p:cNvSpPr>
+            <a:spLocks noGrp="1"/>
+          </p:cNvSpPr>
+          <p:nvPr>
+            <p:ph type="sldNum" idx="5" sz="quarter"/>
+          </p:nvPr>
+        </p:nvSpPr>
+        <p:spPr/>
+      </p:sp>
+    </p:spTree>
+  </p:cSld>
+  <p:clrMapOvr>
+    <a:masterClrMapping/>
+  </p:clrMapOvr>
+</p:notes>
+</file>
+
+<file path=ppt/notesSlides/notesSlide3.xml><?xml version="1.0" encoding="utf-8"?>
+<p:notes xmlns:a="http://schemas.openxmlformats.org/drawingml/2006/main" xmlns:p="http://schemas.openxmlformats.org/presentationml/2006/main" xmlns:r="http://schemas.openxmlformats.org/officeDocument/2006/relationships">
+  <p:cSld>
+    <p:spTree>
+      <p:nvGrpSpPr>
+        <p:cNvPr id="1" name=""/>
+        <p:cNvGrpSpPr/>
+        <p:nvPr/>
+      </p:nvGrpSpPr>
+      <p:grpSpPr>
+        <a:xfrm>
+          <a:off x="0" y="0"/>
+          <a:ext cx="0" cy="0"/>
+          <a:chOff x="0" y="0"/>
+          <a:chExt cx="0" cy="0"/>
+        </a:xfrm>
+      </p:grpSpPr>
+      <p:sp>
+        <p:nvSpPr>
+          <p:cNvPr id="2" name="Slide Image Placeholder 1"/>
+          <p:cNvSpPr>
+            <a:spLocks noGrp="1"/>
+          </p:cNvSpPr>
+          <p:nvPr>
+            <p:ph type="sldImg" idx="2"/>
+          </p:nvPr>
+        </p:nvSpPr>
+        <p:spPr/>
+      </p:sp>
+      <p:sp>
+        <p:nvSpPr>
+          <p:cNvPr id="3" name="Notes Placeholder 2"/>
+          <p:cNvSpPr>
+            <a:spLocks noGrp="1"/>
+          </p:cNvSpPr>
+          <p:nvPr>
+            <p:ph type="body" idx="3" sz="quarter"/>
+          </p:nvPr>
+        </p:nvSpPr>
+        <p:spPr/>
+        <p:txBody>
+          <a:bodyPr/>
+          <a:lstStyle/>
+          <a:p>
+            <a:r>
+              <a:t>What TerraAlarm Will Do:</a:t>
+            </a:r>
+          </a:p>
+          <a:p>
+            <a:r>
+              <a:t>[1] Alarm Lifecycle Management:</a:t>
+            </a:r>
+          </a:p>
+          <a:p>
+            <a:r>
+              <a:t>Configurable alarm generation, prioritization, acknowledgment, shelving, suppression, escalation, and closure.</a:t>
+            </a:r>
+          </a:p>
+          <a:p/>
+          <a:p>
+            <a:r>
+              <a:t>[2] Event Correlation &amp; SOE Synchronization:</a:t>
+            </a:r>
+          </a:p>
+          <a:p>
+            <a:r>
+              <a:t>Centralized event correlation with synchronized timestamps for Sequence of Events (SOE) disturbance investigation.</a:t>
+            </a:r>
+          </a:p>
+          <a:p/>
+          <a:p>
+            <a:r>
+              <a:t>[3] Chattering Alarm Detection &amp; Suppression:</a:t>
+            </a:r>
+          </a:p>
+          <a:p>
+            <a:r>
+              <a:t>Detects rapid oscillatory alarms and automatically applies deadbands or temporary shelving.</a:t>
+            </a:r>
+          </a:p>
+          <a:p/>
+          <a:p>
+            <a:r>
+              <a:t>[4] Enterprise High-Throughput Event Core:</a:t>
+            </a:r>
+          </a:p>
+          <a:p>
+            <a:r>
+              <a:t>Enterprise architecture with dedicated tenant data segregation, secure multi-tenant access, and deterministic real-time event streaming.</a:t>
+            </a:r>
+          </a:p>
+        </p:txBody>
+      </p:sp>
+      <p:sp>
+        <p:nvSpPr>
+          <p:cNvPr id="4" name="Slide Number Placeholder 3"/>
+          <p:cNvSpPr>
+            <a:spLocks noGrp="1"/>
+          </p:cNvSpPr>
+          <p:nvPr>
+            <p:ph type="sldNum" idx="5" sz="quarter"/>
+          </p:nvPr>
+        </p:nvSpPr>
+        <p:spPr/>
+      </p:sp>
+    </p:spTree>
+  </p:cSld>
+  <p:clrMapOvr>
+    <a:masterClrMapping/>
+  </p:clrMapOvr>
+</p:notes>
+</file>
+
+<file path=ppt/notesSlides/notesSlide4.xml><?xml version="1.0" encoding="utf-8"?>
+<p:notes xmlns:a="http://schemas.openxmlformats.org/drawingml/2006/main" xmlns:p="http://schemas.openxmlformats.org/presentationml/2006/main" xmlns:r="http://schemas.openxmlformats.org/officeDocument/2006/relationships">
+  <p:cSld>
+    <p:spTree>
+      <p:nvGrpSpPr>
+        <p:cNvPr id="1" name=""/>
+        <p:cNvGrpSpPr/>
+        <p:nvPr/>
+      </p:nvGrpSpPr>
+      <p:grpSpPr>
+        <a:xfrm>
+          <a:off x="0" y="0"/>
+          <a:ext cx="0" cy="0"/>
+          <a:chOff x="0" y="0"/>
+          <a:chExt cx="0" cy="0"/>
+        </a:xfrm>
+      </p:grpSpPr>
+      <p:sp>
+        <p:nvSpPr>
+          <p:cNvPr id="2" name="Slide Image Placeholder 1"/>
+          <p:cNvSpPr>
+            <a:spLocks noGrp="1"/>
+          </p:cNvSpPr>
+          <p:nvPr>
+            <p:ph type="sldImg" idx="2"/>
+          </p:nvPr>
+        </p:nvSpPr>
+        <p:spPr/>
+      </p:sp>
+      <p:sp>
+        <p:nvSpPr>
+          <p:cNvPr id="3" name="Notes Placeholder 2"/>
+          <p:cNvSpPr>
+            <a:spLocks noGrp="1"/>
+          </p:cNvSpPr>
+          <p:nvPr>
+            <p:ph type="body" idx="3" sz="quarter"/>
+          </p:nvPr>
+        </p:nvSpPr>
+        <p:spPr/>
+        <p:txBody>
+          <a:bodyPr/>
+          <a:lstStyle/>
+          <a:p>
+            <a:r>
+              <a:t>TerraAlarm - Operational Use Cases &amp; Field Impact:</a:t>
+            </a:r>
+          </a:p>
+          <a:p>
+            <a:r>
+              <a:t>[Productivity &amp; Safety] Productivity &amp; Safety (Alarm Lifecycle Management):</a:t>
+            </a:r>
+          </a:p>
+          <a:p>
+            <a:r>
+              <a:t>Configurable alarm generation, prioritization, acknowledgment, shelving, suppression, escalation, and closure conforming to ISA 18.2 standards.</a:t>
+            </a:r>
+          </a:p>
+          <a:p/>
+          <a:p>
+            <a:r>
+              <a:t>[QA &amp; Forensics] QA &amp; Forensics (Event Correlation &amp; SOE):</a:t>
+            </a:r>
+          </a:p>
+          <a:p>
+            <a:r>
+              <a:t>Centralized event correlation with synchronized microsecond timestamps for Sequence of Events (SOE) analysis and fast disturbance investigation.</a:t>
+            </a:r>
+          </a:p>
+          <a:p/>
+          <a:p>
+            <a:r>
+              <a:t>[Efficiency] Efficiency (Alarm Analytics &amp; Chattering Suppression):</a:t>
+            </a:r>
+          </a:p>
+          <a:p>
+            <a:r>
+              <a:t>Automated alarm trending, chattering alarm detection, nuisance alarm pattern analysis, and dynamic alarm flood suppression.</a:t>
+            </a:r>
+          </a:p>
+          <a:p/>
+          <a:p>
+            <a:r>
+              <a:t>[Reduced Manpower] Reduced Manpower (Substation Cascade Trip Protection):</a:t>
+            </a:r>
+          </a:p>
+          <a:p>
+            <a:r>
+              <a:t>When a transmission line trips, automatically suppresses downstream secondary feeder alarms, guiding operators to the root cause.</a:t>
+            </a:r>
+          </a:p>
+        </p:txBody>
+      </p:sp>
+      <p:sp>
+        <p:nvSpPr>
+          <p:cNvPr id="4" name="Slide Number Placeholder 3"/>
+          <p:cNvSpPr>
+            <a:spLocks noGrp="1"/>
+          </p:cNvSpPr>
+          <p:nvPr>
+            <p:ph type="sldNum" idx="5" sz="quarter"/>
+          </p:nvPr>
+        </p:nvSpPr>
+        <p:spPr/>
+      </p:sp>
+    </p:spTree>
+  </p:cSld>
+  <p:clrMapOvr>
+    <a:masterClrMapping/>
+  </p:clrMapOvr>
+</p:notes>
+</file>
+
+<file path=ppt/notesSlides/notesSlide5.xml><?xml version="1.0" encoding="utf-8"?>
+<p:notes xmlns:a="http://schemas.openxmlformats.org/drawingml/2006/main" xmlns:p="http://schemas.openxmlformats.org/presentationml/2006/main" xmlns:r="http://schemas.openxmlformats.org/officeDocument/2006/relationships">
+  <p:cSld>
+    <p:spTree>
+      <p:nvGrpSpPr>
+        <p:cNvPr id="1" name=""/>
+        <p:cNvGrpSpPr/>
+        <p:nvPr/>
+      </p:nvGrpSpPr>
+      <p:grpSpPr>
+        <a:xfrm>
+          <a:off x="0" y="0"/>
+          <a:ext cx="0" cy="0"/>
+          <a:chOff x="0" y="0"/>
+          <a:chExt cx="0" cy="0"/>
+        </a:xfrm>
+      </p:grpSpPr>
+      <p:sp>
+        <p:nvSpPr>
+          <p:cNvPr id="2" name="Slide Image Placeholder 1"/>
+          <p:cNvSpPr>
+            <a:spLocks noGrp="1"/>
+          </p:cNvSpPr>
+          <p:nvPr>
+            <p:ph type="sldImg" idx="2"/>
+          </p:nvPr>
+        </p:nvSpPr>
+        <p:spPr/>
+      </p:sp>
+      <p:sp>
+        <p:nvSpPr>
+          <p:cNvPr id="3" name="Notes Placeholder 2"/>
+          <p:cNvSpPr>
+            <a:spLocks noGrp="1"/>
+          </p:cNvSpPr>
+          <p:nvPr>
+            <p:ph type="body" idx="3" sz="quarter"/>
+          </p:nvPr>
+        </p:nvSpPr>
+        <p:spPr/>
+        <p:txBody>
+          <a:bodyPr/>
+          <a:lstStyle/>
+          <a:p>
+            <a:r>
+              <a:t>TerraAlarm - Architectural Contrast (Legacy SCADA vs Terrestrial Platform):</a:t>
+            </a:r>
+          </a:p>
+          <a:p>
+            <a:r>
+              <a:t>LEGACY:</a:t>
+            </a:r>
+          </a:p>
+          <a:p>
+            <a:r>
+              <a:t>Hundreds of alarms firing every minute during a trip, overwhelming operators into cognitive paralysis.</a:t>
+            </a:r>
+          </a:p>
+          <a:p/>
+          <a:p>
+            <a:r>
+              <a:t>TERRESTRIAL ADVANTAGE:</a:t>
+            </a:r>
+          </a:p>
+          <a:p>
+            <a:r>
+              <a:t>Dynamic state-based shelving and alarm suppression isolating the single initiating event.</a:t>
+            </a:r>
+          </a:p>
+          <a:p/>
+          <a:p>
+            <a:r>
+              <a:t>LEGACY:</a:t>
+            </a:r>
+          </a:p>
+          <a:p>
+            <a:r>
+              <a:t>Chattering alarms flickering due to bad sensor wiring or loose thresholds left unaddressed for months.</a:t>
+            </a:r>
+          </a:p>
+          <a:p/>
+          <a:p>
+            <a:r>
+              <a:t>TERRESTRIAL ADVANTAGE:</a:t>
+            </a:r>
+          </a:p>
+          <a:p>
+            <a:r>
+              <a:t>Automated chattering detection algorithms with automated deadband adjustments and health flagging.</a:t>
+            </a:r>
+          </a:p>
+          <a:p/>
+          <a:p>
+            <a:r>
+              <a:t>LEGACY:</a:t>
+            </a:r>
+          </a:p>
+          <a:p>
+            <a:r>
+              <a:t>Alarms with cryptic 8-character tag names and zero actionable guidance.</a:t>
+            </a:r>
+          </a:p>
+          <a:p/>
+          <a:p>
+            <a:r>
+              <a:t>TERRESTRIAL ADVANTAGE:</a:t>
+            </a:r>
+          </a:p>
+          <a:p>
+            <a:r>
+              <a:t>Context-rich alarm cards with verified Standard Operating Procedures (SOPs) and 1-click mitigation actions.</a:t>
+            </a:r>
+          </a:p>
+        </p:txBody>
+      </p:sp>
+      <p:sp>
+        <p:nvSpPr>
+          <p:cNvPr id="4" name="Slide Number Placeholder 3"/>
+          <p:cNvSpPr>
+            <a:spLocks noGrp="1"/>
+          </p:cNvSpPr>
+          <p:nvPr>
+            <p:ph type="sldNum" idx="5" sz="quarter"/>
+          </p:nvPr>
+        </p:nvSpPr>
+        <p:spPr/>
+      </p:sp>
+    </p:spTree>
+  </p:cSld>
+  <p:clrMapOvr>
+    <a:masterClrMapping/>
+  </p:clrMapOvr>
+</p:notes>
+</file>
+
+<file path=ppt/notesSlides/notesSlide6.xml><?xml version="1.0" encoding="utf-8"?>
+<p:notes xmlns:a="http://schemas.openxmlformats.org/drawingml/2006/main" xmlns:p="http://schemas.openxmlformats.org/presentationml/2006/main" xmlns:r="http://schemas.openxmlformats.org/officeDocument/2006/relationships">
+  <p:cSld>
+    <p:spTree>
+      <p:nvGrpSpPr>
+        <p:cNvPr id="1" name=""/>
+        <p:cNvGrpSpPr/>
+        <p:nvPr/>
+      </p:nvGrpSpPr>
+      <p:grpSpPr>
+        <a:xfrm>
+          <a:off x="0" y="0"/>
+          <a:ext cx="0" cy="0"/>
+          <a:chOff x="0" y="0"/>
+          <a:chExt cx="0" cy="0"/>
+        </a:xfrm>
+      </p:grpSpPr>
+      <p:sp>
+        <p:nvSpPr>
+          <p:cNvPr id="2" name="Slide Image Placeholder 1"/>
+          <p:cNvSpPr>
+            <a:spLocks noGrp="1"/>
+          </p:cNvSpPr>
+          <p:nvPr>
+            <p:ph type="sldImg" idx="2"/>
+          </p:nvPr>
+        </p:nvSpPr>
+        <p:spPr/>
+      </p:sp>
+      <p:sp>
+        <p:nvSpPr>
+          <p:cNvPr id="3" name="Notes Placeholder 2"/>
+          <p:cNvSpPr>
+            <a:spLocks noGrp="1"/>
+          </p:cNvSpPr>
+          <p:nvPr>
+            <p:ph type="body" idx="3" sz="quarter"/>
+          </p:nvPr>
+        </p:nvSpPr>
+        <p:spPr/>
+        <p:txBody>
+          <a:bodyPr/>
+          <a:lstStyle/>
+          <a:p>
+            <a:r>
+              <a:t>TerraAlarm - End-to-End System Diagram &amp; Data Pipeline:</a:t>
+            </a:r>
+          </a:p>
+          <a:p/>
+          <a:p>
+            <a:r>
+              <a:t>Layer 01: Alarm &amp; SOE Ingestion</a:t>
+            </a:r>
+          </a:p>
+          <a:p>
+            <a:r>
+              <a:t>Sub-millisecond alarm acquisition from substation IEDs, DCS controllers, safety interlocks, and sequence of events (SOE) recorders.</a:t>
+            </a:r>
+          </a:p>
+          <a:p>
+            <a:r>
+              <a:t>Protocols: IEC 61850 MMS Alarms, OPC UA A&amp;C, SOE Contact Inputs</a:t>
+            </a:r>
+          </a:p>
+          <a:p/>
+          <a:p>
+            <a:r>
+              <a:t>Layer 02: Microsecond Event Stamping</a:t>
+            </a:r>
+          </a:p>
+          <a:p>
+            <a:r>
+              <a:t>GPS/IRIG-B synchronized microsecond timestamp correlation, high-throughput alarm event buffering, and deduplication fabric.</a:t>
+            </a:r>
+          </a:p>
+          <a:p>
+            <a:r>
+              <a:t>Protocols: GPS/IRIG-B Time-Sync, SOE Event Pipeline, Alarm Stream Bus</a:t>
+            </a:r>
+          </a:p>
+          <a:p/>
+          <a:p>
+            <a:r>
+              <a:t>Layer 03: Flood Suppression Core</a:t>
+            </a:r>
+          </a:p>
+          <a:p>
+            <a:r>
+              <a:t>Dynamic alarm chatter suppression, state-based alarm masking, root-cause propagation trees, and ANSI/ISA 18.2 / EEMUA 191 KPIs.</a:t>
+            </a:r>
+          </a:p>
+          <a:p>
+            <a:r>
+              <a:t>Protocols: Flood Suppression AI, ISA 18.2 Rationalizer, Root-Cause Trees</a:t>
+            </a:r>
+          </a:p>
+          <a:p/>
+          <a:p>
+            <a:r>
+              <a:t>Layer 04: Operator Shelving Cockpit</a:t>
+            </a:r>
+          </a:p>
+          <a:p>
+            <a:r>
+              <a:t>Dynamic alarm priority gating, automated operator shelving workflows, SIL-3 2oo3 interlock audits, and ISA-101 alarm summary banners.</a:t>
+            </a:r>
+          </a:p>
+          <a:p>
+            <a:r>
+              <a:t>Protocols: Priority Gating, Automated Shelving, ISA-101 Alarm Banner</a:t>
+            </a:r>
+          </a:p>
+          <a:p/>
+          <a:p>
+            <a:r>
+              <a:t>Pipeline Flow:</a:t>
+            </a:r>
+          </a:p>
+          <a:p>
+            <a:r>
+              <a:t>DATA PIPELINE FLOW: Sub-Millisecond SOE Inputs ➔ GPS-Synchronized Event Stream ➔ Dynamic Flood &amp; Chattering Suppression ➔ Automated Shelving &amp; Operator Dispatch</a:t>
+            </a:r>
+          </a:p>
+        </p:txBody>
+      </p:sp>
+      <p:sp>
+        <p:nvSpPr>
+          <p:cNvPr id="4" name="Slide Number Placeholder 3"/>
+          <p:cNvSpPr>
+            <a:spLocks noGrp="1"/>
+          </p:cNvSpPr>
+          <p:nvPr>
+            <p:ph type="sldNum" idx="5" sz="quarter"/>
+          </p:nvPr>
+        </p:nvSpPr>
+        <p:spPr/>
+      </p:sp>
+    </p:spTree>
+  </p:cSld>
+  <p:clrMapOvr>
+    <a:masterClrMapping/>
+  </p:clrMapOvr>
+</p:notes>
+</file>
+
+<file path=ppt/notesSlides/notesSlide7.xml><?xml version="1.0" encoding="utf-8"?>
+<p:notes xmlns:a="http://schemas.openxmlformats.org/drawingml/2006/main" xmlns:p="http://schemas.openxmlformats.org/presentationml/2006/main" xmlns:r="http://schemas.openxmlformats.org/officeDocument/2006/relationships">
+  <p:cSld>
+    <p:spTree>
+      <p:nvGrpSpPr>
+        <p:cNvPr id="1" name=""/>
+        <p:cNvGrpSpPr/>
+        <p:nvPr/>
+      </p:nvGrpSpPr>
+      <p:grpSpPr>
+        <a:xfrm>
+          <a:off x="0" y="0"/>
+          <a:ext cx="0" cy="0"/>
+          <a:chOff x="0" y="0"/>
+          <a:chExt cx="0" cy="0"/>
+        </a:xfrm>
+      </p:grpSpPr>
+      <p:sp>
+        <p:nvSpPr>
+          <p:cNvPr id="2" name="Slide Image Placeholder 1"/>
+          <p:cNvSpPr>
+            <a:spLocks noGrp="1"/>
+          </p:cNvSpPr>
+          <p:nvPr>
+            <p:ph type="sldImg" idx="2"/>
+          </p:nvPr>
+        </p:nvSpPr>
+        <p:spPr/>
+      </p:sp>
+      <p:sp>
+        <p:nvSpPr>
+          <p:cNvPr id="3" name="Notes Placeholder 2"/>
+          <p:cNvSpPr>
+            <a:spLocks noGrp="1"/>
+          </p:cNvSpPr>
+          <p:nvPr>
+            <p:ph type="body" idx="3" sz="quarter"/>
+          </p:nvPr>
+        </p:nvSpPr>
+        <p:spPr/>
+        <p:txBody>
+          <a:bodyPr/>
+          <a:lstStyle/>
+          <a:p>
+            <a:r>
+              <a:t>TerraAlarm - System Integrator Deployment Framework &amp; Commercial Model:</a:t>
+            </a:r>
+          </a:p>
+          <a:p/>
+          <a:p>
+            <a:r>
+              <a:t>Phase 1: Connectivity &amp; Audit</a:t>
+            </a:r>
+          </a:p>
+          <a:p>
+            <a:r>
+              <a:t>Phase 2: Twin Calibration</a:t>
+            </a:r>
+          </a:p>
+          <a:p>
+            <a:r>
+              <a:t>Phase 3: Autonomous Go-Live</a:t>
+            </a:r>
+          </a:p>
+          <a:p/>
+          <a:p>
+            <a:r>
+              <a:t>Commercial Enablement:</a:t>
+            </a:r>
+          </a:p>
+          <a:p>
+            <a:r>
+              <a:t>- 25%-35% recurring SaaS margins</a:t>
+            </a:r>
+          </a:p>
+          <a:p>
+            <a:r>
+              <a:t>- 7-14 day rapid commissioning</a:t>
+            </a:r>
+          </a:p>
+          <a:p>
+            <a:r>
+              <a:t>- Co-selling and enterprise enablement support</a:t>
+            </a:r>
+          </a:p>
+        </p:txBody>
+      </p:sp>
+      <p:sp>
+        <p:nvSpPr>
+          <p:cNvPr id="4" name="Slide Number Placeholder 3"/>
+          <p:cNvSpPr>
+            <a:spLocks noGrp="1"/>
+          </p:cNvSpPr>
+          <p:nvPr>
+            <p:ph type="sldNum" idx="5" sz="quarter"/>
+          </p:nvPr>
+        </p:nvSpPr>
+        <p:spPr/>
+      </p:sp>
+    </p:spTree>
+  </p:cSld>
+  <p:clrMapOvr>
+    <a:masterClrMapping/>
+  </p:clrMapOvr>
+</p:notes>
 </file>
 
 <file path=ppt/slideLayouts/slideLayout1.xml><?xml version="1.0" encoding="utf-8"?>
@@ -3108,7 +4280,7 @@
             <a:avLst/>
           </a:prstGeom>
           <a:solidFill>
-            <a:srgbClr val="0A0E1A"/>
+            <a:srgbClr val="0B0F17"/>
           </a:solidFill>
           <a:ln>
             <a:noFill/>
@@ -3144,17 +4316,19 @@
         </p:nvSpPr>
         <p:spPr>
           <a:xfrm>
-            <a:off x="0" y="0"/>
-            <a:ext cx="12191695" cy="54864"/>
+            <a:off x="731520" y="365760"/>
+            <a:ext cx="10728655" cy="18288"/>
           </a:xfrm>
           <a:prstGeom prst="rect">
             <a:avLst/>
           </a:prstGeom>
           <a:solidFill>
-            <a:srgbClr val="00D4FF"/>
+            <a:srgbClr val="38BDF8"/>
           </a:solidFill>
           <a:ln>
-            <a:noFill/>
+            <a:solidFill>
+              <a:srgbClr val="38BDF8"/>
+            </a:solidFill>
           </a:ln>
         </p:spPr>
         <p:style>
@@ -3187,8 +4361,8 @@
         </p:nvSpPr>
         <p:spPr>
           <a:xfrm>
-            <a:off x="731520" y="6446520"/>
-            <a:ext cx="10698480" cy="320040"/>
+            <a:off x="731520" y="438912"/>
+            <a:ext cx="8229600" cy="274320"/>
           </a:xfrm>
           <a:prstGeom prst="rect">
             <a:avLst/>
@@ -3196,20 +4370,20 @@
           <a:noFill/>
         </p:spPr>
         <p:txBody>
-          <a:bodyPr wrap="none">
+          <a:bodyPr wrap="square" lIns="0" rIns="0" tIns="0" bIns="0">
             <a:spAutoFit/>
           </a:bodyPr>
           <a:lstStyle/>
           <a:p>
             <a:pPr>
-              <a:defRPr sz="1000">
-                <a:solidFill>
-                  <a:srgbClr val="94A3B8"/>
-                </a:solidFill>
-              </a:defRPr>
-            </a:pPr>
-            <a:r>
-              <a:t>TERRESTRIAL PLATFORM  |  TERRAALARM CATALOGUE  |  CONFIDENTIAL - AUTHORISED SYSTEM INTEGRATORS ONLY</a:t>
+              <a:defRPr sz="950" b="1">
+                <a:solidFill>
+                  <a:srgbClr val="38BDF8"/>
+                </a:solidFill>
+              </a:defRPr>
+            </a:pPr>
+            <a:r>
+              <a:t>TERRESTRIAL PLATFORM  |  TERRAALARM  |  ENTERPRISE SPECIFICATION</a:t>
             </a:r>
           </a:p>
         </p:txBody>
@@ -3222,8 +4396,8 @@
         </p:nvSpPr>
         <p:spPr>
           <a:xfrm>
-            <a:off x="731520" y="777240"/>
-            <a:ext cx="10698480" cy="3474720"/>
+            <a:off x="731520" y="731520"/>
+            <a:ext cx="9601200" cy="777240"/>
           </a:xfrm>
           <a:prstGeom prst="rect">
             <a:avLst/>
@@ -3231,104 +4405,83 @@
           <a:noFill/>
         </p:spPr>
         <p:txBody>
-          <a:bodyPr wrap="square">
+          <a:bodyPr wrap="square" lIns="0" rIns="0" tIns="0" bIns="0">
             <a:spAutoFit/>
           </a:bodyPr>
           <a:lstStyle/>
           <a:p>
             <a:pPr>
-              <a:spcAft>
-                <a:spcPts val="800"/>
-              </a:spcAft>
-              <a:defRPr sz="1250" b="1">
-                <a:solidFill>
-                  <a:srgbClr val="00D4FF"/>
-                </a:solidFill>
-              </a:defRPr>
-            </a:pPr>
-            <a:r>
-              <a:t>ENTERPRISE PRODUCT SPECIFICATION  |  PLANT ENGINEERING &amp; TWINS</a:t>
-            </a:r>
-          </a:p>
-          <a:p>
-            <a:pPr>
-              <a:spcAft>
-                <a:spcPts val="600"/>
-              </a:spcAft>
-              <a:defRPr sz="4600" b="1">
+              <a:defRPr sz="1900" b="1">
                 <a:solidFill>
                   <a:srgbClr val="FFFFFF"/>
                 </a:solidFill>
               </a:defRPr>
             </a:pPr>
             <a:r>
-              <a:t>TerraAlarm</a:t>
-            </a:r>
-          </a:p>
-          <a:p>
-            <a:pPr>
-              <a:spcAft>
-                <a:spcPts val="1200"/>
-              </a:spcAft>
-              <a:defRPr sz="1900" b="1">
-                <a:solidFill>
-                  <a:srgbClr val="F5C842"/>
-                </a:solidFill>
-              </a:defRPr>
-            </a:pPr>
-            <a:r>
-              <a:t>ISA 18.2 Enterprise Alarm Lifecycle &amp; Chattering Suppression Engine</a:t>
-            </a:r>
-          </a:p>
-          <a:p>
-            <a:pPr>
-              <a:spcAft>
-                <a:spcPts val="1200"/>
-              </a:spcAft>
-              <a:defRPr sz="1400">
-                <a:solidFill>
-                  <a:srgbClr val="C8D8F0"/>
-                </a:solidFill>
-              </a:defRPr>
-            </a:pPr>
-            <a:r>
-              <a:t>Industrial Protocol: ISA 18.2 / EEMUA 191    |    Domain Architecture: Terrestrial Deterministic Edge Core</a:t>
-            </a:r>
-          </a:p>
-          <a:p>
-            <a:pPr>
-              <a:defRPr sz="1500">
+              <a:t>TerraAlarm: ISA 18.2 Enterprise Alarm Lifecycle &amp; Chattering Suppression Engine</a:t>
+            </a:r>
+          </a:p>
+          <a:p>
+            <a:pPr>
+              <a:spcBef>
+                <a:spcPts val="300"/>
+              </a:spcBef>
+              <a:defRPr sz="1050">
                 <a:solidFill>
                   <a:srgbClr val="94A3B8"/>
                 </a:solidFill>
               </a:defRPr>
             </a:pPr>
             <a:r>
-              <a:t>ISA 18.2 Enterprise Alarm Lifecycle &amp; Chattering Suppression Engine</a:t>
-            </a:r>
-          </a:p>
-        </p:txBody>
-      </p:sp>
-      <p:sp>
-        <p:nvSpPr>
-          <p:cNvPr id="6" name="Rounded Rectangle 5"/>
+              <a:t>Autonomous Industrial Intelligence Suite · Tier-1 Plant Architecture</a:t>
+            </a:r>
+          </a:p>
+        </p:txBody>
+      </p:sp>
+      <p:pic>
+        <p:nvPicPr>
+          <p:cNvPr id="6" name="Picture 5" descr="tp_logo_white.png"/>
+          <p:cNvPicPr>
+            <a:picLocks noChangeAspect="1"/>
+          </p:cNvPicPr>
+          <p:nvPr/>
+        </p:nvPicPr>
+        <p:blipFill>
+          <a:blip r:embed="rId2"/>
+          <a:stretch>
+            <a:fillRect/>
+          </a:stretch>
+        </p:blipFill>
+        <p:spPr>
+          <a:xfrm>
+            <a:off x="10469880" y="411480"/>
+            <a:ext cx="987552" cy="384048"/>
+          </a:xfrm>
+          <a:prstGeom prst="rect">
+            <a:avLst/>
+          </a:prstGeom>
+        </p:spPr>
+      </p:pic>
+      <p:sp>
+        <p:nvSpPr>
+          <p:cNvPr id="7" name="Rounded Rectangle 6"/>
           <p:cNvSpPr/>
           <p:nvPr/>
         </p:nvSpPr>
         <p:spPr>
           <a:xfrm>
-            <a:off x="731520" y="4663440"/>
-            <a:ext cx="2523744" cy="1280160"/>
+            <a:off x="731520" y="1691640"/>
+            <a:ext cx="6217920" cy="4663440"/>
           </a:xfrm>
           <a:prstGeom prst="roundRect">
             <a:avLst/>
           </a:prstGeom>
           <a:solidFill>
-            <a:srgbClr val="0F172A"/>
+            <a:srgbClr val="131926"/>
           </a:solidFill>
-          <a:ln>
+          <a:ln w="12700">
             <a:solidFill>
-              <a:srgbClr val="1E293B"/>
+              <a:srgbClr val="28344B"/>
             </a:solidFill>
           </a:ln>
         </p:spPr>
@@ -3347,57 +4500,113 @@
           </a:fontRef>
         </p:style>
         <p:txBody>
-          <a:bodyPr rtlCol="0" anchor="ctr" wrap="square"/>
-          <a:lstStyle/>
-          <a:p>
-            <a:pPr algn="ctr">
+          <a:bodyPr rtlCol="0" anchor="ctr"/>
+          <a:lstStyle/>
+          <a:p>
+            <a:pPr algn="ctr"/>
+          </a:p>
+        </p:txBody>
+      </p:sp>
+      <p:sp>
+        <p:nvSpPr>
+          <p:cNvPr id="8" name="TextBox 7"/>
+          <p:cNvSpPr txBox="1"/>
+          <p:nvPr/>
+        </p:nvSpPr>
+        <p:spPr>
+          <a:xfrm>
+            <a:off x="960120" y="1874519"/>
+            <a:ext cx="5760720" cy="4297680"/>
+          </a:xfrm>
+          <a:prstGeom prst="rect">
+            <a:avLst/>
+          </a:prstGeom>
+          <a:noFill/>
+        </p:spPr>
+        <p:txBody>
+          <a:bodyPr wrap="square" lIns="0" rIns="0" tIns="0" bIns="0">
+            <a:spAutoFit/>
+          </a:bodyPr>
+          <a:lstStyle/>
+          <a:p>
+            <a:pPr>
+              <a:defRPr sz="1200" i="1" b="1">
+                <a:solidFill>
+                  <a:srgbClr val="38BDF8"/>
+                </a:solidFill>
+              </a:defRPr>
+            </a:pPr>
+            <a:r>
+              <a:t>““ISA 18.2 based alarm system eradicating nuisance alarm floods and guiding operators to instant root-cause resolution.””</a:t>
+            </a:r>
+          </a:p>
+          <a:p>
+            <a:pPr>
+              <a:spcBef>
+                <a:spcPts val="400"/>
+              </a:spcBef>
+              <a:spcAft>
+                <a:spcPts val="1200"/>
+              </a:spcAft>
+              <a:defRPr sz="950" b="1">
+                <a:solidFill>
+                  <a:srgbClr val="94A3B8"/>
+                </a:solidFill>
+              </a:defRPr>
+            </a:pPr>
+            <a:r>
+              <a:t>— — THE OUTCOME-BASED REVOLUTION</a:t>
+            </a:r>
+          </a:p>
+          <a:p>
+            <a:pPr>
               <a:spcAft>
                 <a:spcPts val="600"/>
               </a:spcAft>
-              <a:defRPr sz="1100" b="1">
-                <a:solidFill>
-                  <a:srgbClr val="94A3B8"/>
-                </a:solidFill>
-              </a:defRPr>
-            </a:pPr>
-            <a:r>
-              <a:t>ALARM MANAGEMENT</a:t>
-            </a:r>
-          </a:p>
-          <a:p>
-            <a:pPr algn="ctr">
-              <a:defRPr sz="1650" b="1">
-                <a:solidFill>
-                  <a:srgbClr val="00D4FF"/>
-                </a:solidFill>
-              </a:defRPr>
-            </a:pPr>
-            <a:r>
-              <a:t>EEMUA 191 / ISA-18.2</a:t>
-            </a:r>
-          </a:p>
-        </p:txBody>
-      </p:sp>
-      <p:sp>
-        <p:nvSpPr>
-          <p:cNvPr id="7" name="Rounded Rectangle 6"/>
+              <a:defRPr sz="1050" b="1">
+                <a:solidFill>
+                  <a:srgbClr val="FFFFFF"/>
+                </a:solidFill>
+              </a:defRPr>
+            </a:pPr>
+            <a:r>
+              <a:t>EXECUTIVE OPERATIONAL SYNOPSIS</a:t>
+            </a:r>
+          </a:p>
+          <a:p>
+            <a:pPr>
+              <a:defRPr sz="1050">
+                <a:solidFill>
+                  <a:srgbClr val="F1F5F9"/>
+                </a:solidFill>
+              </a:defRPr>
+            </a:pPr>
+            <a:r>
+              <a:t>TerraAlarm provides an enterprise-grade alarm management system built strictly to ANSI/ISA 18.2 and EEMUA 191 standards. Engineered with an enterprise event streaming core, it manages the complete alarm lifecycle, suppresses chattering alarms, and correlates Sequence of Events (SOE) across distributed substations and industrial plants.</a:t>
+            </a:r>
+          </a:p>
+        </p:txBody>
+      </p:sp>
+      <p:sp>
+        <p:nvSpPr>
+          <p:cNvPr id="9" name="Rounded Rectangle 8"/>
           <p:cNvSpPr/>
           <p:nvPr/>
         </p:nvSpPr>
         <p:spPr>
           <a:xfrm>
-            <a:off x="3456432" y="4663440"/>
-            <a:ext cx="2523744" cy="1280160"/>
+            <a:off x="7132320" y="1691640"/>
+            <a:ext cx="2084831" cy="1188720"/>
           </a:xfrm>
           <a:prstGeom prst="roundRect">
             <a:avLst/>
           </a:prstGeom>
           <a:solidFill>
-            <a:srgbClr val="0F172A"/>
+            <a:srgbClr val="131926"/>
           </a:solidFill>
-          <a:ln>
+          <a:ln w="12700">
             <a:solidFill>
-              <a:srgbClr val="1E293B"/>
+              <a:srgbClr val="38BDF8"/>
             </a:solidFill>
           </a:ln>
         </p:spPr>
@@ -3416,57 +4625,83 @@
           </a:fontRef>
         </p:style>
         <p:txBody>
-          <a:bodyPr rtlCol="0" anchor="ctr" wrap="square"/>
-          <a:lstStyle/>
-          <a:p>
-            <a:pPr algn="ctr">
-              <a:spcAft>
-                <a:spcPts val="600"/>
-              </a:spcAft>
-              <a:defRPr sz="1100" b="1">
+          <a:bodyPr rtlCol="0" anchor="ctr"/>
+          <a:lstStyle/>
+          <a:p>
+            <a:pPr algn="ctr"/>
+          </a:p>
+        </p:txBody>
+      </p:sp>
+      <p:sp>
+        <p:nvSpPr>
+          <p:cNvPr id="10" name="TextBox 9"/>
+          <p:cNvSpPr txBox="1"/>
+          <p:nvPr/>
+        </p:nvSpPr>
+        <p:spPr>
+          <a:xfrm>
+            <a:off x="7269480" y="1828800"/>
+            <a:ext cx="1810511" cy="914400"/>
+          </a:xfrm>
+          <a:prstGeom prst="rect">
+            <a:avLst/>
+          </a:prstGeom>
+          <a:noFill/>
+        </p:spPr>
+        <p:txBody>
+          <a:bodyPr wrap="square" lIns="0" rIns="0" tIns="0" bIns="0">
+            <a:spAutoFit/>
+          </a:bodyPr>
+          <a:lstStyle/>
+          <a:p>
+            <a:pPr>
+              <a:defRPr sz="850" b="1">
                 <a:solidFill>
                   <a:srgbClr val="94A3B8"/>
                 </a:solidFill>
               </a:defRPr>
             </a:pPr>
             <a:r>
-              <a:t>CHATTERING SUPPRESSION</a:t>
-            </a:r>
-          </a:p>
-          <a:p>
-            <a:pPr algn="ctr">
-              <a:defRPr sz="1650" b="1">
-                <a:solidFill>
-                  <a:srgbClr val="00D4FF"/>
-                </a:solidFill>
-              </a:defRPr>
-            </a:pPr>
-            <a:r>
-              <a:t>99.2% Cleansed</a:t>
-            </a:r>
-          </a:p>
-        </p:txBody>
-      </p:sp>
-      <p:sp>
-        <p:nvSpPr>
-          <p:cNvPr id="8" name="Rounded Rectangle 7"/>
+              <a:t>ALARM MANAGEMENT</a:t>
+            </a:r>
+          </a:p>
+          <a:p>
+            <a:pPr>
+              <a:spcBef>
+                <a:spcPts val="400"/>
+              </a:spcBef>
+              <a:defRPr sz="1400" b="1">
+                <a:solidFill>
+                  <a:srgbClr val="FFFFFF"/>
+                </a:solidFill>
+              </a:defRPr>
+            </a:pPr>
+            <a:r>
+              <a:t>EEMUA 191 / ISA-18.2</a:t>
+            </a:r>
+          </a:p>
+        </p:txBody>
+      </p:sp>
+      <p:sp>
+        <p:nvSpPr>
+          <p:cNvPr id="11" name="Rounded Rectangle 10"/>
           <p:cNvSpPr/>
           <p:nvPr/>
         </p:nvSpPr>
         <p:spPr>
           <a:xfrm>
-            <a:off x="6181344" y="4663440"/>
-            <a:ext cx="2523744" cy="1280160"/>
+            <a:off x="9381743" y="1691640"/>
+            <a:ext cx="2084831" cy="1188720"/>
           </a:xfrm>
           <a:prstGeom prst="roundRect">
             <a:avLst/>
           </a:prstGeom>
           <a:solidFill>
-            <a:srgbClr val="0F172A"/>
+            <a:srgbClr val="131926"/>
           </a:solidFill>
-          <a:ln>
+          <a:ln w="12700">
             <a:solidFill>
-              <a:srgbClr val="1E293B"/>
+              <a:srgbClr val="38BDF8"/>
             </a:solidFill>
           </a:ln>
         </p:spPr>
@@ -3485,57 +4720,83 @@
           </a:fontRef>
         </p:style>
         <p:txBody>
-          <a:bodyPr rtlCol="0" anchor="ctr" wrap="square"/>
-          <a:lstStyle/>
-          <a:p>
-            <a:pPr algn="ctr">
-              <a:spcAft>
-                <a:spcPts val="600"/>
-              </a:spcAft>
-              <a:defRPr sz="1100" b="1">
+          <a:bodyPr rtlCol="0" anchor="ctr"/>
+          <a:lstStyle/>
+          <a:p>
+            <a:pPr algn="ctr"/>
+          </a:p>
+        </p:txBody>
+      </p:sp>
+      <p:sp>
+        <p:nvSpPr>
+          <p:cNvPr id="12" name="TextBox 11"/>
+          <p:cNvSpPr txBox="1"/>
+          <p:nvPr/>
+        </p:nvSpPr>
+        <p:spPr>
+          <a:xfrm>
+            <a:off x="9518903" y="1828800"/>
+            <a:ext cx="1810511" cy="914400"/>
+          </a:xfrm>
+          <a:prstGeom prst="rect">
+            <a:avLst/>
+          </a:prstGeom>
+          <a:noFill/>
+        </p:spPr>
+        <p:txBody>
+          <a:bodyPr wrap="square" lIns="0" rIns="0" tIns="0" bIns="0">
+            <a:spAutoFit/>
+          </a:bodyPr>
+          <a:lstStyle/>
+          <a:p>
+            <a:pPr>
+              <a:defRPr sz="850" b="1">
                 <a:solidFill>
                   <a:srgbClr val="94A3B8"/>
                 </a:solidFill>
               </a:defRPr>
             </a:pPr>
             <a:r>
-              <a:t>ROOT CAUSE TRACE</a:t>
-            </a:r>
-          </a:p>
-          <a:p>
-            <a:pPr algn="ctr">
-              <a:defRPr sz="1650" b="1">
-                <a:solidFill>
-                  <a:srgbClr val="00D4FF"/>
-                </a:solidFill>
-              </a:defRPr>
-            </a:pPr>
-            <a:r>
-              <a:t>Bayesian Directed Graph</a:t>
-            </a:r>
-          </a:p>
-        </p:txBody>
-      </p:sp>
-      <p:sp>
-        <p:nvSpPr>
-          <p:cNvPr id="9" name="Rounded Rectangle 8"/>
+              <a:t>CHATTERING SUPPRESSION</a:t>
+            </a:r>
+          </a:p>
+          <a:p>
+            <a:pPr>
+              <a:spcBef>
+                <a:spcPts val="400"/>
+              </a:spcBef>
+              <a:defRPr sz="1400" b="1">
+                <a:solidFill>
+                  <a:srgbClr val="34D399"/>
+                </a:solidFill>
+              </a:defRPr>
+            </a:pPr>
+            <a:r>
+              <a:t>99.2% Cleansed</a:t>
+            </a:r>
+          </a:p>
+        </p:txBody>
+      </p:sp>
+      <p:sp>
+        <p:nvSpPr>
+          <p:cNvPr id="13" name="Rounded Rectangle 12"/>
           <p:cNvSpPr/>
           <p:nvPr/>
         </p:nvSpPr>
         <p:spPr>
           <a:xfrm>
-            <a:off x="8906256" y="4663440"/>
-            <a:ext cx="2523744" cy="1280160"/>
+            <a:off x="7132320" y="3044952"/>
+            <a:ext cx="2084831" cy="1188720"/>
           </a:xfrm>
           <a:prstGeom prst="roundRect">
             <a:avLst/>
           </a:prstGeom>
           <a:solidFill>
-            <a:srgbClr val="0F172A"/>
+            <a:srgbClr val="131926"/>
           </a:solidFill>
-          <a:ln>
+          <a:ln w="12700">
             <a:solidFill>
-              <a:srgbClr val="1E293B"/>
+              <a:srgbClr val="38BDF8"/>
             </a:solidFill>
           </a:ln>
         </p:spPr>
@@ -3554,33 +4815,264 @@
           </a:fontRef>
         </p:style>
         <p:txBody>
-          <a:bodyPr rtlCol="0" anchor="ctr" wrap="square"/>
-          <a:lstStyle/>
-          <a:p>
-            <a:pPr algn="ctr">
-              <a:spcAft>
-                <a:spcPts val="600"/>
-              </a:spcAft>
+          <a:bodyPr rtlCol="0" anchor="ctr"/>
+          <a:lstStyle/>
+          <a:p>
+            <a:pPr algn="ctr"/>
+          </a:p>
+        </p:txBody>
+      </p:sp>
+      <p:sp>
+        <p:nvSpPr>
+          <p:cNvPr id="14" name="TextBox 13"/>
+          <p:cNvSpPr txBox="1"/>
+          <p:nvPr/>
+        </p:nvSpPr>
+        <p:spPr>
+          <a:xfrm>
+            <a:off x="7269480" y="3182112"/>
+            <a:ext cx="1810511" cy="914400"/>
+          </a:xfrm>
+          <a:prstGeom prst="rect">
+            <a:avLst/>
+          </a:prstGeom>
+          <a:noFill/>
+        </p:spPr>
+        <p:txBody>
+          <a:bodyPr wrap="square" lIns="0" rIns="0" tIns="0" bIns="0">
+            <a:spAutoFit/>
+          </a:bodyPr>
+          <a:lstStyle/>
+          <a:p>
+            <a:pPr>
+              <a:defRPr sz="850" b="1">
+                <a:solidFill>
+                  <a:srgbClr val="94A3B8"/>
+                </a:solidFill>
+              </a:defRPr>
+            </a:pPr>
+            <a:r>
+              <a:t>ROOT CAUSE TRACE</a:t>
+            </a:r>
+          </a:p>
+          <a:p>
+            <a:pPr>
+              <a:spcBef>
+                <a:spcPts val="400"/>
+              </a:spcBef>
+              <a:defRPr sz="1400" b="1">
+                <a:solidFill>
+                  <a:srgbClr val="FFFFFF"/>
+                </a:solidFill>
+              </a:defRPr>
+            </a:pPr>
+            <a:r>
+              <a:t>Bayesian Directed Graph</a:t>
+            </a:r>
+          </a:p>
+        </p:txBody>
+      </p:sp>
+      <p:sp>
+        <p:nvSpPr>
+          <p:cNvPr id="15" name="Rounded Rectangle 14"/>
+          <p:cNvSpPr/>
+          <p:nvPr/>
+        </p:nvSpPr>
+        <p:spPr>
+          <a:xfrm>
+            <a:off x="9381743" y="3044952"/>
+            <a:ext cx="2084831" cy="1188720"/>
+          </a:xfrm>
+          <a:prstGeom prst="roundRect">
+            <a:avLst/>
+          </a:prstGeom>
+          <a:solidFill>
+            <a:srgbClr val="131926"/>
+          </a:solidFill>
+          <a:ln w="12700">
+            <a:solidFill>
+              <a:srgbClr val="38BDF8"/>
+            </a:solidFill>
+          </a:ln>
+        </p:spPr>
+        <p:style>
+          <a:lnRef idx="1">
+            <a:schemeClr val="accent1"/>
+          </a:lnRef>
+          <a:fillRef idx="3">
+            <a:schemeClr val="accent1"/>
+          </a:fillRef>
+          <a:effectRef idx="2">
+            <a:schemeClr val="accent1"/>
+          </a:effectRef>
+          <a:fontRef idx="minor">
+            <a:schemeClr val="lt1"/>
+          </a:fontRef>
+        </p:style>
+        <p:txBody>
+          <a:bodyPr rtlCol="0" anchor="ctr"/>
+          <a:lstStyle/>
+          <a:p>
+            <a:pPr algn="ctr"/>
+          </a:p>
+        </p:txBody>
+      </p:sp>
+      <p:sp>
+        <p:nvSpPr>
+          <p:cNvPr id="16" name="TextBox 15"/>
+          <p:cNvSpPr txBox="1"/>
+          <p:nvPr/>
+        </p:nvSpPr>
+        <p:spPr>
+          <a:xfrm>
+            <a:off x="9518903" y="3182112"/>
+            <a:ext cx="1810511" cy="914400"/>
+          </a:xfrm>
+          <a:prstGeom prst="rect">
+            <a:avLst/>
+          </a:prstGeom>
+          <a:noFill/>
+        </p:spPr>
+        <p:txBody>
+          <a:bodyPr wrap="square" lIns="0" rIns="0" tIns="0" bIns="0">
+            <a:spAutoFit/>
+          </a:bodyPr>
+          <a:lstStyle/>
+          <a:p>
+            <a:pPr>
+              <a:defRPr sz="850" b="1">
+                <a:solidFill>
+                  <a:srgbClr val="94A3B8"/>
+                </a:solidFill>
+              </a:defRPr>
+            </a:pPr>
+            <a:r>
+              <a:t>OPERATOR LOAD</a:t>
+            </a:r>
+          </a:p>
+          <a:p>
+            <a:pPr>
+              <a:spcBef>
+                <a:spcPts val="400"/>
+              </a:spcBef>
+              <a:defRPr sz="1400" b="1">
+                <a:solidFill>
+                  <a:srgbClr val="38BDF8"/>
+                </a:solidFill>
+              </a:defRPr>
+            </a:pPr>
+            <a:r>
+              <a:t>&lt; 1 Alarm / 10 Min</a:t>
+            </a:r>
+          </a:p>
+        </p:txBody>
+      </p:sp>
+      <p:sp>
+        <p:nvSpPr>
+          <p:cNvPr id="17" name="Rounded Rectangle 16"/>
+          <p:cNvSpPr/>
+          <p:nvPr/>
+        </p:nvSpPr>
+        <p:spPr>
+          <a:xfrm>
+            <a:off x="7132320" y="4434840"/>
+            <a:ext cx="4334256" cy="1920240"/>
+          </a:xfrm>
+          <a:prstGeom prst="roundRect">
+            <a:avLst/>
+          </a:prstGeom>
+          <a:solidFill>
+            <a:srgbClr val="131926"/>
+          </a:solidFill>
+          <a:ln w="12700">
+            <a:solidFill>
+              <a:srgbClr val="28344B"/>
+            </a:solidFill>
+          </a:ln>
+        </p:spPr>
+        <p:style>
+          <a:lnRef idx="1">
+            <a:schemeClr val="accent1"/>
+          </a:lnRef>
+          <a:fillRef idx="3">
+            <a:schemeClr val="accent1"/>
+          </a:fillRef>
+          <a:effectRef idx="2">
+            <a:schemeClr val="accent1"/>
+          </a:effectRef>
+          <a:fontRef idx="minor">
+            <a:schemeClr val="lt1"/>
+          </a:fontRef>
+        </p:style>
+        <p:txBody>
+          <a:bodyPr rtlCol="0" anchor="ctr"/>
+          <a:lstStyle/>
+          <a:p>
+            <a:pPr algn="ctr"/>
+          </a:p>
+        </p:txBody>
+      </p:sp>
+      <p:sp>
+        <p:nvSpPr>
+          <p:cNvPr id="18" name="TextBox 17"/>
+          <p:cNvSpPr txBox="1"/>
+          <p:nvPr/>
+        </p:nvSpPr>
+        <p:spPr>
+          <a:xfrm>
+            <a:off x="7360920" y="4617720"/>
+            <a:ext cx="3840480" cy="1554480"/>
+          </a:xfrm>
+          <a:prstGeom prst="rect">
+            <a:avLst/>
+          </a:prstGeom>
+          <a:noFill/>
+        </p:spPr>
+        <p:txBody>
+          <a:bodyPr wrap="square" lIns="0" rIns="0" tIns="0" bIns="0">
+            <a:spAutoFit/>
+          </a:bodyPr>
+          <a:lstStyle/>
+          <a:p>
+            <a:pPr>
+              <a:defRPr sz="950" b="1">
+                <a:solidFill>
+                  <a:srgbClr val="38BDF8"/>
+                </a:solidFill>
+              </a:defRPr>
+            </a:pPr>
+            <a:r>
+              <a:t>TERRESTRIAL PLATFORM CORE</a:t>
+            </a:r>
+          </a:p>
+          <a:p>
+            <a:pPr>
+              <a:spcBef>
+                <a:spcPts val="200"/>
+              </a:spcBef>
               <a:defRPr sz="1100" b="1">
                 <a:solidFill>
+                  <a:srgbClr val="FFFFFF"/>
+                </a:solidFill>
+              </a:defRPr>
+            </a:pPr>
+            <a:r>
+              <a:t>Edge-to-Cloud Cognitive Nervous System</a:t>
+            </a:r>
+          </a:p>
+          <a:p>
+            <a:pPr>
+              <a:spcBef>
+                <a:spcPts val="400"/>
+              </a:spcBef>
+              <a:defRPr sz="900">
+                <a:solidFill>
                   <a:srgbClr val="94A3B8"/>
                 </a:solidFill>
               </a:defRPr>
             </a:pPr>
             <a:r>
-              <a:t>OPERATOR LOAD</a:t>
-            </a:r>
-          </a:p>
-          <a:p>
-            <a:pPr algn="ctr">
-              <a:defRPr sz="1650" b="1">
-                <a:solidFill>
-                  <a:srgbClr val="00D4FF"/>
-                </a:solidFill>
-              </a:defRPr>
-            </a:pPr>
-            <a:r>
-              <a:t>&lt; 1 Alarm / 10 Min</a:t>
+              <a:t>Physics-informed mathematical twin running sub-25ms closed-loop supervisory control with full ISA-95/101 conformity.</a:t>
             </a:r>
           </a:p>
         </p:txBody>
@@ -3618,7 +5110,7 @@
             <a:avLst/>
           </a:prstGeom>
           <a:solidFill>
-            <a:srgbClr val="0A0E1A"/>
+            <a:srgbClr val="0B0F17"/>
           </a:solidFill>
           <a:ln>
             <a:noFill/>
@@ -3654,17 +5146,19 @@
         </p:nvSpPr>
         <p:spPr>
           <a:xfrm>
-            <a:off x="0" y="0"/>
-            <a:ext cx="12191695" cy="54864"/>
+            <a:off x="731520" y="365760"/>
+            <a:ext cx="10728655" cy="18288"/>
           </a:xfrm>
           <a:prstGeom prst="rect">
             <a:avLst/>
           </a:prstGeom>
           <a:solidFill>
-            <a:srgbClr val="00D4FF"/>
+            <a:srgbClr val="38BDF8"/>
           </a:solidFill>
           <a:ln>
-            <a:noFill/>
+            <a:solidFill>
+              <a:srgbClr val="38BDF8"/>
+            </a:solidFill>
           </a:ln>
         </p:spPr>
         <p:style>
@@ -3697,8 +5191,8 @@
         </p:nvSpPr>
         <p:spPr>
           <a:xfrm>
-            <a:off x="731520" y="365760"/>
-            <a:ext cx="10698480" cy="1005840"/>
+            <a:off x="731520" y="438912"/>
+            <a:ext cx="8229600" cy="274320"/>
           </a:xfrm>
           <a:prstGeom prst="rect">
             <a:avLst/>
@@ -3706,35 +5200,20 @@
           <a:noFill/>
         </p:spPr>
         <p:txBody>
-          <a:bodyPr wrap="square">
+          <a:bodyPr wrap="square" lIns="0" rIns="0" tIns="0" bIns="0">
             <a:spAutoFit/>
           </a:bodyPr>
           <a:lstStyle/>
           <a:p>
             <a:pPr>
-              <a:spcAft>
-                <a:spcPts val="400"/>
-              </a:spcAft>
-              <a:defRPr sz="1150" b="1">
-                <a:solidFill>
-                  <a:srgbClr val="00D4FF"/>
-                </a:solidFill>
-              </a:defRPr>
-            </a:pPr>
-            <a:r>
-              <a:t>TERRAALARM  |  TERRESTRIAL PLATFORM</a:t>
-            </a:r>
-          </a:p>
-          <a:p>
-            <a:pPr>
-              <a:defRPr sz="2500" b="1">
-                <a:solidFill>
-                  <a:srgbClr val="FFFFFF"/>
-                </a:solidFill>
-              </a:defRPr>
-            </a:pPr>
-            <a:r>
-              <a:t>Core Functional Deliverables &amp; Architectural Pillars</a:t>
+              <a:defRPr sz="950" b="1">
+                <a:solidFill>
+                  <a:srgbClr val="38BDF8"/>
+                </a:solidFill>
+              </a:defRPr>
+            </a:pPr>
+            <a:r>
+              <a:t>TERRESTRIAL PLATFORM  |  TERRAALARM  |  OPERATIONAL INTERFACE</a:t>
             </a:r>
           </a:p>
         </p:txBody>
@@ -3747,8 +5226,8 @@
         </p:nvSpPr>
         <p:spPr>
           <a:xfrm>
-            <a:off x="731520" y="6446520"/>
-            <a:ext cx="10698480" cy="320040"/>
+            <a:off x="731520" y="731520"/>
+            <a:ext cx="9601200" cy="777240"/>
           </a:xfrm>
           <a:prstGeom prst="rect">
             <a:avLst/>
@@ -3756,44 +5235,83 @@
           <a:noFill/>
         </p:spPr>
         <p:txBody>
-          <a:bodyPr wrap="none">
+          <a:bodyPr wrap="square" lIns="0" rIns="0" tIns="0" bIns="0">
             <a:spAutoFit/>
           </a:bodyPr>
           <a:lstStyle/>
           <a:p>
             <a:pPr>
-              <a:defRPr sz="1000">
+              <a:defRPr sz="1900" b="1">
+                <a:solidFill>
+                  <a:srgbClr val="FFFFFF"/>
+                </a:solidFill>
+              </a:defRPr>
+            </a:pPr>
+            <a:r>
+              <a:t>TerraAlarm ANSI/ISA-101 Operational Interface &amp; Real-Time System Representation</a:t>
+            </a:r>
+          </a:p>
+          <a:p>
+            <a:pPr>
+              <a:spcBef>
+                <a:spcPts val="300"/>
+              </a:spcBef>
+              <a:defRPr sz="1050">
                 <a:solidFill>
                   <a:srgbClr val="94A3B8"/>
                 </a:solidFill>
               </a:defRPr>
             </a:pPr>
             <a:r>
-              <a:t>TERRESTRIAL PLATFORM  |  TERRAALARM CATALOGUE  |  CONFIDENTIAL - AUTHORISED SYSTEM INTEGRATORS ONLY</a:t>
-            </a:r>
-          </a:p>
-        </p:txBody>
-      </p:sp>
-      <p:sp>
-        <p:nvSpPr>
-          <p:cNvPr id="6" name="Rounded Rectangle 5"/>
+              <a:t>ANSI/ISA-101 Ergonomic High-Performance HMI · Real-Time System Representation</a:t>
+            </a:r>
+          </a:p>
+        </p:txBody>
+      </p:sp>
+      <p:pic>
+        <p:nvPicPr>
+          <p:cNvPr id="6" name="Picture 5" descr="tp_logo_white.png"/>
+          <p:cNvPicPr>
+            <a:picLocks noChangeAspect="1"/>
+          </p:cNvPicPr>
+          <p:nvPr/>
+        </p:nvPicPr>
+        <p:blipFill>
+          <a:blip r:embed="rId2"/>
+          <a:stretch>
+            <a:fillRect/>
+          </a:stretch>
+        </p:blipFill>
+        <p:spPr>
+          <a:xfrm>
+            <a:off x="10469880" y="411480"/>
+            <a:ext cx="987552" cy="384048"/>
+          </a:xfrm>
+          <a:prstGeom prst="rect">
+            <a:avLst/>
+          </a:prstGeom>
+        </p:spPr>
+      </p:pic>
+      <p:sp>
+        <p:nvSpPr>
+          <p:cNvPr id="7" name="Rounded Rectangle 6"/>
           <p:cNvSpPr/>
           <p:nvPr/>
         </p:nvSpPr>
         <p:spPr>
           <a:xfrm>
             <a:off x="731520" y="1645920"/>
-            <a:ext cx="5212080" cy="2148840"/>
+            <a:ext cx="10728655" cy="4709160"/>
           </a:xfrm>
           <a:prstGeom prst="roundRect">
             <a:avLst/>
           </a:prstGeom>
           <a:solidFill>
-            <a:srgbClr val="0F172A"/>
+            <a:srgbClr val="131926"/>
           </a:solidFill>
-          <a:ln>
+          <a:ln w="12700">
             <a:solidFill>
-              <a:srgbClr val="1E293B"/>
+              <a:srgbClr val="38BDF8"/>
             </a:solidFill>
           </a:ln>
         </p:spPr>
@@ -3812,304 +5330,37 @@
           </a:fontRef>
         </p:style>
         <p:txBody>
-          <a:bodyPr rtlCol="0" anchor="ctr" wrap="square"/>
-          <a:lstStyle/>
-          <a:p>
-            <a:pPr algn="ctr">
-              <a:spcAft>
-                <a:spcPts val="400"/>
-              </a:spcAft>
-              <a:defRPr sz="1100" b="1">
-                <a:solidFill>
-                  <a:srgbClr val="00D4FF"/>
-                </a:solidFill>
-              </a:defRPr>
-            </a:pPr>
-            <a:r>
-              <a:t>PILLAR 01</a:t>
-            </a:r>
-          </a:p>
-          <a:p>
-            <a:pPr>
-              <a:spcAft>
-                <a:spcPts val="600"/>
-              </a:spcAft>
-              <a:defRPr sz="1650" b="1">
-                <a:solidFill>
-                  <a:srgbClr val="FFFFFF"/>
-                </a:solidFill>
-              </a:defRPr>
-            </a:pPr>
-            <a:r>
-              <a:t>Alarm Lifecycle Management</a:t>
-            </a:r>
-          </a:p>
-          <a:p>
-            <a:pPr>
-              <a:defRPr sz="1300">
-                <a:solidFill>
-                  <a:srgbClr val="C8D8F0"/>
-                </a:solidFill>
-              </a:defRPr>
-            </a:pPr>
-            <a:r>
-              <a:t>Configurable alarm generation, prioritization, acknowledgment, shelving, suppression, escalation, and closure.</a:t>
-            </a:r>
-          </a:p>
-        </p:txBody>
-      </p:sp>
-      <p:sp>
-        <p:nvSpPr>
-          <p:cNvPr id="7" name="Rounded Rectangle 6"/>
-          <p:cNvSpPr/>
-          <p:nvPr/>
-        </p:nvSpPr>
-        <p:spPr>
-          <a:xfrm>
-            <a:off x="6217920" y="1645920"/>
-            <a:ext cx="5212080" cy="2148840"/>
-          </a:xfrm>
-          <a:prstGeom prst="roundRect">
-            <a:avLst/>
-          </a:prstGeom>
-          <a:solidFill>
-            <a:srgbClr val="0F172A"/>
-          </a:solidFill>
-          <a:ln>
-            <a:solidFill>
-              <a:srgbClr val="1E293B"/>
-            </a:solidFill>
-          </a:ln>
-        </p:spPr>
-        <p:style>
-          <a:lnRef idx="1">
-            <a:schemeClr val="accent1"/>
-          </a:lnRef>
-          <a:fillRef idx="3">
-            <a:schemeClr val="accent1"/>
-          </a:fillRef>
-          <a:effectRef idx="2">
-            <a:schemeClr val="accent1"/>
-          </a:effectRef>
-          <a:fontRef idx="minor">
-            <a:schemeClr val="lt1"/>
-          </a:fontRef>
-        </p:style>
-        <p:txBody>
-          <a:bodyPr rtlCol="0" anchor="ctr" wrap="square"/>
-          <a:lstStyle/>
-          <a:p>
-            <a:pPr algn="ctr">
-              <a:spcAft>
-                <a:spcPts val="400"/>
-              </a:spcAft>
-              <a:defRPr sz="1100" b="1">
-                <a:solidFill>
-                  <a:srgbClr val="00D4FF"/>
-                </a:solidFill>
-              </a:defRPr>
-            </a:pPr>
-            <a:r>
-              <a:t>PILLAR 02</a:t>
-            </a:r>
-          </a:p>
-          <a:p>
-            <a:pPr>
-              <a:spcAft>
-                <a:spcPts val="600"/>
-              </a:spcAft>
-              <a:defRPr sz="1650" b="1">
-                <a:solidFill>
-                  <a:srgbClr val="FFFFFF"/>
-                </a:solidFill>
-              </a:defRPr>
-            </a:pPr>
-            <a:r>
-              <a:t>Event Correlation &amp; SOE Synchronization</a:t>
-            </a:r>
-          </a:p>
-          <a:p>
-            <a:pPr>
-              <a:defRPr sz="1300">
-                <a:solidFill>
-                  <a:srgbClr val="C8D8F0"/>
-                </a:solidFill>
-              </a:defRPr>
-            </a:pPr>
-            <a:r>
-              <a:t>Centralized event correlation with synchronized timestamps for Sequence of Events (SOE) disturbance investigation.</a:t>
-            </a:r>
-          </a:p>
-        </p:txBody>
-      </p:sp>
-      <p:sp>
-        <p:nvSpPr>
-          <p:cNvPr id="8" name="Rounded Rectangle 7"/>
-          <p:cNvSpPr/>
-          <p:nvPr/>
-        </p:nvSpPr>
-        <p:spPr>
-          <a:xfrm>
-            <a:off x="731520" y="4069080"/>
-            <a:ext cx="5212080" cy="2148840"/>
-          </a:xfrm>
-          <a:prstGeom prst="roundRect">
-            <a:avLst/>
-          </a:prstGeom>
-          <a:solidFill>
-            <a:srgbClr val="0F172A"/>
-          </a:solidFill>
-          <a:ln>
-            <a:solidFill>
-              <a:srgbClr val="1E293B"/>
-            </a:solidFill>
-          </a:ln>
-        </p:spPr>
-        <p:style>
-          <a:lnRef idx="1">
-            <a:schemeClr val="accent1"/>
-          </a:lnRef>
-          <a:fillRef idx="3">
-            <a:schemeClr val="accent1"/>
-          </a:fillRef>
-          <a:effectRef idx="2">
-            <a:schemeClr val="accent1"/>
-          </a:effectRef>
-          <a:fontRef idx="minor">
-            <a:schemeClr val="lt1"/>
-          </a:fontRef>
-        </p:style>
-        <p:txBody>
-          <a:bodyPr rtlCol="0" anchor="ctr" wrap="square"/>
-          <a:lstStyle/>
-          <a:p>
-            <a:pPr algn="ctr">
-              <a:spcAft>
-                <a:spcPts val="400"/>
-              </a:spcAft>
-              <a:defRPr sz="1100" b="1">
-                <a:solidFill>
-                  <a:srgbClr val="00D4FF"/>
-                </a:solidFill>
-              </a:defRPr>
-            </a:pPr>
-            <a:r>
-              <a:t>PILLAR 03</a:t>
-            </a:r>
-          </a:p>
-          <a:p>
-            <a:pPr>
-              <a:spcAft>
-                <a:spcPts val="600"/>
-              </a:spcAft>
-              <a:defRPr sz="1650" b="1">
-                <a:solidFill>
-                  <a:srgbClr val="FFFFFF"/>
-                </a:solidFill>
-              </a:defRPr>
-            </a:pPr>
-            <a:r>
-              <a:t>Chattering Alarm Detection &amp; Suppression</a:t>
-            </a:r>
-          </a:p>
-          <a:p>
-            <a:pPr>
-              <a:defRPr sz="1300">
-                <a:solidFill>
-                  <a:srgbClr val="C8D8F0"/>
-                </a:solidFill>
-              </a:defRPr>
-            </a:pPr>
-            <a:r>
-              <a:t>Detects rapid oscillatory alarms and automatically applies deadbands or temporary shelving.</a:t>
-            </a:r>
-          </a:p>
-        </p:txBody>
-      </p:sp>
-      <p:sp>
-        <p:nvSpPr>
-          <p:cNvPr id="9" name="Rounded Rectangle 8"/>
-          <p:cNvSpPr/>
-          <p:nvPr/>
-        </p:nvSpPr>
-        <p:spPr>
-          <a:xfrm>
-            <a:off x="6217920" y="4069080"/>
-            <a:ext cx="5212080" cy="2148840"/>
-          </a:xfrm>
-          <a:prstGeom prst="roundRect">
-            <a:avLst/>
-          </a:prstGeom>
-          <a:solidFill>
-            <a:srgbClr val="0F172A"/>
-          </a:solidFill>
-          <a:ln>
-            <a:solidFill>
-              <a:srgbClr val="1E293B"/>
-            </a:solidFill>
-          </a:ln>
-        </p:spPr>
-        <p:style>
-          <a:lnRef idx="1">
-            <a:schemeClr val="accent1"/>
-          </a:lnRef>
-          <a:fillRef idx="3">
-            <a:schemeClr val="accent1"/>
-          </a:fillRef>
-          <a:effectRef idx="2">
-            <a:schemeClr val="accent1"/>
-          </a:effectRef>
-          <a:fontRef idx="minor">
-            <a:schemeClr val="lt1"/>
-          </a:fontRef>
-        </p:style>
-        <p:txBody>
-          <a:bodyPr rtlCol="0" anchor="ctr" wrap="square"/>
-          <a:lstStyle/>
-          <a:p>
-            <a:pPr algn="ctr">
-              <a:spcAft>
-                <a:spcPts val="400"/>
-              </a:spcAft>
-              <a:defRPr sz="1100" b="1">
-                <a:solidFill>
-                  <a:srgbClr val="00D4FF"/>
-                </a:solidFill>
-              </a:defRPr>
-            </a:pPr>
-            <a:r>
-              <a:t>PILLAR 04</a:t>
-            </a:r>
-          </a:p>
-          <a:p>
-            <a:pPr>
-              <a:spcAft>
-                <a:spcPts val="600"/>
-              </a:spcAft>
-              <a:defRPr sz="1650" b="1">
-                <a:solidFill>
-                  <a:srgbClr val="FFFFFF"/>
-                </a:solidFill>
-              </a:defRPr>
-            </a:pPr>
-            <a:r>
-              <a:t>Enterprise High-Throughput Event Core</a:t>
-            </a:r>
-          </a:p>
-          <a:p>
-            <a:pPr>
-              <a:defRPr sz="1300">
-                <a:solidFill>
-                  <a:srgbClr val="C8D8F0"/>
-                </a:solidFill>
-              </a:defRPr>
-            </a:pPr>
-            <a:r>
-              <a:t>Enterprise architecture with dedicated tenant data segregation, secure multi-tenant access, and deterministic real-time event streaming.</a:t>
-            </a:r>
-          </a:p>
-        </p:txBody>
-      </p:sp>
+          <a:bodyPr rtlCol="0" anchor="ctr"/>
+          <a:lstStyle/>
+          <a:p>
+            <a:pPr algn="ctr"/>
+          </a:p>
+        </p:txBody>
+      </p:sp>
+      <p:pic>
+        <p:nvPicPr>
+          <p:cNvPr id="8" name="Picture 7" descr="terra_alarm_showcase.jpg"/>
+          <p:cNvPicPr>
+            <a:picLocks noChangeAspect="1"/>
+          </p:cNvPicPr>
+          <p:nvPr/>
+        </p:nvPicPr>
+        <p:blipFill>
+          <a:blip r:embed="rId3"/>
+          <a:stretch>
+            <a:fillRect/>
+          </a:stretch>
+        </p:blipFill>
+        <p:spPr>
+          <a:xfrm>
+            <a:off x="777240" y="1691640"/>
+            <a:ext cx="10637215" cy="4617720"/>
+          </a:xfrm>
+          <a:prstGeom prst="rect">
+            <a:avLst/>
+          </a:prstGeom>
+        </p:spPr>
+      </p:pic>
     </p:spTree>
   </p:cSld>
   <p:clrMapOvr>
@@ -4143,7 +5394,7 @@
             <a:avLst/>
           </a:prstGeom>
           <a:solidFill>
-            <a:srgbClr val="0A0E1A"/>
+            <a:srgbClr val="0B0F17"/>
           </a:solidFill>
           <a:ln>
             <a:noFill/>
@@ -4179,17 +5430,19 @@
         </p:nvSpPr>
         <p:spPr>
           <a:xfrm>
-            <a:off x="0" y="0"/>
-            <a:ext cx="12191695" cy="54864"/>
+            <a:off x="731520" y="365760"/>
+            <a:ext cx="10728655" cy="18288"/>
           </a:xfrm>
           <a:prstGeom prst="rect">
             <a:avLst/>
           </a:prstGeom>
           <a:solidFill>
-            <a:srgbClr val="00D4FF"/>
+            <a:srgbClr val="38BDF8"/>
           </a:solidFill>
           <a:ln>
-            <a:noFill/>
+            <a:solidFill>
+              <a:srgbClr val="38BDF8"/>
+            </a:solidFill>
           </a:ln>
         </p:spPr>
         <p:style>
@@ -4222,8 +5475,8 @@
         </p:nvSpPr>
         <p:spPr>
           <a:xfrm>
-            <a:off x="731520" y="365760"/>
-            <a:ext cx="10698480" cy="1005840"/>
+            <a:off x="731520" y="438912"/>
+            <a:ext cx="8229600" cy="274320"/>
           </a:xfrm>
           <a:prstGeom prst="rect">
             <a:avLst/>
@@ -4231,35 +5484,20 @@
           <a:noFill/>
         </p:spPr>
         <p:txBody>
-          <a:bodyPr wrap="square">
+          <a:bodyPr wrap="square" lIns="0" rIns="0" tIns="0" bIns="0">
             <a:spAutoFit/>
           </a:bodyPr>
           <a:lstStyle/>
           <a:p>
             <a:pPr>
-              <a:spcAft>
-                <a:spcPts val="400"/>
-              </a:spcAft>
-              <a:defRPr sz="1150" b="1">
-                <a:solidFill>
-                  <a:srgbClr val="00D4FF"/>
-                </a:solidFill>
-              </a:defRPr>
-            </a:pPr>
-            <a:r>
-              <a:t>TERRAALARM  |  TERRESTRIAL PLATFORM</a:t>
-            </a:r>
-          </a:p>
-          <a:p>
-            <a:pPr>
-              <a:defRPr sz="2500" b="1">
-                <a:solidFill>
-                  <a:srgbClr val="FFFFFF"/>
-                </a:solidFill>
-              </a:defRPr>
-            </a:pPr>
-            <a:r>
-              <a:t>Field-Validated Operational Use Cases &amp; Quantifiable ROI</a:t>
+              <a:defRPr sz="950" b="1">
+                <a:solidFill>
+                  <a:srgbClr val="38BDF8"/>
+                </a:solidFill>
+              </a:defRPr>
+            </a:pPr>
+            <a:r>
+              <a:t>TERRESTRIAL PLATFORM  |  TERRAALARM  |  CORE CAPABILITIES</a:t>
             </a:r>
           </a:p>
         </p:txBody>
@@ -4272,8 +5510,8 @@
         </p:nvSpPr>
         <p:spPr>
           <a:xfrm>
-            <a:off x="731520" y="6446520"/>
-            <a:ext cx="10698480" cy="320040"/>
+            <a:off x="731520" y="731520"/>
+            <a:ext cx="9601200" cy="777240"/>
           </a:xfrm>
           <a:prstGeom prst="rect">
             <a:avLst/>
@@ -4281,44 +5519,83 @@
           <a:noFill/>
         </p:spPr>
         <p:txBody>
-          <a:bodyPr wrap="none">
+          <a:bodyPr wrap="square" lIns="0" rIns="0" tIns="0" bIns="0">
             <a:spAutoFit/>
           </a:bodyPr>
           <a:lstStyle/>
           <a:p>
             <a:pPr>
-              <a:defRPr sz="1000">
+              <a:defRPr sz="1900" b="1">
+                <a:solidFill>
+                  <a:srgbClr val="FFFFFF"/>
+                </a:solidFill>
+              </a:defRPr>
+            </a:pPr>
+            <a:r>
+              <a:t>What TerraAlarm Will Do</a:t>
+            </a:r>
+          </a:p>
+          <a:p>
+            <a:pPr>
+              <a:spcBef>
+                <a:spcPts val="300"/>
+              </a:spcBef>
+              <a:defRPr sz="1050">
                 <a:solidFill>
                   <a:srgbClr val="94A3B8"/>
                 </a:solidFill>
               </a:defRPr>
             </a:pPr>
             <a:r>
-              <a:t>TERRESTRIAL PLATFORM  |  TERRAALARM CATALOGUE  |  CONFIDENTIAL - AUTHORISED SYSTEM INTEGRATORS ONLY</a:t>
-            </a:r>
-          </a:p>
-        </p:txBody>
-      </p:sp>
-      <p:sp>
-        <p:nvSpPr>
-          <p:cNvPr id="6" name="Rounded Rectangle 5"/>
+              <a:t>Specific operational functions and engineering capabilities directly sourced from technical documentation.</a:t>
+            </a:r>
+          </a:p>
+        </p:txBody>
+      </p:sp>
+      <p:pic>
+        <p:nvPicPr>
+          <p:cNvPr id="6" name="Picture 5" descr="tp_logo_white.png"/>
+          <p:cNvPicPr>
+            <a:picLocks noChangeAspect="1"/>
+          </p:cNvPicPr>
+          <p:nvPr/>
+        </p:nvPicPr>
+        <p:blipFill>
+          <a:blip r:embed="rId2"/>
+          <a:stretch>
+            <a:fillRect/>
+          </a:stretch>
+        </p:blipFill>
+        <p:spPr>
+          <a:xfrm>
+            <a:off x="10469880" y="411480"/>
+            <a:ext cx="987552" cy="384048"/>
+          </a:xfrm>
+          <a:prstGeom prst="rect">
+            <a:avLst/>
+          </a:prstGeom>
+        </p:spPr>
+      </p:pic>
+      <p:sp>
+        <p:nvSpPr>
+          <p:cNvPr id="7" name="Rounded Rectangle 6"/>
           <p:cNvSpPr/>
           <p:nvPr/>
         </p:nvSpPr>
         <p:spPr>
           <a:xfrm>
-            <a:off x="731520" y="1645920"/>
-            <a:ext cx="3401568" cy="4389120"/>
+            <a:off x="731520" y="1691640"/>
+            <a:ext cx="5230368" cy="2194560"/>
           </a:xfrm>
           <a:prstGeom prst="roundRect">
             <a:avLst/>
           </a:prstGeom>
           <a:solidFill>
-            <a:srgbClr val="0F172A"/>
+            <a:srgbClr val="131926"/>
           </a:solidFill>
-          <a:ln>
+          <a:ln w="12700">
             <a:solidFill>
-              <a:srgbClr val="1E293B"/>
+              <a:srgbClr val="28344B"/>
             </a:solidFill>
           </a:ln>
         </p:spPr>
@@ -4337,72 +5614,98 @@
           </a:fontRef>
         </p:style>
         <p:txBody>
-          <a:bodyPr rtlCol="0" anchor="ctr" wrap="square"/>
-          <a:lstStyle/>
-          <a:p>
-            <a:pPr algn="ctr">
+          <a:bodyPr rtlCol="0" anchor="ctr"/>
+          <a:lstStyle/>
+          <a:p>
+            <a:pPr algn="ctr"/>
+          </a:p>
+        </p:txBody>
+      </p:sp>
+      <p:sp>
+        <p:nvSpPr>
+          <p:cNvPr id="8" name="TextBox 7"/>
+          <p:cNvSpPr txBox="1"/>
+          <p:nvPr/>
+        </p:nvSpPr>
+        <p:spPr>
+          <a:xfrm>
+            <a:off x="960120" y="1874520"/>
+            <a:ext cx="4773168" cy="1828800"/>
+          </a:xfrm>
+          <a:prstGeom prst="rect">
+            <a:avLst/>
+          </a:prstGeom>
+          <a:noFill/>
+        </p:spPr>
+        <p:txBody>
+          <a:bodyPr wrap="square" lIns="0" rIns="0" tIns="0" bIns="0">
+            <a:spAutoFit/>
+          </a:bodyPr>
+          <a:lstStyle/>
+          <a:p>
+            <a:pPr>
+              <a:defRPr sz="850" b="1">
+                <a:solidFill>
+                  <a:srgbClr val="38BDF8"/>
+                </a:solidFill>
+              </a:defRPr>
+            </a:pPr>
+            <a:r>
+              <a:t>PILLAR 01  |  ENGINEERING CAPABILITY</a:t>
+            </a:r>
+          </a:p>
+          <a:p>
+            <a:pPr>
+              <a:spcBef>
+                <a:spcPts val="300"/>
+              </a:spcBef>
               <a:spcAft>
-                <a:spcPts val="800"/>
+                <a:spcPts val="600"/>
               </a:spcAft>
-              <a:defRPr sz="1100" b="1">
-                <a:solidFill>
-                  <a:srgbClr val="F5C842"/>
-                </a:solidFill>
-              </a:defRPr>
-            </a:pPr>
-            <a:r>
-              <a:t>PRODUCTIVITY &amp; SAFETY</a:t>
-            </a:r>
-          </a:p>
-          <a:p>
-            <a:pPr>
-              <a:spcAft>
-                <a:spcPts val="1200"/>
-              </a:spcAft>
-              <a:defRPr sz="1600" b="1">
+              <a:defRPr sz="1300" b="1">
                 <a:solidFill>
                   <a:srgbClr val="FFFFFF"/>
                 </a:solidFill>
               </a:defRPr>
             </a:pPr>
             <a:r>
-              <a:t>Productivity &amp; Safety (Alarm Lifecycle Management)</a:t>
-            </a:r>
-          </a:p>
-          <a:p>
-            <a:pPr>
-              <a:defRPr sz="1300">
-                <a:solidFill>
-                  <a:srgbClr val="C8D8F0"/>
-                </a:solidFill>
-              </a:defRPr>
-            </a:pPr>
-            <a:r>
-              <a:t>Configurable alarm generation, prioritization, acknowledgment, shelving, suppression, escalation, and closure conforming to ISA 18.2 standards.</a:t>
-            </a:r>
-          </a:p>
-        </p:txBody>
-      </p:sp>
-      <p:sp>
-        <p:nvSpPr>
-          <p:cNvPr id="7" name="Rounded Rectangle 6"/>
+              <a:t>Alarm Lifecycle Management</a:t>
+            </a:r>
+          </a:p>
+          <a:p>
+            <a:pPr>
+              <a:defRPr sz="1000">
+                <a:solidFill>
+                  <a:srgbClr val="F1F5F9"/>
+                </a:solidFill>
+              </a:defRPr>
+            </a:pPr>
+            <a:r>
+              <a:t>Configurable alarm generation, prioritization, acknowledgment, shelving, suppression, escalation, and closure.</a:t>
+            </a:r>
+          </a:p>
+        </p:txBody>
+      </p:sp>
+      <p:sp>
+        <p:nvSpPr>
+          <p:cNvPr id="9" name="Rounded Rectangle 8"/>
           <p:cNvSpPr/>
           <p:nvPr/>
         </p:nvSpPr>
         <p:spPr>
           <a:xfrm>
-            <a:off x="4379976" y="1645920"/>
-            <a:ext cx="3401568" cy="4389120"/>
+            <a:off x="6227064" y="1691640"/>
+            <a:ext cx="5230368" cy="2194560"/>
           </a:xfrm>
           <a:prstGeom prst="roundRect">
             <a:avLst/>
           </a:prstGeom>
           <a:solidFill>
-            <a:srgbClr val="0F172A"/>
+            <a:srgbClr val="131926"/>
           </a:solidFill>
-          <a:ln>
+          <a:ln w="12700">
             <a:solidFill>
-              <a:srgbClr val="1E293B"/>
+              <a:srgbClr val="28344B"/>
             </a:solidFill>
           </a:ln>
         </p:spPr>
@@ -4421,72 +5724,98 @@
           </a:fontRef>
         </p:style>
         <p:txBody>
-          <a:bodyPr rtlCol="0" anchor="ctr" wrap="square"/>
-          <a:lstStyle/>
-          <a:p>
-            <a:pPr algn="ctr">
+          <a:bodyPr rtlCol="0" anchor="ctr"/>
+          <a:lstStyle/>
+          <a:p>
+            <a:pPr algn="ctr"/>
+          </a:p>
+        </p:txBody>
+      </p:sp>
+      <p:sp>
+        <p:nvSpPr>
+          <p:cNvPr id="10" name="TextBox 9"/>
+          <p:cNvSpPr txBox="1"/>
+          <p:nvPr/>
+        </p:nvSpPr>
+        <p:spPr>
+          <a:xfrm>
+            <a:off x="6455664" y="1874520"/>
+            <a:ext cx="4773168" cy="1828800"/>
+          </a:xfrm>
+          <a:prstGeom prst="rect">
+            <a:avLst/>
+          </a:prstGeom>
+          <a:noFill/>
+        </p:spPr>
+        <p:txBody>
+          <a:bodyPr wrap="square" lIns="0" rIns="0" tIns="0" bIns="0">
+            <a:spAutoFit/>
+          </a:bodyPr>
+          <a:lstStyle/>
+          <a:p>
+            <a:pPr>
+              <a:defRPr sz="850" b="1">
+                <a:solidFill>
+                  <a:srgbClr val="38BDF8"/>
+                </a:solidFill>
+              </a:defRPr>
+            </a:pPr>
+            <a:r>
+              <a:t>PILLAR 02  |  ENGINEERING CAPABILITY</a:t>
+            </a:r>
+          </a:p>
+          <a:p>
+            <a:pPr>
+              <a:spcBef>
+                <a:spcPts val="300"/>
+              </a:spcBef>
               <a:spcAft>
-                <a:spcPts val="800"/>
+                <a:spcPts val="600"/>
               </a:spcAft>
-              <a:defRPr sz="1100" b="1">
-                <a:solidFill>
-                  <a:srgbClr val="F5C842"/>
-                </a:solidFill>
-              </a:defRPr>
-            </a:pPr>
-            <a:r>
-              <a:t>QA &amp; FORENSICS</a:t>
-            </a:r>
-          </a:p>
-          <a:p>
-            <a:pPr>
-              <a:spcAft>
-                <a:spcPts val="1200"/>
-              </a:spcAft>
-              <a:defRPr sz="1600" b="1">
+              <a:defRPr sz="1300" b="1">
                 <a:solidFill>
                   <a:srgbClr val="FFFFFF"/>
                 </a:solidFill>
               </a:defRPr>
             </a:pPr>
             <a:r>
-              <a:t>QA &amp; Forensics (Event Correlation &amp; SOE)</a:t>
-            </a:r>
-          </a:p>
-          <a:p>
-            <a:pPr>
-              <a:defRPr sz="1300">
-                <a:solidFill>
-                  <a:srgbClr val="C8D8F0"/>
-                </a:solidFill>
-              </a:defRPr>
-            </a:pPr>
-            <a:r>
-              <a:t>Centralized event correlation with synchronized microsecond timestamps for Sequence of Events (SOE) analysis and fast disturbance investigation.</a:t>
-            </a:r>
-          </a:p>
-        </p:txBody>
-      </p:sp>
-      <p:sp>
-        <p:nvSpPr>
-          <p:cNvPr id="8" name="Rounded Rectangle 7"/>
+              <a:t>Event Correlation &amp; SOE Synchronization</a:t>
+            </a:r>
+          </a:p>
+          <a:p>
+            <a:pPr>
+              <a:defRPr sz="1000">
+                <a:solidFill>
+                  <a:srgbClr val="F1F5F9"/>
+                </a:solidFill>
+              </a:defRPr>
+            </a:pPr>
+            <a:r>
+              <a:t>Centralized event correlation with synchronized timestamps for Sequence of Events (SOE) disturbance investigation.</a:t>
+            </a:r>
+          </a:p>
+        </p:txBody>
+      </p:sp>
+      <p:sp>
+        <p:nvSpPr>
+          <p:cNvPr id="11" name="Rounded Rectangle 10"/>
           <p:cNvSpPr/>
           <p:nvPr/>
         </p:nvSpPr>
         <p:spPr>
           <a:xfrm>
-            <a:off x="8028432" y="1645920"/>
-            <a:ext cx="3401568" cy="4389120"/>
+            <a:off x="731520" y="4114800"/>
+            <a:ext cx="5230368" cy="2194560"/>
           </a:xfrm>
           <a:prstGeom prst="roundRect">
             <a:avLst/>
           </a:prstGeom>
           <a:solidFill>
-            <a:srgbClr val="0F172A"/>
+            <a:srgbClr val="131926"/>
           </a:solidFill>
-          <a:ln>
+          <a:ln w="12700">
             <a:solidFill>
-              <a:srgbClr val="1E293B"/>
+              <a:srgbClr val="28344B"/>
             </a:solidFill>
           </a:ln>
         </p:spPr>
@@ -4505,48 +5834,184 @@
           </a:fontRef>
         </p:style>
         <p:txBody>
-          <a:bodyPr rtlCol="0" anchor="ctr" wrap="square"/>
-          <a:lstStyle/>
-          <a:p>
-            <a:pPr algn="ctr">
+          <a:bodyPr rtlCol="0" anchor="ctr"/>
+          <a:lstStyle/>
+          <a:p>
+            <a:pPr algn="ctr"/>
+          </a:p>
+        </p:txBody>
+      </p:sp>
+      <p:sp>
+        <p:nvSpPr>
+          <p:cNvPr id="12" name="TextBox 11"/>
+          <p:cNvSpPr txBox="1"/>
+          <p:nvPr/>
+        </p:nvSpPr>
+        <p:spPr>
+          <a:xfrm>
+            <a:off x="960120" y="4297680"/>
+            <a:ext cx="4773168" cy="1828800"/>
+          </a:xfrm>
+          <a:prstGeom prst="rect">
+            <a:avLst/>
+          </a:prstGeom>
+          <a:noFill/>
+        </p:spPr>
+        <p:txBody>
+          <a:bodyPr wrap="square" lIns="0" rIns="0" tIns="0" bIns="0">
+            <a:spAutoFit/>
+          </a:bodyPr>
+          <a:lstStyle/>
+          <a:p>
+            <a:pPr>
+              <a:defRPr sz="850" b="1">
+                <a:solidFill>
+                  <a:srgbClr val="38BDF8"/>
+                </a:solidFill>
+              </a:defRPr>
+            </a:pPr>
+            <a:r>
+              <a:t>PILLAR 03  |  ENGINEERING CAPABILITY</a:t>
+            </a:r>
+          </a:p>
+          <a:p>
+            <a:pPr>
+              <a:spcBef>
+                <a:spcPts val="300"/>
+              </a:spcBef>
               <a:spcAft>
-                <a:spcPts val="800"/>
+                <a:spcPts val="600"/>
               </a:spcAft>
-              <a:defRPr sz="1100" b="1">
-                <a:solidFill>
-                  <a:srgbClr val="F5C842"/>
-                </a:solidFill>
-              </a:defRPr>
-            </a:pPr>
-            <a:r>
-              <a:t>EFFICIENCY</a:t>
-            </a:r>
-          </a:p>
-          <a:p>
-            <a:pPr>
+              <a:defRPr sz="1300" b="1">
+                <a:solidFill>
+                  <a:srgbClr val="FFFFFF"/>
+                </a:solidFill>
+              </a:defRPr>
+            </a:pPr>
+            <a:r>
+              <a:t>Chattering Alarm Detection &amp; Suppression</a:t>
+            </a:r>
+          </a:p>
+          <a:p>
+            <a:pPr>
+              <a:defRPr sz="1000">
+                <a:solidFill>
+                  <a:srgbClr val="F1F5F9"/>
+                </a:solidFill>
+              </a:defRPr>
+            </a:pPr>
+            <a:r>
+              <a:t>Detects rapid oscillatory alarms and automatically applies deadbands or temporary shelving.</a:t>
+            </a:r>
+          </a:p>
+        </p:txBody>
+      </p:sp>
+      <p:sp>
+        <p:nvSpPr>
+          <p:cNvPr id="13" name="Rounded Rectangle 12"/>
+          <p:cNvSpPr/>
+          <p:nvPr/>
+        </p:nvSpPr>
+        <p:spPr>
+          <a:xfrm>
+            <a:off x="6227064" y="4114800"/>
+            <a:ext cx="5230368" cy="2194560"/>
+          </a:xfrm>
+          <a:prstGeom prst="roundRect">
+            <a:avLst/>
+          </a:prstGeom>
+          <a:solidFill>
+            <a:srgbClr val="131926"/>
+          </a:solidFill>
+          <a:ln w="12700">
+            <a:solidFill>
+              <a:srgbClr val="28344B"/>
+            </a:solidFill>
+          </a:ln>
+        </p:spPr>
+        <p:style>
+          <a:lnRef idx="1">
+            <a:schemeClr val="accent1"/>
+          </a:lnRef>
+          <a:fillRef idx="3">
+            <a:schemeClr val="accent1"/>
+          </a:fillRef>
+          <a:effectRef idx="2">
+            <a:schemeClr val="accent1"/>
+          </a:effectRef>
+          <a:fontRef idx="minor">
+            <a:schemeClr val="lt1"/>
+          </a:fontRef>
+        </p:style>
+        <p:txBody>
+          <a:bodyPr rtlCol="0" anchor="ctr"/>
+          <a:lstStyle/>
+          <a:p>
+            <a:pPr algn="ctr"/>
+          </a:p>
+        </p:txBody>
+      </p:sp>
+      <p:sp>
+        <p:nvSpPr>
+          <p:cNvPr id="14" name="TextBox 13"/>
+          <p:cNvSpPr txBox="1"/>
+          <p:nvPr/>
+        </p:nvSpPr>
+        <p:spPr>
+          <a:xfrm>
+            <a:off x="6455664" y="4297680"/>
+            <a:ext cx="4773168" cy="1828800"/>
+          </a:xfrm>
+          <a:prstGeom prst="rect">
+            <a:avLst/>
+          </a:prstGeom>
+          <a:noFill/>
+        </p:spPr>
+        <p:txBody>
+          <a:bodyPr wrap="square" lIns="0" rIns="0" tIns="0" bIns="0">
+            <a:spAutoFit/>
+          </a:bodyPr>
+          <a:lstStyle/>
+          <a:p>
+            <a:pPr>
+              <a:defRPr sz="850" b="1">
+                <a:solidFill>
+                  <a:srgbClr val="38BDF8"/>
+                </a:solidFill>
+              </a:defRPr>
+            </a:pPr>
+            <a:r>
+              <a:t>PILLAR 04  |  ENGINEERING CAPABILITY</a:t>
+            </a:r>
+          </a:p>
+          <a:p>
+            <a:pPr>
+              <a:spcBef>
+                <a:spcPts val="300"/>
+              </a:spcBef>
               <a:spcAft>
-                <a:spcPts val="1200"/>
+                <a:spcPts val="600"/>
               </a:spcAft>
-              <a:defRPr sz="1600" b="1">
+              <a:defRPr sz="1300" b="1">
                 <a:solidFill>
                   <a:srgbClr val="FFFFFF"/>
                 </a:solidFill>
               </a:defRPr>
             </a:pPr>
             <a:r>
-              <a:t>Efficiency (Alarm Analytics &amp; Chattering Suppression)</a:t>
-            </a:r>
-          </a:p>
-          <a:p>
-            <a:pPr>
-              <a:defRPr sz="1300">
-                <a:solidFill>
-                  <a:srgbClr val="C8D8F0"/>
-                </a:solidFill>
-              </a:defRPr>
-            </a:pPr>
-            <a:r>
-              <a:t>Automated alarm trending, chattering alarm detection, nuisance alarm pattern analysis, and dynamic alarm flood suppression.</a:t>
+              <a:t>Enterprise High-Throughput Event Core</a:t>
+            </a:r>
+          </a:p>
+          <a:p>
+            <a:pPr>
+              <a:defRPr sz="1000">
+                <a:solidFill>
+                  <a:srgbClr val="F1F5F9"/>
+                </a:solidFill>
+              </a:defRPr>
+            </a:pPr>
+            <a:r>
+              <a:t>Enterprise architecture with dedicated tenant data segregation, secure multi-tenant access, and deterministic real-time event streaming.</a:t>
             </a:r>
           </a:p>
         </p:txBody>
@@ -4584,7 +6049,7 @@
             <a:avLst/>
           </a:prstGeom>
           <a:solidFill>
-            <a:srgbClr val="0A0E1A"/>
+            <a:srgbClr val="0B0F17"/>
           </a:solidFill>
           <a:ln>
             <a:noFill/>
@@ -4620,17 +6085,19 @@
         </p:nvSpPr>
         <p:spPr>
           <a:xfrm>
-            <a:off x="0" y="0"/>
-            <a:ext cx="12191695" cy="54864"/>
+            <a:off x="731520" y="365760"/>
+            <a:ext cx="10728655" cy="18288"/>
           </a:xfrm>
           <a:prstGeom prst="rect">
             <a:avLst/>
           </a:prstGeom>
           <a:solidFill>
-            <a:srgbClr val="00D4FF"/>
+            <a:srgbClr val="38BDF8"/>
           </a:solidFill>
           <a:ln>
-            <a:noFill/>
+            <a:solidFill>
+              <a:srgbClr val="38BDF8"/>
+            </a:solidFill>
           </a:ln>
         </p:spPr>
         <p:style>
@@ -4663,8 +6130,8 @@
         </p:nvSpPr>
         <p:spPr>
           <a:xfrm>
-            <a:off x="731520" y="365760"/>
-            <a:ext cx="10698480" cy="1005840"/>
+            <a:off x="731520" y="438912"/>
+            <a:ext cx="8229600" cy="274320"/>
           </a:xfrm>
           <a:prstGeom prst="rect">
             <a:avLst/>
@@ -4672,35 +6139,20 @@
           <a:noFill/>
         </p:spPr>
         <p:txBody>
-          <a:bodyPr wrap="square">
+          <a:bodyPr wrap="square" lIns="0" rIns="0" tIns="0" bIns="0">
             <a:spAutoFit/>
           </a:bodyPr>
           <a:lstStyle/>
           <a:p>
             <a:pPr>
-              <a:spcAft>
-                <a:spcPts val="400"/>
-              </a:spcAft>
-              <a:defRPr sz="1150" b="1">
-                <a:solidFill>
-                  <a:srgbClr val="00D4FF"/>
-                </a:solidFill>
-              </a:defRPr>
-            </a:pPr>
-            <a:r>
-              <a:t>TERRAALARM  |  TERRESTRIAL PLATFORM</a:t>
-            </a:r>
-          </a:p>
-          <a:p>
-            <a:pPr>
-              <a:defRPr sz="2500" b="1">
-                <a:solidFill>
-                  <a:srgbClr val="FFFFFF"/>
-                </a:solidFill>
-              </a:defRPr>
-            </a:pPr>
-            <a:r>
-              <a:t>Competitive Advantage: Terrestrial Platform vs. Legacy Systems</a:t>
+              <a:defRPr sz="950" b="1">
+                <a:solidFill>
+                  <a:srgbClr val="38BDF8"/>
+                </a:solidFill>
+              </a:defRPr>
+            </a:pPr>
+            <a:r>
+              <a:t>TERRESTRIAL PLATFORM  |  TERRAALARM  |  FIELD USE CASES</a:t>
             </a:r>
           </a:p>
         </p:txBody>
@@ -4713,8 +6165,8 @@
         </p:nvSpPr>
         <p:spPr>
           <a:xfrm>
-            <a:off x="731520" y="6446520"/>
-            <a:ext cx="10698480" cy="320040"/>
+            <a:off x="731520" y="731520"/>
+            <a:ext cx="9601200" cy="777240"/>
           </a:xfrm>
           <a:prstGeom prst="rect">
             <a:avLst/>
@@ -4722,44 +6174,83 @@
           <a:noFill/>
         </p:spPr>
         <p:txBody>
-          <a:bodyPr wrap="none">
+          <a:bodyPr wrap="square" lIns="0" rIns="0" tIns="0" bIns="0">
             <a:spAutoFit/>
           </a:bodyPr>
           <a:lstStyle/>
           <a:p>
             <a:pPr>
-              <a:defRPr sz="1000">
+              <a:defRPr sz="1900" b="1">
+                <a:solidFill>
+                  <a:srgbClr val="FFFFFF"/>
+                </a:solidFill>
+              </a:defRPr>
+            </a:pPr>
+            <a:r>
+              <a:t>Operational Use Cases &amp; Field Impact</a:t>
+            </a:r>
+          </a:p>
+          <a:p>
+            <a:pPr>
+              <a:spcBef>
+                <a:spcPts val="300"/>
+              </a:spcBef>
+              <a:defRPr sz="1050">
                 <a:solidFill>
                   <a:srgbClr val="94A3B8"/>
                 </a:solidFill>
               </a:defRPr>
             </a:pPr>
             <a:r>
-              <a:t>TERRESTRIAL PLATFORM  |  TERRAALARM CATALOGUE  |  CONFIDENTIAL - AUTHORISED SYSTEM INTEGRATORS ONLY</a:t>
-            </a:r>
-          </a:p>
-        </p:txBody>
-      </p:sp>
-      <p:sp>
-        <p:nvSpPr>
-          <p:cNvPr id="6" name="Rectangle 5"/>
+              <a:t>Actual documented use cases across Quality Assurance, Reduced Manpower, Efficiency, and Asset Productivity.</a:t>
+            </a:r>
+          </a:p>
+        </p:txBody>
+      </p:sp>
+      <p:pic>
+        <p:nvPicPr>
+          <p:cNvPr id="6" name="Picture 5" descr="tp_logo_white.png"/>
+          <p:cNvPicPr>
+            <a:picLocks noChangeAspect="1"/>
+          </p:cNvPicPr>
+          <p:nvPr/>
+        </p:nvPicPr>
+        <p:blipFill>
+          <a:blip r:embed="rId2"/>
+          <a:stretch>
+            <a:fillRect/>
+          </a:stretch>
+        </p:blipFill>
+        <p:spPr>
+          <a:xfrm>
+            <a:off x="10469880" y="411480"/>
+            <a:ext cx="987552" cy="384048"/>
+          </a:xfrm>
+          <a:prstGeom prst="rect">
+            <a:avLst/>
+          </a:prstGeom>
+        </p:spPr>
+      </p:pic>
+      <p:sp>
+        <p:nvSpPr>
+          <p:cNvPr id="7" name="Rounded Rectangle 6"/>
           <p:cNvSpPr/>
           <p:nvPr/>
         </p:nvSpPr>
         <p:spPr>
           <a:xfrm>
-            <a:off x="731520" y="1645920"/>
-            <a:ext cx="5212080" cy="502920"/>
-          </a:xfrm>
-          <a:prstGeom prst="rect">
+            <a:off x="731520" y="1691640"/>
+            <a:ext cx="5230368" cy="2194560"/>
+          </a:xfrm>
+          <a:prstGeom prst="roundRect">
             <a:avLst/>
           </a:prstGeom>
           <a:solidFill>
-            <a:srgbClr val="280F14"/>
+            <a:srgbClr val="131926"/>
           </a:solidFill>
-          <a:ln>
+          <a:ln w="12700">
             <a:solidFill>
-              <a:srgbClr val="FF5555"/>
+              <a:srgbClr val="28344B"/>
             </a:solidFill>
           </a:ln>
         </p:spPr>
@@ -4781,39 +6272,95 @@
           <a:bodyPr rtlCol="0" anchor="ctr"/>
           <a:lstStyle/>
           <a:p>
-            <a:pPr algn="ctr">
-              <a:defRPr sz="1250" b="1">
-                <a:solidFill>
-                  <a:srgbClr val="FF5555"/>
-                </a:solidFill>
-              </a:defRPr>
-            </a:pPr>
-            <a:r>
-              <a:t>TRADITIONAL LEGACY SCADA / SILOED SYSTEMS</a:t>
-            </a:r>
-          </a:p>
-        </p:txBody>
-      </p:sp>
-      <p:sp>
-        <p:nvSpPr>
-          <p:cNvPr id="7" name="Rectangle 6"/>
+            <a:pPr algn="ctr"/>
+          </a:p>
+        </p:txBody>
+      </p:sp>
+      <p:sp>
+        <p:nvSpPr>
+          <p:cNvPr id="8" name="TextBox 7"/>
+          <p:cNvSpPr txBox="1"/>
+          <p:nvPr/>
+        </p:nvSpPr>
+        <p:spPr>
+          <a:xfrm>
+            <a:off x="960120" y="1874520"/>
+            <a:ext cx="4773168" cy="1828800"/>
+          </a:xfrm>
+          <a:prstGeom prst="rect">
+            <a:avLst/>
+          </a:prstGeom>
+          <a:noFill/>
+        </p:spPr>
+        <p:txBody>
+          <a:bodyPr wrap="square" lIns="0" rIns="0" tIns="0" bIns="0">
+            <a:spAutoFit/>
+          </a:bodyPr>
+          <a:lstStyle/>
+          <a:p>
+            <a:pPr>
+              <a:defRPr sz="850" b="1">
+                <a:solidFill>
+                  <a:srgbClr val="34D399"/>
+                </a:solidFill>
+              </a:defRPr>
+            </a:pPr>
+            <a:r>
+              <a:t>CASE 01  |  PRODUCTIVITY &amp; SAFETY</a:t>
+            </a:r>
+          </a:p>
+          <a:p>
+            <a:pPr>
+              <a:spcBef>
+                <a:spcPts val="300"/>
+              </a:spcBef>
+              <a:spcAft>
+                <a:spcPts val="600"/>
+              </a:spcAft>
+              <a:defRPr sz="1300" b="1">
+                <a:solidFill>
+                  <a:srgbClr val="FFFFFF"/>
+                </a:solidFill>
+              </a:defRPr>
+            </a:pPr>
+            <a:r>
+              <a:t>Productivity &amp; Safety (Alarm Lifecycle Management)</a:t>
+            </a:r>
+          </a:p>
+          <a:p>
+            <a:pPr>
+              <a:defRPr sz="1000">
+                <a:solidFill>
+                  <a:srgbClr val="F1F5F9"/>
+                </a:solidFill>
+              </a:defRPr>
+            </a:pPr>
+            <a:r>
+              <a:t>Configurable alarm generation, prioritization, acknowledgment, shelving, suppression, escalation, and closure conforming to ISA 18.2 standards.</a:t>
+            </a:r>
+          </a:p>
+        </p:txBody>
+      </p:sp>
+      <p:sp>
+        <p:nvSpPr>
+          <p:cNvPr id="9" name="Rounded Rectangle 8"/>
           <p:cNvSpPr/>
           <p:nvPr/>
         </p:nvSpPr>
         <p:spPr>
           <a:xfrm>
-            <a:off x="6217920" y="1645920"/>
-            <a:ext cx="5212080" cy="502920"/>
-          </a:xfrm>
-          <a:prstGeom prst="rect">
+            <a:off x="6227064" y="1691640"/>
+            <a:ext cx="5230368" cy="2194560"/>
+          </a:xfrm>
+          <a:prstGeom prst="roundRect">
             <a:avLst/>
           </a:prstGeom>
           <a:solidFill>
-            <a:srgbClr val="0A2D3C"/>
+            <a:srgbClr val="131926"/>
           </a:solidFill>
-          <a:ln>
+          <a:ln w="12700">
             <a:solidFill>
-              <a:srgbClr val="00D4FF"/>
+              <a:srgbClr val="28344B"/>
             </a:solidFill>
           </a:ln>
         </p:spPr>
@@ -4835,39 +6382,95 @@
           <a:bodyPr rtlCol="0" anchor="ctr"/>
           <a:lstStyle/>
           <a:p>
-            <a:pPr algn="ctr">
-              <a:defRPr sz="1250" b="1">
-                <a:solidFill>
-                  <a:srgbClr val="00D4FF"/>
-                </a:solidFill>
-              </a:defRPr>
-            </a:pPr>
-            <a:r>
-              <a:t>TERRAALARM TERRESTRIAL PLATFORM ADVANTAGE</a:t>
-            </a:r>
-          </a:p>
-        </p:txBody>
-      </p:sp>
-      <p:sp>
-        <p:nvSpPr>
-          <p:cNvPr id="8" name="Rounded Rectangle 7"/>
+            <a:pPr algn="ctr"/>
+          </a:p>
+        </p:txBody>
+      </p:sp>
+      <p:sp>
+        <p:nvSpPr>
+          <p:cNvPr id="10" name="TextBox 9"/>
+          <p:cNvSpPr txBox="1"/>
+          <p:nvPr/>
+        </p:nvSpPr>
+        <p:spPr>
+          <a:xfrm>
+            <a:off x="6455664" y="1874520"/>
+            <a:ext cx="4773168" cy="1828800"/>
+          </a:xfrm>
+          <a:prstGeom prst="rect">
+            <a:avLst/>
+          </a:prstGeom>
+          <a:noFill/>
+        </p:spPr>
+        <p:txBody>
+          <a:bodyPr wrap="square" lIns="0" rIns="0" tIns="0" bIns="0">
+            <a:spAutoFit/>
+          </a:bodyPr>
+          <a:lstStyle/>
+          <a:p>
+            <a:pPr>
+              <a:defRPr sz="850" b="1">
+                <a:solidFill>
+                  <a:srgbClr val="34D399"/>
+                </a:solidFill>
+              </a:defRPr>
+            </a:pPr>
+            <a:r>
+              <a:t>CASE 02  |  QA &amp; FORENSICS</a:t>
+            </a:r>
+          </a:p>
+          <a:p>
+            <a:pPr>
+              <a:spcBef>
+                <a:spcPts val="300"/>
+              </a:spcBef>
+              <a:spcAft>
+                <a:spcPts val="600"/>
+              </a:spcAft>
+              <a:defRPr sz="1300" b="1">
+                <a:solidFill>
+                  <a:srgbClr val="FFFFFF"/>
+                </a:solidFill>
+              </a:defRPr>
+            </a:pPr>
+            <a:r>
+              <a:t>QA &amp; Forensics (Event Correlation &amp; SOE)</a:t>
+            </a:r>
+          </a:p>
+          <a:p>
+            <a:pPr>
+              <a:defRPr sz="1000">
+                <a:solidFill>
+                  <a:srgbClr val="F1F5F9"/>
+                </a:solidFill>
+              </a:defRPr>
+            </a:pPr>
+            <a:r>
+              <a:t>Centralized event correlation with synchronized microsecond timestamps for Sequence of Events (SOE) analysis and fast disturbance investigation.</a:t>
+            </a:r>
+          </a:p>
+        </p:txBody>
+      </p:sp>
+      <p:sp>
+        <p:nvSpPr>
+          <p:cNvPr id="11" name="Rounded Rectangle 10"/>
           <p:cNvSpPr/>
           <p:nvPr/>
         </p:nvSpPr>
         <p:spPr>
           <a:xfrm>
-            <a:off x="731520" y="2240280"/>
-            <a:ext cx="5212080" cy="960120"/>
+            <a:off x="731520" y="4114800"/>
+            <a:ext cx="5230368" cy="2194560"/>
           </a:xfrm>
           <a:prstGeom prst="roundRect">
             <a:avLst/>
           </a:prstGeom>
           <a:solidFill>
-            <a:srgbClr val="0F172A"/>
+            <a:srgbClr val="131926"/>
           </a:solidFill>
-          <a:ln>
+          <a:ln w="12700">
             <a:solidFill>
-              <a:srgbClr val="1E293B"/>
+              <a:srgbClr val="28344B"/>
             </a:solidFill>
           </a:ln>
         </p:spPr>
@@ -4886,42 +6489,98 @@
           </a:fontRef>
         </p:style>
         <p:txBody>
-          <a:bodyPr rtlCol="0" anchor="ctr" wrap="square"/>
-          <a:lstStyle/>
-          <a:p>
-            <a:pPr algn="ctr">
-              <a:defRPr sz="1200">
-                <a:solidFill>
-                  <a:srgbClr val="94A3B8"/>
-                </a:solidFill>
-              </a:defRPr>
-            </a:pPr>
-            <a:r>
-              <a:t>Hundreds of alarms firing every minute during a trip, overwhelming operators into cognitive paralysis.</a:t>
-            </a:r>
-          </a:p>
-        </p:txBody>
-      </p:sp>
-      <p:sp>
-        <p:nvSpPr>
-          <p:cNvPr id="9" name="Rounded Rectangle 8"/>
+          <a:bodyPr rtlCol="0" anchor="ctr"/>
+          <a:lstStyle/>
+          <a:p>
+            <a:pPr algn="ctr"/>
+          </a:p>
+        </p:txBody>
+      </p:sp>
+      <p:sp>
+        <p:nvSpPr>
+          <p:cNvPr id="12" name="TextBox 11"/>
+          <p:cNvSpPr txBox="1"/>
+          <p:nvPr/>
+        </p:nvSpPr>
+        <p:spPr>
+          <a:xfrm>
+            <a:off x="960120" y="4297680"/>
+            <a:ext cx="4773168" cy="1828800"/>
+          </a:xfrm>
+          <a:prstGeom prst="rect">
+            <a:avLst/>
+          </a:prstGeom>
+          <a:noFill/>
+        </p:spPr>
+        <p:txBody>
+          <a:bodyPr wrap="square" lIns="0" rIns="0" tIns="0" bIns="0">
+            <a:spAutoFit/>
+          </a:bodyPr>
+          <a:lstStyle/>
+          <a:p>
+            <a:pPr>
+              <a:defRPr sz="850" b="1">
+                <a:solidFill>
+                  <a:srgbClr val="34D399"/>
+                </a:solidFill>
+              </a:defRPr>
+            </a:pPr>
+            <a:r>
+              <a:t>CASE 03  |  EFFICIENCY</a:t>
+            </a:r>
+          </a:p>
+          <a:p>
+            <a:pPr>
+              <a:spcBef>
+                <a:spcPts val="300"/>
+              </a:spcBef>
+              <a:spcAft>
+                <a:spcPts val="600"/>
+              </a:spcAft>
+              <a:defRPr sz="1300" b="1">
+                <a:solidFill>
+                  <a:srgbClr val="FFFFFF"/>
+                </a:solidFill>
+              </a:defRPr>
+            </a:pPr>
+            <a:r>
+              <a:t>Efficiency (Alarm Analytics &amp; Chattering Suppression)</a:t>
+            </a:r>
+          </a:p>
+          <a:p>
+            <a:pPr>
+              <a:defRPr sz="1000">
+                <a:solidFill>
+                  <a:srgbClr val="F1F5F9"/>
+                </a:solidFill>
+              </a:defRPr>
+            </a:pPr>
+            <a:r>
+              <a:t>Automated alarm trending, chattering alarm detection, nuisance alarm pattern analysis, and dynamic alarm flood suppression.</a:t>
+            </a:r>
+          </a:p>
+        </p:txBody>
+      </p:sp>
+      <p:sp>
+        <p:nvSpPr>
+          <p:cNvPr id="13" name="Rounded Rectangle 12"/>
           <p:cNvSpPr/>
           <p:nvPr/>
         </p:nvSpPr>
         <p:spPr>
           <a:xfrm>
-            <a:off x="6217920" y="2240280"/>
-            <a:ext cx="5212080" cy="960120"/>
+            <a:off x="6227064" y="4114800"/>
+            <a:ext cx="5230368" cy="2194560"/>
           </a:xfrm>
           <a:prstGeom prst="roundRect">
             <a:avLst/>
           </a:prstGeom>
           <a:solidFill>
-            <a:srgbClr val="141E37"/>
+            <a:srgbClr val="131926"/>
           </a:solidFill>
-          <a:ln>
+          <a:ln w="12700">
             <a:solidFill>
-              <a:srgbClr val="00D4FF"/>
+              <a:srgbClr val="28344B"/>
             </a:solidFill>
           </a:ln>
         </p:spPr>
@@ -4940,342 +6599,74 @@
           </a:fontRef>
         </p:style>
         <p:txBody>
-          <a:bodyPr rtlCol="0" anchor="ctr" wrap="square"/>
-          <a:lstStyle/>
-          <a:p>
-            <a:pPr algn="ctr">
-              <a:defRPr sz="1250" b="1">
+          <a:bodyPr rtlCol="0" anchor="ctr"/>
+          <a:lstStyle/>
+          <a:p>
+            <a:pPr algn="ctr"/>
+          </a:p>
+        </p:txBody>
+      </p:sp>
+      <p:sp>
+        <p:nvSpPr>
+          <p:cNvPr id="14" name="TextBox 13"/>
+          <p:cNvSpPr txBox="1"/>
+          <p:nvPr/>
+        </p:nvSpPr>
+        <p:spPr>
+          <a:xfrm>
+            <a:off x="6455664" y="4297680"/>
+            <a:ext cx="4773168" cy="1828800"/>
+          </a:xfrm>
+          <a:prstGeom prst="rect">
+            <a:avLst/>
+          </a:prstGeom>
+          <a:noFill/>
+        </p:spPr>
+        <p:txBody>
+          <a:bodyPr wrap="square" lIns="0" rIns="0" tIns="0" bIns="0">
+            <a:spAutoFit/>
+          </a:bodyPr>
+          <a:lstStyle/>
+          <a:p>
+            <a:pPr>
+              <a:defRPr sz="850" b="1">
+                <a:solidFill>
+                  <a:srgbClr val="34D399"/>
+                </a:solidFill>
+              </a:defRPr>
+            </a:pPr>
+            <a:r>
+              <a:t>CASE 04  |  REDUCED MANPOWER</a:t>
+            </a:r>
+          </a:p>
+          <a:p>
+            <a:pPr>
+              <a:spcBef>
+                <a:spcPts val="300"/>
+              </a:spcBef>
+              <a:spcAft>
+                <a:spcPts val="600"/>
+              </a:spcAft>
+              <a:defRPr sz="1300" b="1">
                 <a:solidFill>
                   <a:srgbClr val="FFFFFF"/>
                 </a:solidFill>
               </a:defRPr>
             </a:pPr>
             <a:r>
-              <a:t>Dynamic state-based shelving and alarm suppression isolating the single initiating event.</a:t>
-            </a:r>
-          </a:p>
-        </p:txBody>
-      </p:sp>
-      <p:sp>
-        <p:nvSpPr>
-          <p:cNvPr id="10" name="Rounded Rectangle 9"/>
-          <p:cNvSpPr/>
-          <p:nvPr/>
-        </p:nvSpPr>
-        <p:spPr>
-          <a:xfrm>
-            <a:off x="731520" y="3291840"/>
-            <a:ext cx="5212080" cy="960120"/>
-          </a:xfrm>
-          <a:prstGeom prst="roundRect">
-            <a:avLst/>
-          </a:prstGeom>
-          <a:solidFill>
-            <a:srgbClr val="0F172A"/>
-          </a:solidFill>
-          <a:ln>
-            <a:solidFill>
-              <a:srgbClr val="1E293B"/>
-            </a:solidFill>
-          </a:ln>
-        </p:spPr>
-        <p:style>
-          <a:lnRef idx="1">
-            <a:schemeClr val="accent1"/>
-          </a:lnRef>
-          <a:fillRef idx="3">
-            <a:schemeClr val="accent1"/>
-          </a:fillRef>
-          <a:effectRef idx="2">
-            <a:schemeClr val="accent1"/>
-          </a:effectRef>
-          <a:fontRef idx="minor">
-            <a:schemeClr val="lt1"/>
-          </a:fontRef>
-        </p:style>
-        <p:txBody>
-          <a:bodyPr rtlCol="0" anchor="ctr" wrap="square"/>
-          <a:lstStyle/>
-          <a:p>
-            <a:pPr algn="ctr">
-              <a:defRPr sz="1200">
-                <a:solidFill>
-                  <a:srgbClr val="94A3B8"/>
-                </a:solidFill>
-              </a:defRPr>
-            </a:pPr>
-            <a:r>
-              <a:t>Chattering alarms flickering due to bad sensor wiring or loose thresholds left unaddressed for months.</a:t>
-            </a:r>
-          </a:p>
-        </p:txBody>
-      </p:sp>
-      <p:sp>
-        <p:nvSpPr>
-          <p:cNvPr id="11" name="Rounded Rectangle 10"/>
-          <p:cNvSpPr/>
-          <p:nvPr/>
-        </p:nvSpPr>
-        <p:spPr>
-          <a:xfrm>
-            <a:off x="6217920" y="3291840"/>
-            <a:ext cx="5212080" cy="960120"/>
-          </a:xfrm>
-          <a:prstGeom prst="roundRect">
-            <a:avLst/>
-          </a:prstGeom>
-          <a:solidFill>
-            <a:srgbClr val="141E37"/>
-          </a:solidFill>
-          <a:ln>
-            <a:solidFill>
-              <a:srgbClr val="00D4FF"/>
-            </a:solidFill>
-          </a:ln>
-        </p:spPr>
-        <p:style>
-          <a:lnRef idx="1">
-            <a:schemeClr val="accent1"/>
-          </a:lnRef>
-          <a:fillRef idx="3">
-            <a:schemeClr val="accent1"/>
-          </a:fillRef>
-          <a:effectRef idx="2">
-            <a:schemeClr val="accent1"/>
-          </a:effectRef>
-          <a:fontRef idx="minor">
-            <a:schemeClr val="lt1"/>
-          </a:fontRef>
-        </p:style>
-        <p:txBody>
-          <a:bodyPr rtlCol="0" anchor="ctr" wrap="square"/>
-          <a:lstStyle/>
-          <a:p>
-            <a:pPr algn="ctr">
-              <a:defRPr sz="1250" b="1">
-                <a:solidFill>
-                  <a:srgbClr val="FFFFFF"/>
-                </a:solidFill>
-              </a:defRPr>
-            </a:pPr>
-            <a:r>
-              <a:t>Automated chattering detection algorithms with automated deadband adjustments and health flagging.</a:t>
-            </a:r>
-          </a:p>
-        </p:txBody>
-      </p:sp>
-      <p:sp>
-        <p:nvSpPr>
-          <p:cNvPr id="12" name="Rounded Rectangle 11"/>
-          <p:cNvSpPr/>
-          <p:nvPr/>
-        </p:nvSpPr>
-        <p:spPr>
-          <a:xfrm>
-            <a:off x="731520" y="4343400"/>
-            <a:ext cx="5212080" cy="960120"/>
-          </a:xfrm>
-          <a:prstGeom prst="roundRect">
-            <a:avLst/>
-          </a:prstGeom>
-          <a:solidFill>
-            <a:srgbClr val="0F172A"/>
-          </a:solidFill>
-          <a:ln>
-            <a:solidFill>
-              <a:srgbClr val="1E293B"/>
-            </a:solidFill>
-          </a:ln>
-        </p:spPr>
-        <p:style>
-          <a:lnRef idx="1">
-            <a:schemeClr val="accent1"/>
-          </a:lnRef>
-          <a:fillRef idx="3">
-            <a:schemeClr val="accent1"/>
-          </a:fillRef>
-          <a:effectRef idx="2">
-            <a:schemeClr val="accent1"/>
-          </a:effectRef>
-          <a:fontRef idx="minor">
-            <a:schemeClr val="lt1"/>
-          </a:fontRef>
-        </p:style>
-        <p:txBody>
-          <a:bodyPr rtlCol="0" anchor="ctr" wrap="square"/>
-          <a:lstStyle/>
-          <a:p>
-            <a:pPr algn="ctr">
-              <a:defRPr sz="1200">
-                <a:solidFill>
-                  <a:srgbClr val="94A3B8"/>
-                </a:solidFill>
-              </a:defRPr>
-            </a:pPr>
-            <a:r>
-              <a:t>Alarms with cryptic 8-character tag names and zero actionable guidance.</a:t>
-            </a:r>
-          </a:p>
-        </p:txBody>
-      </p:sp>
-      <p:sp>
-        <p:nvSpPr>
-          <p:cNvPr id="13" name="Rounded Rectangle 12"/>
-          <p:cNvSpPr/>
-          <p:nvPr/>
-        </p:nvSpPr>
-        <p:spPr>
-          <a:xfrm>
-            <a:off x="6217920" y="4343400"/>
-            <a:ext cx="5212080" cy="960120"/>
-          </a:xfrm>
-          <a:prstGeom prst="roundRect">
-            <a:avLst/>
-          </a:prstGeom>
-          <a:solidFill>
-            <a:srgbClr val="141E37"/>
-          </a:solidFill>
-          <a:ln>
-            <a:solidFill>
-              <a:srgbClr val="00D4FF"/>
-            </a:solidFill>
-          </a:ln>
-        </p:spPr>
-        <p:style>
-          <a:lnRef idx="1">
-            <a:schemeClr val="accent1"/>
-          </a:lnRef>
-          <a:fillRef idx="3">
-            <a:schemeClr val="accent1"/>
-          </a:fillRef>
-          <a:effectRef idx="2">
-            <a:schemeClr val="accent1"/>
-          </a:effectRef>
-          <a:fontRef idx="minor">
-            <a:schemeClr val="lt1"/>
-          </a:fontRef>
-        </p:style>
-        <p:txBody>
-          <a:bodyPr rtlCol="0" anchor="ctr" wrap="square"/>
-          <a:lstStyle/>
-          <a:p>
-            <a:pPr algn="ctr">
-              <a:defRPr sz="1250" b="1">
-                <a:solidFill>
-                  <a:srgbClr val="FFFFFF"/>
-                </a:solidFill>
-              </a:defRPr>
-            </a:pPr>
-            <a:r>
-              <a:t>Context-rich alarm cards with verified Standard Operating Procedures (SOPs) and 1-click mitigation actions.</a:t>
-            </a:r>
-          </a:p>
-        </p:txBody>
-      </p:sp>
-      <p:sp>
-        <p:nvSpPr>
-          <p:cNvPr id="14" name="Rounded Rectangle 13"/>
-          <p:cNvSpPr/>
-          <p:nvPr/>
-        </p:nvSpPr>
-        <p:spPr>
-          <a:xfrm>
-            <a:off x="731520" y="5394960"/>
-            <a:ext cx="5212080" cy="960120"/>
-          </a:xfrm>
-          <a:prstGeom prst="roundRect">
-            <a:avLst/>
-          </a:prstGeom>
-          <a:solidFill>
-            <a:srgbClr val="0F172A"/>
-          </a:solidFill>
-          <a:ln>
-            <a:solidFill>
-              <a:srgbClr val="1E293B"/>
-            </a:solidFill>
-          </a:ln>
-        </p:spPr>
-        <p:style>
-          <a:lnRef idx="1">
-            <a:schemeClr val="accent1"/>
-          </a:lnRef>
-          <a:fillRef idx="3">
-            <a:schemeClr val="accent1"/>
-          </a:fillRef>
-          <a:effectRef idx="2">
-            <a:schemeClr val="accent1"/>
-          </a:effectRef>
-          <a:fontRef idx="minor">
-            <a:schemeClr val="lt1"/>
-          </a:fontRef>
-        </p:style>
-        <p:txBody>
-          <a:bodyPr rtlCol="0" anchor="ctr" wrap="square"/>
-          <a:lstStyle/>
-          <a:p>
-            <a:pPr algn="ctr">
-              <a:defRPr sz="1200">
-                <a:solidFill>
-                  <a:srgbClr val="94A3B8"/>
-                </a:solidFill>
-              </a:defRPr>
-            </a:pPr>
-            <a:r>
-              <a:t>Static high/low threshold alarms trigger only after physical process degradation has occurred.</a:t>
-            </a:r>
-          </a:p>
-        </p:txBody>
-      </p:sp>
-      <p:sp>
-        <p:nvSpPr>
-          <p:cNvPr id="15" name="Rounded Rectangle 14"/>
-          <p:cNvSpPr/>
-          <p:nvPr/>
-        </p:nvSpPr>
-        <p:spPr>
-          <a:xfrm>
-            <a:off x="6217920" y="5394960"/>
-            <a:ext cx="5212080" cy="960120"/>
-          </a:xfrm>
-          <a:prstGeom prst="roundRect">
-            <a:avLst/>
-          </a:prstGeom>
-          <a:solidFill>
-            <a:srgbClr val="141E37"/>
-          </a:solidFill>
-          <a:ln>
-            <a:solidFill>
-              <a:srgbClr val="00D4FF"/>
-            </a:solidFill>
-          </a:ln>
-        </p:spPr>
-        <p:style>
-          <a:lnRef idx="1">
-            <a:schemeClr val="accent1"/>
-          </a:lnRef>
-          <a:fillRef idx="3">
-            <a:schemeClr val="accent1"/>
-          </a:fillRef>
-          <a:effectRef idx="2">
-            <a:schemeClr val="accent1"/>
-          </a:effectRef>
-          <a:fontRef idx="minor">
-            <a:schemeClr val="lt1"/>
-          </a:fontRef>
-        </p:style>
-        <p:txBody>
-          <a:bodyPr rtlCol="0" anchor="ctr" wrap="square"/>
-          <a:lstStyle/>
-          <a:p>
-            <a:pPr algn="ctr">
-              <a:defRPr sz="1250" b="1">
-                <a:solidFill>
-                  <a:srgbClr val="FFFFFF"/>
-                </a:solidFill>
-              </a:defRPr>
-            </a:pPr>
-            <a:r>
-              <a:t>TerraAlarm physics-informed models forecast multi-variable trajectories up to 72 hours in advance.</a:t>
+              <a:t>Reduced Manpower (Substation Cascade Trip Protection)</a:t>
+            </a:r>
+          </a:p>
+          <a:p>
+            <a:pPr>
+              <a:defRPr sz="1000">
+                <a:solidFill>
+                  <a:srgbClr val="F1F5F9"/>
+                </a:solidFill>
+              </a:defRPr>
+            </a:pPr>
+            <a:r>
+              <a:t>When a transmission line trips, automatically suppresses downstream secondary feeder alarms, guiding operators to the root cause.</a:t>
             </a:r>
           </a:p>
         </p:txBody>
@@ -5313,7 +6704,7 @@
             <a:avLst/>
           </a:prstGeom>
           <a:solidFill>
-            <a:srgbClr val="0A0E1A"/>
+            <a:srgbClr val="0B0F17"/>
           </a:solidFill>
           <a:ln>
             <a:noFill/>
@@ -5349,17 +6740,19 @@
         </p:nvSpPr>
         <p:spPr>
           <a:xfrm>
-            <a:off x="0" y="0"/>
-            <a:ext cx="12191695" cy="54864"/>
+            <a:off x="731520" y="365760"/>
+            <a:ext cx="10728655" cy="18288"/>
           </a:xfrm>
           <a:prstGeom prst="rect">
             <a:avLst/>
           </a:prstGeom>
           <a:solidFill>
-            <a:srgbClr val="00D4FF"/>
+            <a:srgbClr val="38BDF8"/>
           </a:solidFill>
           <a:ln>
-            <a:noFill/>
+            <a:solidFill>
+              <a:srgbClr val="38BDF8"/>
+            </a:solidFill>
           </a:ln>
         </p:spPr>
         <p:style>
@@ -5392,8 +6785,8 @@
         </p:nvSpPr>
         <p:spPr>
           <a:xfrm>
-            <a:off x="731520" y="365760"/>
-            <a:ext cx="10698480" cy="1005840"/>
+            <a:off x="731520" y="438912"/>
+            <a:ext cx="8229600" cy="274320"/>
           </a:xfrm>
           <a:prstGeom prst="rect">
             <a:avLst/>
@@ -5401,35 +6794,20 @@
           <a:noFill/>
         </p:spPr>
         <p:txBody>
-          <a:bodyPr wrap="square">
+          <a:bodyPr wrap="square" lIns="0" rIns="0" tIns="0" bIns="0">
             <a:spAutoFit/>
           </a:bodyPr>
           <a:lstStyle/>
           <a:p>
             <a:pPr>
-              <a:spcAft>
-                <a:spcPts val="400"/>
-              </a:spcAft>
-              <a:defRPr sz="1150" b="1">
-                <a:solidFill>
-                  <a:srgbClr val="00D4FF"/>
-                </a:solidFill>
-              </a:defRPr>
-            </a:pPr>
-            <a:r>
-              <a:t>TERRAALARM  |  TERRESTRIAL PLATFORM</a:t>
-            </a:r>
-          </a:p>
-          <a:p>
-            <a:pPr>
-              <a:defRPr sz="2500" b="1">
-                <a:solidFill>
-                  <a:srgbClr val="FFFFFF"/>
-                </a:solidFill>
-              </a:defRPr>
-            </a:pPr>
-            <a:r>
-              <a:t>End-to-End System Architecture &amp; Real-Time Pipeline</a:t>
+              <a:defRPr sz="950" b="1">
+                <a:solidFill>
+                  <a:srgbClr val="38BDF8"/>
+                </a:solidFill>
+              </a:defRPr>
+            </a:pPr>
+            <a:r>
+              <a:t>TERRESTRIAL PLATFORM  |  TERRAALARM  |  ARCHITECTURAL CONTRAST</a:t>
             </a:r>
           </a:p>
         </p:txBody>
@@ -5442,8 +6820,8 @@
         </p:nvSpPr>
         <p:spPr>
           <a:xfrm>
-            <a:off x="731520" y="6446520"/>
-            <a:ext cx="10698480" cy="320040"/>
+            <a:off x="731520" y="731520"/>
+            <a:ext cx="9601200" cy="777240"/>
           </a:xfrm>
           <a:prstGeom prst="rect">
             <a:avLst/>
@@ -5451,44 +6829,83 @@
           <a:noFill/>
         </p:spPr>
         <p:txBody>
-          <a:bodyPr wrap="none">
+          <a:bodyPr wrap="square" lIns="0" rIns="0" tIns="0" bIns="0">
             <a:spAutoFit/>
           </a:bodyPr>
           <a:lstStyle/>
           <a:p>
             <a:pPr>
-              <a:defRPr sz="1000">
+              <a:defRPr sz="1900" b="1">
+                <a:solidFill>
+                  <a:srgbClr val="FFFFFF"/>
+                </a:solidFill>
+              </a:defRPr>
+            </a:pPr>
+            <a:r>
+              <a:t>Comparison with Traditional SCADA / Legacy Systems</a:t>
+            </a:r>
+          </a:p>
+          <a:p>
+            <a:pPr>
+              <a:spcBef>
+                <a:spcPts val="300"/>
+              </a:spcBef>
+              <a:defRPr sz="1050">
                 <a:solidFill>
                   <a:srgbClr val="94A3B8"/>
                 </a:solidFill>
               </a:defRPr>
             </a:pPr>
             <a:r>
-              <a:t>TERRESTRIAL PLATFORM  |  TERRAALARM CATALOGUE  |  CONFIDENTIAL - AUTHORISED SYSTEM INTEGRATORS ONLY</a:t>
-            </a:r>
-          </a:p>
-        </p:txBody>
-      </p:sp>
-      <p:sp>
-        <p:nvSpPr>
-          <p:cNvPr id="6" name="Rounded Rectangle 5"/>
+              <a:t>Point-by-point contrast demonstrating the technological shift from legacy industrial automation to the Terrestrial Platform.</a:t>
+            </a:r>
+          </a:p>
+        </p:txBody>
+      </p:sp>
+      <p:pic>
+        <p:nvPicPr>
+          <p:cNvPr id="6" name="Picture 5" descr="tp_logo_white.png"/>
+          <p:cNvPicPr>
+            <a:picLocks noChangeAspect="1"/>
+          </p:cNvPicPr>
+          <p:nvPr/>
+        </p:nvPicPr>
+        <p:blipFill>
+          <a:blip r:embed="rId2"/>
+          <a:stretch>
+            <a:fillRect/>
+          </a:stretch>
+        </p:blipFill>
+        <p:spPr>
+          <a:xfrm>
+            <a:off x="10469880" y="411480"/>
+            <a:ext cx="987552" cy="384048"/>
+          </a:xfrm>
+          <a:prstGeom prst="rect">
+            <a:avLst/>
+          </a:prstGeom>
+        </p:spPr>
+      </p:pic>
+      <p:sp>
+        <p:nvSpPr>
+          <p:cNvPr id="7" name="Rounded Rectangle 6"/>
           <p:cNvSpPr/>
           <p:nvPr/>
         </p:nvSpPr>
         <p:spPr>
           <a:xfrm>
-            <a:off x="731520" y="1645920"/>
-            <a:ext cx="2523744" cy="4389120"/>
+            <a:off x="731520" y="1691640"/>
+            <a:ext cx="5230368" cy="502920"/>
           </a:xfrm>
           <a:prstGeom prst="roundRect">
             <a:avLst/>
           </a:prstGeom>
           <a:solidFill>
-            <a:srgbClr val="0F172A"/>
+            <a:srgbClr val="1C1216"/>
           </a:solidFill>
-          <a:ln>
+          <a:ln w="12700">
             <a:solidFill>
-              <a:srgbClr val="1E293B"/>
+              <a:srgbClr val="501923"/>
             </a:solidFill>
           </a:ln>
         </p:spPr>
@@ -5507,72 +6924,68 @@
           </a:fontRef>
         </p:style>
         <p:txBody>
-          <a:bodyPr rtlCol="0" anchor="ctr" wrap="square"/>
-          <a:lstStyle/>
-          <a:p>
-            <a:pPr algn="ctr">
-              <a:spcAft>
-                <a:spcPts val="800"/>
-              </a:spcAft>
+          <a:bodyPr rtlCol="0" anchor="ctr"/>
+          <a:lstStyle/>
+          <a:p>
+            <a:pPr algn="ctr"/>
+          </a:p>
+        </p:txBody>
+      </p:sp>
+      <p:sp>
+        <p:nvSpPr>
+          <p:cNvPr id="8" name="TextBox 7"/>
+          <p:cNvSpPr txBox="1"/>
+          <p:nvPr/>
+        </p:nvSpPr>
+        <p:spPr>
+          <a:xfrm>
+            <a:off x="868680" y="1783080"/>
+            <a:ext cx="4937760" cy="320040"/>
+          </a:xfrm>
+          <a:prstGeom prst="rect">
+            <a:avLst/>
+          </a:prstGeom>
+          <a:noFill/>
+        </p:spPr>
+        <p:txBody>
+          <a:bodyPr wrap="none">
+            <a:spAutoFit/>
+          </a:bodyPr>
+          <a:lstStyle/>
+          <a:p>
+            <a:pPr>
               <a:defRPr sz="1100" b="1">
                 <a:solidFill>
-                  <a:srgbClr val="00D4FF"/>
-                </a:solidFill>
-              </a:defRPr>
-            </a:pPr>
-            <a:r>
-              <a:t>LAYER 01</a:t>
-            </a:r>
-          </a:p>
-          <a:p>
-            <a:pPr>
-              <a:spcAft>
-                <a:spcPts val="1200"/>
-              </a:spcAft>
-              <a:defRPr sz="1550" b="1">
-                <a:solidFill>
-                  <a:srgbClr val="FFFFFF"/>
-                </a:solidFill>
-              </a:defRPr>
-            </a:pPr>
-            <a:r>
-              <a:t>Alarm &amp; SOE Ingestion</a:t>
-            </a:r>
-          </a:p>
-          <a:p>
-            <a:pPr>
-              <a:defRPr sz="1250">
-                <a:solidFill>
-                  <a:srgbClr val="C8D8F0"/>
-                </a:solidFill>
-              </a:defRPr>
-            </a:pPr>
-            <a:r>
-              <a:t>Sub-millisecond alarm acquisition from substation IEDs, DCS controllers, safety interlocks, and sequence of events (SOE) recorders.</a:t>
-            </a:r>
-          </a:p>
-        </p:txBody>
-      </p:sp>
-      <p:sp>
-        <p:nvSpPr>
-          <p:cNvPr id="7" name="Rounded Rectangle 6"/>
+                  <a:srgbClr val="EF4444"/>
+                </a:solidFill>
+              </a:defRPr>
+            </a:pPr>
+            <a:r>
+              <a:t>TRADITIONAL LEGACY SYSTEMS / SILOED SCADA</a:t>
+            </a:r>
+          </a:p>
+        </p:txBody>
+      </p:sp>
+      <p:sp>
+        <p:nvSpPr>
+          <p:cNvPr id="9" name="Rounded Rectangle 8"/>
           <p:cNvSpPr/>
           <p:nvPr/>
         </p:nvSpPr>
         <p:spPr>
           <a:xfrm>
-            <a:off x="3456432" y="1645920"/>
-            <a:ext cx="2523744" cy="4389120"/>
+            <a:off x="6227064" y="1691640"/>
+            <a:ext cx="5230368" cy="502920"/>
           </a:xfrm>
           <a:prstGeom prst="roundRect">
             <a:avLst/>
           </a:prstGeom>
           <a:solidFill>
-            <a:srgbClr val="0F172A"/>
+            <a:srgbClr val="0F1C26"/>
           </a:solidFill>
-          <a:ln>
+          <a:ln w="12700">
             <a:solidFill>
-              <a:srgbClr val="1E293B"/>
+              <a:srgbClr val="194B5F"/>
             </a:solidFill>
           </a:ln>
         </p:spPr>
@@ -5591,72 +7004,68 @@
           </a:fontRef>
         </p:style>
         <p:txBody>
-          <a:bodyPr rtlCol="0" anchor="ctr" wrap="square"/>
-          <a:lstStyle/>
-          <a:p>
-            <a:pPr algn="ctr">
-              <a:spcAft>
-                <a:spcPts val="800"/>
-              </a:spcAft>
+          <a:bodyPr rtlCol="0" anchor="ctr"/>
+          <a:lstStyle/>
+          <a:p>
+            <a:pPr algn="ctr"/>
+          </a:p>
+        </p:txBody>
+      </p:sp>
+      <p:sp>
+        <p:nvSpPr>
+          <p:cNvPr id="10" name="TextBox 9"/>
+          <p:cNvSpPr txBox="1"/>
+          <p:nvPr/>
+        </p:nvSpPr>
+        <p:spPr>
+          <a:xfrm>
+            <a:off x="6364224" y="1783080"/>
+            <a:ext cx="4937760" cy="320040"/>
+          </a:xfrm>
+          <a:prstGeom prst="rect">
+            <a:avLst/>
+          </a:prstGeom>
+          <a:noFill/>
+        </p:spPr>
+        <p:txBody>
+          <a:bodyPr wrap="none">
+            <a:spAutoFit/>
+          </a:bodyPr>
+          <a:lstStyle/>
+          <a:p>
+            <a:pPr>
               <a:defRPr sz="1100" b="1">
                 <a:solidFill>
-                  <a:srgbClr val="00D4FF"/>
-                </a:solidFill>
-              </a:defRPr>
-            </a:pPr>
-            <a:r>
-              <a:t>LAYER 02</a:t>
-            </a:r>
-          </a:p>
-          <a:p>
-            <a:pPr>
-              <a:spcAft>
-                <a:spcPts val="1200"/>
-              </a:spcAft>
-              <a:defRPr sz="1550" b="1">
-                <a:solidFill>
-                  <a:srgbClr val="FFFFFF"/>
-                </a:solidFill>
-              </a:defRPr>
-            </a:pPr>
-            <a:r>
-              <a:t>Microsecond Event Stamping</a:t>
-            </a:r>
-          </a:p>
-          <a:p>
-            <a:pPr>
-              <a:defRPr sz="1250">
-                <a:solidFill>
-                  <a:srgbClr val="C8D8F0"/>
-                </a:solidFill>
-              </a:defRPr>
-            </a:pPr>
-            <a:r>
-              <a:t>GPS/IRIG-B synchronized microsecond timestamp correlation, high-throughput alarm event buffering, and deduplication fabric.</a:t>
-            </a:r>
-          </a:p>
-        </p:txBody>
-      </p:sp>
-      <p:sp>
-        <p:nvSpPr>
-          <p:cNvPr id="8" name="Rounded Rectangle 7"/>
+                  <a:srgbClr val="38BDF8"/>
+                </a:solidFill>
+              </a:defRPr>
+            </a:pPr>
+            <a:r>
+              <a:t>TERRAALARM TERRESTRIAL PLATFORM ADVANTAGE</a:t>
+            </a:r>
+          </a:p>
+        </p:txBody>
+      </p:sp>
+      <p:sp>
+        <p:nvSpPr>
+          <p:cNvPr id="11" name="Rounded Rectangle 10"/>
           <p:cNvSpPr/>
           <p:nvPr/>
         </p:nvSpPr>
         <p:spPr>
           <a:xfrm>
-            <a:off x="6181344" y="1645920"/>
-            <a:ext cx="2523744" cy="4389120"/>
+            <a:off x="731520" y="2286000"/>
+            <a:ext cx="5230368" cy="1298448"/>
           </a:xfrm>
           <a:prstGeom prst="roundRect">
             <a:avLst/>
           </a:prstGeom>
           <a:solidFill>
-            <a:srgbClr val="0F172A"/>
+            <a:srgbClr val="1C1216"/>
           </a:solidFill>
-          <a:ln>
+          <a:ln w="12700">
             <a:solidFill>
-              <a:srgbClr val="1E293B"/>
+              <a:srgbClr val="501923"/>
             </a:solidFill>
           </a:ln>
         </p:spPr>
@@ -5675,72 +7084,68 @@
           </a:fontRef>
         </p:style>
         <p:txBody>
-          <a:bodyPr rtlCol="0" anchor="ctr" wrap="square"/>
-          <a:lstStyle/>
-          <a:p>
-            <a:pPr algn="ctr">
-              <a:spcAft>
-                <a:spcPts val="800"/>
-              </a:spcAft>
-              <a:defRPr sz="1100" b="1">
-                <a:solidFill>
-                  <a:srgbClr val="00D4FF"/>
-                </a:solidFill>
-              </a:defRPr>
-            </a:pPr>
-            <a:r>
-              <a:t>LAYER 03</a:t>
-            </a:r>
-          </a:p>
-          <a:p>
-            <a:pPr>
-              <a:spcAft>
-                <a:spcPts val="1200"/>
-              </a:spcAft>
-              <a:defRPr sz="1550" b="1">
-                <a:solidFill>
-                  <a:srgbClr val="FFFFFF"/>
-                </a:solidFill>
-              </a:defRPr>
-            </a:pPr>
-            <a:r>
-              <a:t>Flood Suppression Core</a:t>
-            </a:r>
-          </a:p>
-          <a:p>
-            <a:pPr>
-              <a:defRPr sz="1250">
-                <a:solidFill>
-                  <a:srgbClr val="C8D8F0"/>
-                </a:solidFill>
-              </a:defRPr>
-            </a:pPr>
-            <a:r>
-              <a:t>Dynamic alarm chatter suppression, state-based alarm masking, root-cause propagation trees, and ANSI/ISA 18.2 / EEMUA 191 KPIs.</a:t>
-            </a:r>
-          </a:p>
-        </p:txBody>
-      </p:sp>
-      <p:sp>
-        <p:nvSpPr>
-          <p:cNvPr id="9" name="Rounded Rectangle 8"/>
+          <a:bodyPr rtlCol="0" anchor="ctr"/>
+          <a:lstStyle/>
+          <a:p>
+            <a:pPr algn="ctr"/>
+          </a:p>
+        </p:txBody>
+      </p:sp>
+      <p:sp>
+        <p:nvSpPr>
+          <p:cNvPr id="12" name="TextBox 11"/>
+          <p:cNvSpPr txBox="1"/>
+          <p:nvPr/>
+        </p:nvSpPr>
+        <p:spPr>
+          <a:xfrm>
+            <a:off x="868680" y="2359152"/>
+            <a:ext cx="4956048" cy="1152144"/>
+          </a:xfrm>
+          <a:prstGeom prst="rect">
+            <a:avLst/>
+          </a:prstGeom>
+          <a:noFill/>
+        </p:spPr>
+        <p:txBody>
+          <a:bodyPr wrap="square" lIns="0" rIns="0" tIns="0" bIns="0">
+            <a:spAutoFit/>
+          </a:bodyPr>
+          <a:lstStyle/>
+          <a:p>
+            <a:pPr>
+              <a:defRPr sz="1000">
+                <a:solidFill>
+                  <a:srgbClr val="F1F5F9"/>
+                </a:solidFill>
+              </a:defRPr>
+            </a:pPr>
+            <a:r>
+              <a:t>Hundreds of alarms firing every minute during a trip, overwhelming operators into cognitive paralysis.</a:t>
+            </a:r>
+          </a:p>
+        </p:txBody>
+      </p:sp>
+      <p:sp>
+        <p:nvSpPr>
+          <p:cNvPr id="13" name="Rounded Rectangle 12"/>
           <p:cNvSpPr/>
           <p:nvPr/>
         </p:nvSpPr>
         <p:spPr>
           <a:xfrm>
-            <a:off x="8906256" y="1645920"/>
-            <a:ext cx="2523744" cy="4389120"/>
+            <a:off x="6227064" y="2286000"/>
+            <a:ext cx="5230368" cy="1298448"/>
           </a:xfrm>
           <a:prstGeom prst="roundRect">
             <a:avLst/>
           </a:prstGeom>
           <a:solidFill>
-            <a:srgbClr val="0F172A"/>
+            <a:srgbClr val="0F1C26"/>
           </a:solidFill>
-          <a:ln>
+          <a:ln w="12700">
             <a:solidFill>
-              <a:srgbClr val="1E293B"/>
+              <a:srgbClr val="194B5F"/>
             </a:solidFill>
           </a:ln>
         </p:spPr>
@@ -5759,48 +7164,364 @@
           </a:fontRef>
         </p:style>
         <p:txBody>
-          <a:bodyPr rtlCol="0" anchor="ctr" wrap="square"/>
-          <a:lstStyle/>
-          <a:p>
-            <a:pPr algn="ctr">
-              <a:spcAft>
-                <a:spcPts val="800"/>
-              </a:spcAft>
-              <a:defRPr sz="1100" b="1">
-                <a:solidFill>
-                  <a:srgbClr val="00D4FF"/>
-                </a:solidFill>
-              </a:defRPr>
-            </a:pPr>
-            <a:r>
-              <a:t>LAYER 04</a:t>
-            </a:r>
-          </a:p>
-          <a:p>
-            <a:pPr>
-              <a:spcAft>
-                <a:spcPts val="1200"/>
-              </a:spcAft>
-              <a:defRPr sz="1550" b="1">
-                <a:solidFill>
-                  <a:srgbClr val="FFFFFF"/>
-                </a:solidFill>
-              </a:defRPr>
-            </a:pPr>
-            <a:r>
-              <a:t>Operator Shelving Cockpit</a:t>
-            </a:r>
-          </a:p>
-          <a:p>
-            <a:pPr>
-              <a:defRPr sz="1250">
-                <a:solidFill>
-                  <a:srgbClr val="C8D8F0"/>
-                </a:solidFill>
-              </a:defRPr>
-            </a:pPr>
-            <a:r>
-              <a:t>Dynamic alarm priority gating, automated operator shelving workflows, SIL-3 2oo3 interlock audits, and ISA-101 alarm summary banners.</a:t>
+          <a:bodyPr rtlCol="0" anchor="ctr"/>
+          <a:lstStyle/>
+          <a:p>
+            <a:pPr algn="ctr"/>
+          </a:p>
+        </p:txBody>
+      </p:sp>
+      <p:sp>
+        <p:nvSpPr>
+          <p:cNvPr id="14" name="TextBox 13"/>
+          <p:cNvSpPr txBox="1"/>
+          <p:nvPr/>
+        </p:nvSpPr>
+        <p:spPr>
+          <a:xfrm>
+            <a:off x="6364224" y="2359152"/>
+            <a:ext cx="4956048" cy="1152144"/>
+          </a:xfrm>
+          <a:prstGeom prst="rect">
+            <a:avLst/>
+          </a:prstGeom>
+          <a:noFill/>
+        </p:spPr>
+        <p:txBody>
+          <a:bodyPr wrap="square" lIns="0" rIns="0" tIns="0" bIns="0">
+            <a:spAutoFit/>
+          </a:bodyPr>
+          <a:lstStyle/>
+          <a:p>
+            <a:pPr>
+              <a:defRPr sz="1000" b="1">
+                <a:solidFill>
+                  <a:srgbClr val="34D399"/>
+                </a:solidFill>
+              </a:defRPr>
+            </a:pPr>
+            <a:r>
+              <a:t>Dynamic state-based shelving and alarm suppression isolating the single initiating event.</a:t>
+            </a:r>
+          </a:p>
+        </p:txBody>
+      </p:sp>
+      <p:sp>
+        <p:nvSpPr>
+          <p:cNvPr id="15" name="Rounded Rectangle 14"/>
+          <p:cNvSpPr/>
+          <p:nvPr/>
+        </p:nvSpPr>
+        <p:spPr>
+          <a:xfrm>
+            <a:off x="731520" y="3694176"/>
+            <a:ext cx="5230368" cy="1298448"/>
+          </a:xfrm>
+          <a:prstGeom prst="roundRect">
+            <a:avLst/>
+          </a:prstGeom>
+          <a:solidFill>
+            <a:srgbClr val="1C1216"/>
+          </a:solidFill>
+          <a:ln w="12700">
+            <a:solidFill>
+              <a:srgbClr val="501923"/>
+            </a:solidFill>
+          </a:ln>
+        </p:spPr>
+        <p:style>
+          <a:lnRef idx="1">
+            <a:schemeClr val="accent1"/>
+          </a:lnRef>
+          <a:fillRef idx="3">
+            <a:schemeClr val="accent1"/>
+          </a:fillRef>
+          <a:effectRef idx="2">
+            <a:schemeClr val="accent1"/>
+          </a:effectRef>
+          <a:fontRef idx="minor">
+            <a:schemeClr val="lt1"/>
+          </a:fontRef>
+        </p:style>
+        <p:txBody>
+          <a:bodyPr rtlCol="0" anchor="ctr"/>
+          <a:lstStyle/>
+          <a:p>
+            <a:pPr algn="ctr"/>
+          </a:p>
+        </p:txBody>
+      </p:sp>
+      <p:sp>
+        <p:nvSpPr>
+          <p:cNvPr id="16" name="TextBox 15"/>
+          <p:cNvSpPr txBox="1"/>
+          <p:nvPr/>
+        </p:nvSpPr>
+        <p:spPr>
+          <a:xfrm>
+            <a:off x="868680" y="3767328"/>
+            <a:ext cx="4956048" cy="1152144"/>
+          </a:xfrm>
+          <a:prstGeom prst="rect">
+            <a:avLst/>
+          </a:prstGeom>
+          <a:noFill/>
+        </p:spPr>
+        <p:txBody>
+          <a:bodyPr wrap="square" lIns="0" rIns="0" tIns="0" bIns="0">
+            <a:spAutoFit/>
+          </a:bodyPr>
+          <a:lstStyle/>
+          <a:p>
+            <a:pPr>
+              <a:defRPr sz="1000">
+                <a:solidFill>
+                  <a:srgbClr val="F1F5F9"/>
+                </a:solidFill>
+              </a:defRPr>
+            </a:pPr>
+            <a:r>
+              <a:t>Chattering alarms flickering due to bad sensor wiring or loose thresholds left unaddressed for months.</a:t>
+            </a:r>
+          </a:p>
+        </p:txBody>
+      </p:sp>
+      <p:sp>
+        <p:nvSpPr>
+          <p:cNvPr id="17" name="Rounded Rectangle 16"/>
+          <p:cNvSpPr/>
+          <p:nvPr/>
+        </p:nvSpPr>
+        <p:spPr>
+          <a:xfrm>
+            <a:off x="6227064" y="3694176"/>
+            <a:ext cx="5230368" cy="1298448"/>
+          </a:xfrm>
+          <a:prstGeom prst="roundRect">
+            <a:avLst/>
+          </a:prstGeom>
+          <a:solidFill>
+            <a:srgbClr val="0F1C26"/>
+          </a:solidFill>
+          <a:ln w="12700">
+            <a:solidFill>
+              <a:srgbClr val="194B5F"/>
+            </a:solidFill>
+          </a:ln>
+        </p:spPr>
+        <p:style>
+          <a:lnRef idx="1">
+            <a:schemeClr val="accent1"/>
+          </a:lnRef>
+          <a:fillRef idx="3">
+            <a:schemeClr val="accent1"/>
+          </a:fillRef>
+          <a:effectRef idx="2">
+            <a:schemeClr val="accent1"/>
+          </a:effectRef>
+          <a:fontRef idx="minor">
+            <a:schemeClr val="lt1"/>
+          </a:fontRef>
+        </p:style>
+        <p:txBody>
+          <a:bodyPr rtlCol="0" anchor="ctr"/>
+          <a:lstStyle/>
+          <a:p>
+            <a:pPr algn="ctr"/>
+          </a:p>
+        </p:txBody>
+      </p:sp>
+      <p:sp>
+        <p:nvSpPr>
+          <p:cNvPr id="18" name="TextBox 17"/>
+          <p:cNvSpPr txBox="1"/>
+          <p:nvPr/>
+        </p:nvSpPr>
+        <p:spPr>
+          <a:xfrm>
+            <a:off x="6364224" y="3767328"/>
+            <a:ext cx="4956048" cy="1152144"/>
+          </a:xfrm>
+          <a:prstGeom prst="rect">
+            <a:avLst/>
+          </a:prstGeom>
+          <a:noFill/>
+        </p:spPr>
+        <p:txBody>
+          <a:bodyPr wrap="square" lIns="0" rIns="0" tIns="0" bIns="0">
+            <a:spAutoFit/>
+          </a:bodyPr>
+          <a:lstStyle/>
+          <a:p>
+            <a:pPr>
+              <a:defRPr sz="1000" b="1">
+                <a:solidFill>
+                  <a:srgbClr val="34D399"/>
+                </a:solidFill>
+              </a:defRPr>
+            </a:pPr>
+            <a:r>
+              <a:t>Automated chattering detection algorithms with automated deadband adjustments and health flagging.</a:t>
+            </a:r>
+          </a:p>
+        </p:txBody>
+      </p:sp>
+      <p:sp>
+        <p:nvSpPr>
+          <p:cNvPr id="19" name="Rounded Rectangle 18"/>
+          <p:cNvSpPr/>
+          <p:nvPr/>
+        </p:nvSpPr>
+        <p:spPr>
+          <a:xfrm>
+            <a:off x="731520" y="5102352"/>
+            <a:ext cx="5230368" cy="1298448"/>
+          </a:xfrm>
+          <a:prstGeom prst="roundRect">
+            <a:avLst/>
+          </a:prstGeom>
+          <a:solidFill>
+            <a:srgbClr val="1C1216"/>
+          </a:solidFill>
+          <a:ln w="12700">
+            <a:solidFill>
+              <a:srgbClr val="501923"/>
+            </a:solidFill>
+          </a:ln>
+        </p:spPr>
+        <p:style>
+          <a:lnRef idx="1">
+            <a:schemeClr val="accent1"/>
+          </a:lnRef>
+          <a:fillRef idx="3">
+            <a:schemeClr val="accent1"/>
+          </a:fillRef>
+          <a:effectRef idx="2">
+            <a:schemeClr val="accent1"/>
+          </a:effectRef>
+          <a:fontRef idx="minor">
+            <a:schemeClr val="lt1"/>
+          </a:fontRef>
+        </p:style>
+        <p:txBody>
+          <a:bodyPr rtlCol="0" anchor="ctr"/>
+          <a:lstStyle/>
+          <a:p>
+            <a:pPr algn="ctr"/>
+          </a:p>
+        </p:txBody>
+      </p:sp>
+      <p:sp>
+        <p:nvSpPr>
+          <p:cNvPr id="20" name="TextBox 19"/>
+          <p:cNvSpPr txBox="1"/>
+          <p:nvPr/>
+        </p:nvSpPr>
+        <p:spPr>
+          <a:xfrm>
+            <a:off x="868680" y="5175504"/>
+            <a:ext cx="4956048" cy="1152144"/>
+          </a:xfrm>
+          <a:prstGeom prst="rect">
+            <a:avLst/>
+          </a:prstGeom>
+          <a:noFill/>
+        </p:spPr>
+        <p:txBody>
+          <a:bodyPr wrap="square" lIns="0" rIns="0" tIns="0" bIns="0">
+            <a:spAutoFit/>
+          </a:bodyPr>
+          <a:lstStyle/>
+          <a:p>
+            <a:pPr>
+              <a:defRPr sz="1000">
+                <a:solidFill>
+                  <a:srgbClr val="F1F5F9"/>
+                </a:solidFill>
+              </a:defRPr>
+            </a:pPr>
+            <a:r>
+              <a:t>Alarms with cryptic 8-character tag names and zero actionable guidance.</a:t>
+            </a:r>
+          </a:p>
+        </p:txBody>
+      </p:sp>
+      <p:sp>
+        <p:nvSpPr>
+          <p:cNvPr id="21" name="Rounded Rectangle 20"/>
+          <p:cNvSpPr/>
+          <p:nvPr/>
+        </p:nvSpPr>
+        <p:spPr>
+          <a:xfrm>
+            <a:off x="6227064" y="5102352"/>
+            <a:ext cx="5230368" cy="1298448"/>
+          </a:xfrm>
+          <a:prstGeom prst="roundRect">
+            <a:avLst/>
+          </a:prstGeom>
+          <a:solidFill>
+            <a:srgbClr val="0F1C26"/>
+          </a:solidFill>
+          <a:ln w="12700">
+            <a:solidFill>
+              <a:srgbClr val="194B5F"/>
+            </a:solidFill>
+          </a:ln>
+        </p:spPr>
+        <p:style>
+          <a:lnRef idx="1">
+            <a:schemeClr val="accent1"/>
+          </a:lnRef>
+          <a:fillRef idx="3">
+            <a:schemeClr val="accent1"/>
+          </a:fillRef>
+          <a:effectRef idx="2">
+            <a:schemeClr val="accent1"/>
+          </a:effectRef>
+          <a:fontRef idx="minor">
+            <a:schemeClr val="lt1"/>
+          </a:fontRef>
+        </p:style>
+        <p:txBody>
+          <a:bodyPr rtlCol="0" anchor="ctr"/>
+          <a:lstStyle/>
+          <a:p>
+            <a:pPr algn="ctr"/>
+          </a:p>
+        </p:txBody>
+      </p:sp>
+      <p:sp>
+        <p:nvSpPr>
+          <p:cNvPr id="22" name="TextBox 21"/>
+          <p:cNvSpPr txBox="1"/>
+          <p:nvPr/>
+        </p:nvSpPr>
+        <p:spPr>
+          <a:xfrm>
+            <a:off x="6364224" y="5175504"/>
+            <a:ext cx="4956048" cy="1152144"/>
+          </a:xfrm>
+          <a:prstGeom prst="rect">
+            <a:avLst/>
+          </a:prstGeom>
+          <a:noFill/>
+        </p:spPr>
+        <p:txBody>
+          <a:bodyPr wrap="square" lIns="0" rIns="0" tIns="0" bIns="0">
+            <a:spAutoFit/>
+          </a:bodyPr>
+          <a:lstStyle/>
+          <a:p>
+            <a:pPr>
+              <a:defRPr sz="1000" b="1">
+                <a:solidFill>
+                  <a:srgbClr val="34D399"/>
+                </a:solidFill>
+              </a:defRPr>
+            </a:pPr>
+            <a:r>
+              <a:t>Context-rich alarm cards with verified Standard Operating Procedures (SOPs) and 1-click mitigation actions.</a:t>
             </a:r>
           </a:p>
         </p:txBody>
@@ -5838,7 +7559,7 @@
             <a:avLst/>
           </a:prstGeom>
           <a:solidFill>
-            <a:srgbClr val="0A0E1A"/>
+            <a:srgbClr val="0B0F17"/>
           </a:solidFill>
           <a:ln>
             <a:noFill/>
@@ -5874,17 +7595,19 @@
         </p:nvSpPr>
         <p:spPr>
           <a:xfrm>
-            <a:off x="0" y="0"/>
-            <a:ext cx="12191695" cy="54864"/>
+            <a:off x="731520" y="365760"/>
+            <a:ext cx="10728655" cy="18288"/>
           </a:xfrm>
           <a:prstGeom prst="rect">
             <a:avLst/>
           </a:prstGeom>
           <a:solidFill>
-            <a:srgbClr val="00D4FF"/>
+            <a:srgbClr val="38BDF8"/>
           </a:solidFill>
           <a:ln>
-            <a:noFill/>
+            <a:solidFill>
+              <a:srgbClr val="38BDF8"/>
+            </a:solidFill>
           </a:ln>
         </p:spPr>
         <p:style>
@@ -5917,8 +7640,8 @@
         </p:nvSpPr>
         <p:spPr>
           <a:xfrm>
-            <a:off x="731520" y="365760"/>
-            <a:ext cx="10698480" cy="1005840"/>
+            <a:off x="731520" y="438912"/>
+            <a:ext cx="8229600" cy="274320"/>
           </a:xfrm>
           <a:prstGeom prst="rect">
             <a:avLst/>
@@ -5926,35 +7649,20 @@
           <a:noFill/>
         </p:spPr>
         <p:txBody>
-          <a:bodyPr wrap="square">
+          <a:bodyPr wrap="square" lIns="0" rIns="0" tIns="0" bIns="0">
             <a:spAutoFit/>
           </a:bodyPr>
           <a:lstStyle/>
           <a:p>
             <a:pPr>
-              <a:spcAft>
-                <a:spcPts val="400"/>
-              </a:spcAft>
-              <a:defRPr sz="1150" b="1">
-                <a:solidFill>
-                  <a:srgbClr val="00D4FF"/>
-                </a:solidFill>
-              </a:defRPr>
-            </a:pPr>
-            <a:r>
-              <a:t>TERRAALARM  |  TERRESTRIAL PLATFORM</a:t>
-            </a:r>
-          </a:p>
-          <a:p>
-            <a:pPr>
-              <a:defRPr sz="2500" b="1">
-                <a:solidFill>
-                  <a:srgbClr val="FFFFFF"/>
-                </a:solidFill>
-              </a:defRPr>
-            </a:pPr>
-            <a:r>
-              <a:t>System Integrator Deployment Playbook &amp; Commercial Enablement</a:t>
+              <a:defRPr sz="950" b="1">
+                <a:solidFill>
+                  <a:srgbClr val="38BDF8"/>
+                </a:solidFill>
+              </a:defRPr>
+            </a:pPr>
+            <a:r>
+              <a:t>TERRESTRIAL PLATFORM  |  TERRAALARM  |  SYSTEM ARCHITECTURE</a:t>
             </a:r>
           </a:p>
         </p:txBody>
@@ -5967,8 +7675,8 @@
         </p:nvSpPr>
         <p:spPr>
           <a:xfrm>
-            <a:off x="731520" y="6446520"/>
-            <a:ext cx="10698480" cy="320040"/>
+            <a:off x="731520" y="731520"/>
+            <a:ext cx="9601200" cy="777240"/>
           </a:xfrm>
           <a:prstGeom prst="rect">
             <a:avLst/>
@@ -5976,44 +7684,83 @@
           <a:noFill/>
         </p:spPr>
         <p:txBody>
-          <a:bodyPr wrap="none">
+          <a:bodyPr wrap="square" lIns="0" rIns="0" tIns="0" bIns="0">
             <a:spAutoFit/>
           </a:bodyPr>
           <a:lstStyle/>
           <a:p>
             <a:pPr>
-              <a:defRPr sz="1000">
+              <a:defRPr sz="1900" b="1">
+                <a:solidFill>
+                  <a:srgbClr val="FFFFFF"/>
+                </a:solidFill>
+              </a:defRPr>
+            </a:pPr>
+            <a:r>
+              <a:t>End-to-End System Diagram &amp; Data Pipeline</a:t>
+            </a:r>
+          </a:p>
+          <a:p>
+            <a:pPr>
+              <a:spcBef>
+                <a:spcPts val="300"/>
+              </a:spcBef>
+              <a:defRPr sz="1050">
                 <a:solidFill>
                   <a:srgbClr val="94A3B8"/>
                 </a:solidFill>
               </a:defRPr>
             </a:pPr>
             <a:r>
-              <a:t>TERRESTRIAL PLATFORM  |  TERRAALARM CATALOGUE  |  CONFIDENTIAL - AUTHORISED SYSTEM INTEGRATORS ONLY</a:t>
-            </a:r>
-          </a:p>
-        </p:txBody>
-      </p:sp>
-      <p:sp>
-        <p:nvSpPr>
-          <p:cNvPr id="6" name="Rounded Rectangle 5"/>
+              <a:t>Visual architecture diagram representing field telemetry ingestion, deterministic edge fabric, AI reasoning, and closed-loop actuation.</a:t>
+            </a:r>
+          </a:p>
+        </p:txBody>
+      </p:sp>
+      <p:pic>
+        <p:nvPicPr>
+          <p:cNvPr id="6" name="Picture 5" descr="tp_logo_white.png"/>
+          <p:cNvPicPr>
+            <a:picLocks noChangeAspect="1"/>
+          </p:cNvPicPr>
+          <p:nvPr/>
+        </p:nvPicPr>
+        <p:blipFill>
+          <a:blip r:embed="rId2"/>
+          <a:stretch>
+            <a:fillRect/>
+          </a:stretch>
+        </p:blipFill>
+        <p:spPr>
+          <a:xfrm>
+            <a:off x="10469880" y="411480"/>
+            <a:ext cx="987552" cy="384048"/>
+          </a:xfrm>
+          <a:prstGeom prst="rect">
+            <a:avLst/>
+          </a:prstGeom>
+        </p:spPr>
+      </p:pic>
+      <p:sp>
+        <p:nvSpPr>
+          <p:cNvPr id="7" name="Rounded Rectangle 6"/>
           <p:cNvSpPr/>
           <p:nvPr/>
         </p:nvSpPr>
         <p:spPr>
           <a:xfrm>
-            <a:off x="731520" y="1645920"/>
-            <a:ext cx="3401568" cy="3200400"/>
+            <a:off x="731520" y="1691640"/>
+            <a:ext cx="2514600" cy="3611880"/>
           </a:xfrm>
           <a:prstGeom prst="roundRect">
             <a:avLst/>
           </a:prstGeom>
           <a:solidFill>
-            <a:srgbClr val="0F172A"/>
+            <a:srgbClr val="131926"/>
           </a:solidFill>
-          <a:ln>
+          <a:ln w="12700">
             <a:solidFill>
-              <a:srgbClr val="1E293B"/>
+              <a:srgbClr val="38BDF8"/>
             </a:solidFill>
           </a:ln>
         </p:spPr>
@@ -6032,72 +7779,139 @@
           </a:fontRef>
         </p:style>
         <p:txBody>
-          <a:bodyPr rtlCol="0" anchor="ctr" wrap="square"/>
-          <a:lstStyle/>
-          <a:p>
-            <a:pPr algn="ctr">
+          <a:bodyPr rtlCol="0" anchor="ctr"/>
+          <a:lstStyle/>
+          <a:p>
+            <a:pPr algn="ctr"/>
+          </a:p>
+        </p:txBody>
+      </p:sp>
+      <p:sp>
+        <p:nvSpPr>
+          <p:cNvPr id="8" name="TextBox 7"/>
+          <p:cNvSpPr txBox="1"/>
+          <p:nvPr/>
+        </p:nvSpPr>
+        <p:spPr>
+          <a:xfrm>
+            <a:off x="896112" y="1856232"/>
+            <a:ext cx="2185416" cy="3282696"/>
+          </a:xfrm>
+          <a:prstGeom prst="rect">
+            <a:avLst/>
+          </a:prstGeom>
+          <a:noFill/>
+        </p:spPr>
+        <p:txBody>
+          <a:bodyPr wrap="square" lIns="0" rIns="0" tIns="0" bIns="0">
+            <a:spAutoFit/>
+          </a:bodyPr>
+          <a:lstStyle/>
+          <a:p>
+            <a:pPr>
+              <a:defRPr sz="850" b="1">
+                <a:solidFill>
+                  <a:srgbClr val="38BDF8"/>
+                </a:solidFill>
+              </a:defRPr>
+            </a:pPr>
+            <a:r>
+              <a:t>LAYER 01</a:t>
+            </a:r>
+          </a:p>
+          <a:p>
+            <a:pPr>
+              <a:spcBef>
+                <a:spcPts val="300"/>
+              </a:spcBef>
+              <a:spcAft>
+                <a:spcPts val="600"/>
+              </a:spcAft>
+              <a:defRPr sz="1200" b="1">
+                <a:solidFill>
+                  <a:srgbClr val="FFFFFF"/>
+                </a:solidFill>
+              </a:defRPr>
+            </a:pPr>
+            <a:r>
+              <a:t>Alarm &amp; SOE Ingestion</a:t>
+            </a:r>
+          </a:p>
+          <a:p>
+            <a:pPr>
               <a:spcAft>
                 <a:spcPts val="800"/>
               </a:spcAft>
-              <a:defRPr sz="1100" b="1">
-                <a:solidFill>
-                  <a:srgbClr val="F5C842"/>
-                </a:solidFill>
-              </a:defRPr>
-            </a:pPr>
-            <a:r>
-              <a:t>PHASE 01 | CONNECTIVITY &amp; AUDIT</a:t>
-            </a:r>
-          </a:p>
-          <a:p>
-            <a:pPr>
-              <a:spcAft>
-                <a:spcPts val="1000"/>
-              </a:spcAft>
-              <a:defRPr sz="1600" b="1">
-                <a:solidFill>
-                  <a:srgbClr val="FFFFFF"/>
-                </a:solidFill>
-              </a:defRPr>
-            </a:pPr>
-            <a:r>
-              <a:t>Zero Rip-and-Replace Onboarding</a:t>
-            </a:r>
-          </a:p>
-          <a:p>
-            <a:pPr>
-              <a:defRPr sz="1250">
-                <a:solidFill>
-                  <a:srgbClr val="C8D8F0"/>
-                </a:solidFill>
-              </a:defRPr>
-            </a:pPr>
-            <a:r>
-              <a:t>Deploy edge container onto existing industrial PC or VM. Connect to plant DCS/PLCs via ISA 18.2 / EEMUA 191. Ingest and normalize all telemetry in under 48 hours without halting production.</a:t>
-            </a:r>
-          </a:p>
-        </p:txBody>
-      </p:sp>
-      <p:sp>
-        <p:nvSpPr>
-          <p:cNvPr id="7" name="Rounded Rectangle 6"/>
+              <a:defRPr sz="900">
+                <a:solidFill>
+                  <a:srgbClr val="F1F5F9"/>
+                </a:solidFill>
+              </a:defRPr>
+            </a:pPr>
+            <a:r>
+              <a:t>Sub-millisecond alarm acquisition from substation IEDs, DCS controllers, safety interlocks, and sequence of events (SOE) recorders.</a:t>
+            </a:r>
+          </a:p>
+          <a:p>
+            <a:pPr>
+              <a:spcBef>
+                <a:spcPts val="400"/>
+              </a:spcBef>
+              <a:defRPr sz="800" b="1">
+                <a:solidFill>
+                  <a:srgbClr val="94A3B8"/>
+                </a:solidFill>
+              </a:defRPr>
+            </a:pPr>
+            <a:r>
+              <a:t>PROTOCOLS &amp; STANDARDS:</a:t>
+            </a:r>
+          </a:p>
+          <a:p>
+            <a:pPr>
+              <a:spcBef>
+                <a:spcPts val="200"/>
+              </a:spcBef>
+              <a:defRPr sz="850">
+                <a:solidFill>
+                  <a:srgbClr val="34D399"/>
+                </a:solidFill>
+              </a:defRPr>
+            </a:pPr>
+            <a:r>
+              <a:t> • IEC 61850 MMS Alarms</a:t>
+            </a:r>
+            <a:br/>
+            <a:r>
+              <a:t> • OPC UA A&amp;C</a:t>
+            </a:r>
+            <a:br/>
+            <a:r>
+              <a:t> • SOE Contact Inputs</a:t>
+            </a:r>
+          </a:p>
+        </p:txBody>
+      </p:sp>
+      <p:sp>
+        <p:nvSpPr>
+          <p:cNvPr id="9" name="Rounded Rectangle 8"/>
           <p:cNvSpPr/>
           <p:nvPr/>
         </p:nvSpPr>
         <p:spPr>
           <a:xfrm>
-            <a:off x="4379976" y="1645920"/>
-            <a:ext cx="3401568" cy="3200400"/>
+            <a:off x="3465576" y="1691640"/>
+            <a:ext cx="2514600" cy="3611880"/>
           </a:xfrm>
           <a:prstGeom prst="roundRect">
             <a:avLst/>
           </a:prstGeom>
           <a:solidFill>
-            <a:srgbClr val="0F172A"/>
+            <a:srgbClr val="131926"/>
           </a:solidFill>
-          <a:ln>
+          <a:ln w="12700">
             <a:solidFill>
-              <a:srgbClr val="1E293B"/>
+              <a:srgbClr val="38BDF8"/>
             </a:solidFill>
           </a:ln>
         </p:spPr>
@@ -6116,72 +7930,139 @@
           </a:fontRef>
         </p:style>
         <p:txBody>
-          <a:bodyPr rtlCol="0" anchor="ctr" wrap="square"/>
-          <a:lstStyle/>
-          <a:p>
-            <a:pPr algn="ctr">
+          <a:bodyPr rtlCol="0" anchor="ctr"/>
+          <a:lstStyle/>
+          <a:p>
+            <a:pPr algn="ctr"/>
+          </a:p>
+        </p:txBody>
+      </p:sp>
+      <p:sp>
+        <p:nvSpPr>
+          <p:cNvPr id="10" name="TextBox 9"/>
+          <p:cNvSpPr txBox="1"/>
+          <p:nvPr/>
+        </p:nvSpPr>
+        <p:spPr>
+          <a:xfrm>
+            <a:off x="3630168" y="1856232"/>
+            <a:ext cx="2185416" cy="3282696"/>
+          </a:xfrm>
+          <a:prstGeom prst="rect">
+            <a:avLst/>
+          </a:prstGeom>
+          <a:noFill/>
+        </p:spPr>
+        <p:txBody>
+          <a:bodyPr wrap="square" lIns="0" rIns="0" tIns="0" bIns="0">
+            <a:spAutoFit/>
+          </a:bodyPr>
+          <a:lstStyle/>
+          <a:p>
+            <a:pPr>
+              <a:defRPr sz="850" b="1">
+                <a:solidFill>
+                  <a:srgbClr val="38BDF8"/>
+                </a:solidFill>
+              </a:defRPr>
+            </a:pPr>
+            <a:r>
+              <a:t>LAYER 02</a:t>
+            </a:r>
+          </a:p>
+          <a:p>
+            <a:pPr>
+              <a:spcBef>
+                <a:spcPts val="300"/>
+              </a:spcBef>
+              <a:spcAft>
+                <a:spcPts val="600"/>
+              </a:spcAft>
+              <a:defRPr sz="1200" b="1">
+                <a:solidFill>
+                  <a:srgbClr val="FFFFFF"/>
+                </a:solidFill>
+              </a:defRPr>
+            </a:pPr>
+            <a:r>
+              <a:t>Microsecond Event Stamping</a:t>
+            </a:r>
+          </a:p>
+          <a:p>
+            <a:pPr>
               <a:spcAft>
                 <a:spcPts val="800"/>
               </a:spcAft>
-              <a:defRPr sz="1100" b="1">
-                <a:solidFill>
-                  <a:srgbClr val="F5C842"/>
-                </a:solidFill>
-              </a:defRPr>
-            </a:pPr>
-            <a:r>
-              <a:t>PHASE 02 | TWIN CALIBRATION</a:t>
-            </a:r>
-          </a:p>
-          <a:p>
-            <a:pPr>
-              <a:spcAft>
-                <a:spcPts val="1000"/>
-              </a:spcAft>
-              <a:defRPr sz="1600" b="1">
-                <a:solidFill>
-                  <a:srgbClr val="FFFFFF"/>
-                </a:solidFill>
-              </a:defRPr>
-            </a:pPr>
-            <a:r>
-              <a:t>Physics-Model Synchronization</a:t>
-            </a:r>
-          </a:p>
-          <a:p>
-            <a:pPr>
-              <a:defRPr sz="1250">
-                <a:solidFill>
-                  <a:srgbClr val="C8D8F0"/>
-                </a:solidFill>
-              </a:defRPr>
-            </a:pPr>
-            <a:r>
-              <a:t>Feed historical historian data into TerraAlarm models. Automatically build directed causal relationship graphs, calibrate thermodynamics/kinematics, and train edge neural operators.</a:t>
-            </a:r>
-          </a:p>
-        </p:txBody>
-      </p:sp>
-      <p:sp>
-        <p:nvSpPr>
-          <p:cNvPr id="8" name="Rounded Rectangle 7"/>
+              <a:defRPr sz="900">
+                <a:solidFill>
+                  <a:srgbClr val="F1F5F9"/>
+                </a:solidFill>
+              </a:defRPr>
+            </a:pPr>
+            <a:r>
+              <a:t>GPS/IRIG-B synchronized microsecond timestamp correlation, high-throughput alarm event buffering, and deduplication fabric.</a:t>
+            </a:r>
+          </a:p>
+          <a:p>
+            <a:pPr>
+              <a:spcBef>
+                <a:spcPts val="400"/>
+              </a:spcBef>
+              <a:defRPr sz="800" b="1">
+                <a:solidFill>
+                  <a:srgbClr val="94A3B8"/>
+                </a:solidFill>
+              </a:defRPr>
+            </a:pPr>
+            <a:r>
+              <a:t>PROTOCOLS &amp; STANDARDS:</a:t>
+            </a:r>
+          </a:p>
+          <a:p>
+            <a:pPr>
+              <a:spcBef>
+                <a:spcPts val="200"/>
+              </a:spcBef>
+              <a:defRPr sz="850">
+                <a:solidFill>
+                  <a:srgbClr val="34D399"/>
+                </a:solidFill>
+              </a:defRPr>
+            </a:pPr>
+            <a:r>
+              <a:t> • GPS/IRIG-B Time-Sync</a:t>
+            </a:r>
+            <a:br/>
+            <a:r>
+              <a:t> • SOE Event Pipeline</a:t>
+            </a:r>
+            <a:br/>
+            <a:r>
+              <a:t> • Alarm Stream Bus</a:t>
+            </a:r>
+          </a:p>
+        </p:txBody>
+      </p:sp>
+      <p:sp>
+        <p:nvSpPr>
+          <p:cNvPr id="11" name="Rounded Rectangle 10"/>
           <p:cNvSpPr/>
           <p:nvPr/>
         </p:nvSpPr>
         <p:spPr>
           <a:xfrm>
-            <a:off x="8028432" y="1645920"/>
-            <a:ext cx="3401568" cy="3200400"/>
+            <a:off x="6199632" y="1691640"/>
+            <a:ext cx="2514600" cy="3611880"/>
           </a:xfrm>
           <a:prstGeom prst="roundRect">
             <a:avLst/>
           </a:prstGeom>
           <a:solidFill>
-            <a:srgbClr val="0F172A"/>
+            <a:srgbClr val="131926"/>
           </a:solidFill>
-          <a:ln>
+          <a:ln w="12700">
             <a:solidFill>
-              <a:srgbClr val="1E293B"/>
+              <a:srgbClr val="38BDF8"/>
             </a:solidFill>
           </a:ln>
         </p:spPr>
@@ -6200,72 +8081,139 @@
           </a:fontRef>
         </p:style>
         <p:txBody>
-          <a:bodyPr rtlCol="0" anchor="ctr" wrap="square"/>
-          <a:lstStyle/>
-          <a:p>
-            <a:pPr algn="ctr">
+          <a:bodyPr rtlCol="0" anchor="ctr"/>
+          <a:lstStyle/>
+          <a:p>
+            <a:pPr algn="ctr"/>
+          </a:p>
+        </p:txBody>
+      </p:sp>
+      <p:sp>
+        <p:nvSpPr>
+          <p:cNvPr id="12" name="TextBox 11"/>
+          <p:cNvSpPr txBox="1"/>
+          <p:nvPr/>
+        </p:nvSpPr>
+        <p:spPr>
+          <a:xfrm>
+            <a:off x="6364224" y="1856232"/>
+            <a:ext cx="2185416" cy="3282696"/>
+          </a:xfrm>
+          <a:prstGeom prst="rect">
+            <a:avLst/>
+          </a:prstGeom>
+          <a:noFill/>
+        </p:spPr>
+        <p:txBody>
+          <a:bodyPr wrap="square" lIns="0" rIns="0" tIns="0" bIns="0">
+            <a:spAutoFit/>
+          </a:bodyPr>
+          <a:lstStyle/>
+          <a:p>
+            <a:pPr>
+              <a:defRPr sz="850" b="1">
+                <a:solidFill>
+                  <a:srgbClr val="38BDF8"/>
+                </a:solidFill>
+              </a:defRPr>
+            </a:pPr>
+            <a:r>
+              <a:t>LAYER 03</a:t>
+            </a:r>
+          </a:p>
+          <a:p>
+            <a:pPr>
+              <a:spcBef>
+                <a:spcPts val="300"/>
+              </a:spcBef>
+              <a:spcAft>
+                <a:spcPts val="600"/>
+              </a:spcAft>
+              <a:defRPr sz="1200" b="1">
+                <a:solidFill>
+                  <a:srgbClr val="FFFFFF"/>
+                </a:solidFill>
+              </a:defRPr>
+            </a:pPr>
+            <a:r>
+              <a:t>Flood Suppression Core</a:t>
+            </a:r>
+          </a:p>
+          <a:p>
+            <a:pPr>
               <a:spcAft>
                 <a:spcPts val="800"/>
               </a:spcAft>
-              <a:defRPr sz="1100" b="1">
-                <a:solidFill>
-                  <a:srgbClr val="F5C842"/>
-                </a:solidFill>
-              </a:defRPr>
-            </a:pPr>
-            <a:r>
-              <a:t>PHASE 03 | AUTONOMOUS GO-LIVE</a:t>
-            </a:r>
-          </a:p>
-          <a:p>
-            <a:pPr>
-              <a:spcAft>
-                <a:spcPts val="1000"/>
-              </a:spcAft>
-              <a:defRPr sz="1600" b="1">
-                <a:solidFill>
-                  <a:srgbClr val="FFFFFF"/>
-                </a:solidFill>
-              </a:defRPr>
-            </a:pPr>
-            <a:r>
-              <a:t>Closed-Loop Setpoint Actuation</a:t>
-            </a:r>
-          </a:p>
-          <a:p>
-            <a:pPr>
-              <a:defRPr sz="1250">
-                <a:solidFill>
-                  <a:srgbClr val="C8D8F0"/>
-                </a:solidFill>
-              </a:defRPr>
-            </a:pPr>
-            <a:r>
-              <a:t>Transition from advisory warnings to sub-25ms supervisory actuation. Sync alarm suppressions with plant operators and link work orders into SAP/ERP for verifiable recurring ROI.</a:t>
-            </a:r>
-          </a:p>
-        </p:txBody>
-      </p:sp>
-      <p:sp>
-        <p:nvSpPr>
-          <p:cNvPr id="9" name="Rounded Rectangle 8"/>
+              <a:defRPr sz="900">
+                <a:solidFill>
+                  <a:srgbClr val="F1F5F9"/>
+                </a:solidFill>
+              </a:defRPr>
+            </a:pPr>
+            <a:r>
+              <a:t>Dynamic alarm chatter suppression, state-based alarm masking, root-cause propagation trees, and ANSI/ISA 18.2 / EEMUA 191 KPIs.</a:t>
+            </a:r>
+          </a:p>
+          <a:p>
+            <a:pPr>
+              <a:spcBef>
+                <a:spcPts val="400"/>
+              </a:spcBef>
+              <a:defRPr sz="800" b="1">
+                <a:solidFill>
+                  <a:srgbClr val="94A3B8"/>
+                </a:solidFill>
+              </a:defRPr>
+            </a:pPr>
+            <a:r>
+              <a:t>PROTOCOLS &amp; STANDARDS:</a:t>
+            </a:r>
+          </a:p>
+          <a:p>
+            <a:pPr>
+              <a:spcBef>
+                <a:spcPts val="200"/>
+              </a:spcBef>
+              <a:defRPr sz="850">
+                <a:solidFill>
+                  <a:srgbClr val="34D399"/>
+                </a:solidFill>
+              </a:defRPr>
+            </a:pPr>
+            <a:r>
+              <a:t> • Flood Suppression AI</a:t>
+            </a:r>
+            <a:br/>
+            <a:r>
+              <a:t> • ISA 18.2 Rationalizer</a:t>
+            </a:r>
+            <a:br/>
+            <a:r>
+              <a:t> • Root-Cause Trees</a:t>
+            </a:r>
+          </a:p>
+        </p:txBody>
+      </p:sp>
+      <p:sp>
+        <p:nvSpPr>
+          <p:cNvPr id="13" name="Rounded Rectangle 12"/>
           <p:cNvSpPr/>
           <p:nvPr/>
         </p:nvSpPr>
         <p:spPr>
           <a:xfrm>
-            <a:off x="731520" y="5029200"/>
-            <a:ext cx="10698480" cy="1188720"/>
+            <a:off x="8933688" y="1691640"/>
+            <a:ext cx="2514600" cy="3611880"/>
           </a:xfrm>
           <a:prstGeom prst="roundRect">
             <a:avLst/>
           </a:prstGeom>
           <a:solidFill>
-            <a:srgbClr val="0C1C34"/>
+            <a:srgbClr val="131926"/>
           </a:solidFill>
-          <a:ln>
+          <a:ln w="12700">
             <a:solidFill>
-              <a:srgbClr val="00D4FF"/>
+              <a:srgbClr val="38BDF8"/>
             </a:solidFill>
           </a:ln>
         </p:spPr>
@@ -6284,16 +8232,830 @@
           </a:fontRef>
         </p:style>
         <p:txBody>
-          <a:bodyPr rtlCol="0" anchor="ctr" wrap="square"/>
-          <a:lstStyle/>
-          <a:p>
-            <a:pPr algn="ctr">
+          <a:bodyPr rtlCol="0" anchor="ctr"/>
+          <a:lstStyle/>
+          <a:p>
+            <a:pPr algn="ctr"/>
+          </a:p>
+        </p:txBody>
+      </p:sp>
+      <p:sp>
+        <p:nvSpPr>
+          <p:cNvPr id="14" name="TextBox 13"/>
+          <p:cNvSpPr txBox="1"/>
+          <p:nvPr/>
+        </p:nvSpPr>
+        <p:spPr>
+          <a:xfrm>
+            <a:off x="9098280" y="1856232"/>
+            <a:ext cx="2185416" cy="3282696"/>
+          </a:xfrm>
+          <a:prstGeom prst="rect">
+            <a:avLst/>
+          </a:prstGeom>
+          <a:noFill/>
+        </p:spPr>
+        <p:txBody>
+          <a:bodyPr wrap="square" lIns="0" rIns="0" tIns="0" bIns="0">
+            <a:spAutoFit/>
+          </a:bodyPr>
+          <a:lstStyle/>
+          <a:p>
+            <a:pPr>
+              <a:defRPr sz="850" b="1">
+                <a:solidFill>
+                  <a:srgbClr val="38BDF8"/>
+                </a:solidFill>
+              </a:defRPr>
+            </a:pPr>
+            <a:r>
+              <a:t>LAYER 04</a:t>
+            </a:r>
+          </a:p>
+          <a:p>
+            <a:pPr>
+              <a:spcBef>
+                <a:spcPts val="300"/>
+              </a:spcBef>
               <a:spcAft>
+                <a:spcPts val="600"/>
+              </a:spcAft>
+              <a:defRPr sz="1200" b="1">
+                <a:solidFill>
+                  <a:srgbClr val="FFFFFF"/>
+                </a:solidFill>
+              </a:defRPr>
+            </a:pPr>
+            <a:r>
+              <a:t>Operator Shelving Cockpit</a:t>
+            </a:r>
+          </a:p>
+          <a:p>
+            <a:pPr>
+              <a:spcAft>
+                <a:spcPts val="800"/>
+              </a:spcAft>
+              <a:defRPr sz="900">
+                <a:solidFill>
+                  <a:srgbClr val="F1F5F9"/>
+                </a:solidFill>
+              </a:defRPr>
+            </a:pPr>
+            <a:r>
+              <a:t>Dynamic alarm priority gating, automated operator shelving workflows, SIL-3 2oo3 interlock audits, and ISA-101 alarm summary banners.</a:t>
+            </a:r>
+          </a:p>
+          <a:p>
+            <a:pPr>
+              <a:spcBef>
                 <a:spcPts val="400"/>
+              </a:spcBef>
+              <a:defRPr sz="800" b="1">
+                <a:solidFill>
+                  <a:srgbClr val="94A3B8"/>
+                </a:solidFill>
+              </a:defRPr>
+            </a:pPr>
+            <a:r>
+              <a:t>PROTOCOLS &amp; STANDARDS:</a:t>
+            </a:r>
+          </a:p>
+          <a:p>
+            <a:pPr>
+              <a:spcBef>
+                <a:spcPts val="200"/>
+              </a:spcBef>
+              <a:defRPr sz="850">
+                <a:solidFill>
+                  <a:srgbClr val="34D399"/>
+                </a:solidFill>
+              </a:defRPr>
+            </a:pPr>
+            <a:r>
+              <a:t> • Priority Gating</a:t>
+            </a:r>
+            <a:br/>
+            <a:r>
+              <a:t> • Automated Shelving</a:t>
+            </a:r>
+            <a:br/>
+            <a:r>
+              <a:t> • ISA-101 Alarm Banner</a:t>
+            </a:r>
+          </a:p>
+        </p:txBody>
+      </p:sp>
+      <p:sp>
+        <p:nvSpPr>
+          <p:cNvPr id="15" name="Rounded Rectangle 14"/>
+          <p:cNvSpPr/>
+          <p:nvPr/>
+        </p:nvSpPr>
+        <p:spPr>
+          <a:xfrm>
+            <a:off x="731520" y="5486400"/>
+            <a:ext cx="10728655" cy="868680"/>
+          </a:xfrm>
+          <a:prstGeom prst="roundRect">
+            <a:avLst/>
+          </a:prstGeom>
+          <a:solidFill>
+            <a:srgbClr val="131926"/>
+          </a:solidFill>
+          <a:ln w="12700">
+            <a:solidFill>
+              <a:srgbClr val="38BDF8"/>
+            </a:solidFill>
+          </a:ln>
+        </p:spPr>
+        <p:style>
+          <a:lnRef idx="1">
+            <a:schemeClr val="accent1"/>
+          </a:lnRef>
+          <a:fillRef idx="3">
+            <a:schemeClr val="accent1"/>
+          </a:fillRef>
+          <a:effectRef idx="2">
+            <a:schemeClr val="accent1"/>
+          </a:effectRef>
+          <a:fontRef idx="minor">
+            <a:schemeClr val="lt1"/>
+          </a:fontRef>
+        </p:style>
+        <p:txBody>
+          <a:bodyPr rtlCol="0" anchor="ctr"/>
+          <a:lstStyle/>
+          <a:p>
+            <a:pPr algn="ctr"/>
+          </a:p>
+        </p:txBody>
+      </p:sp>
+      <p:sp>
+        <p:nvSpPr>
+          <p:cNvPr id="16" name="TextBox 15"/>
+          <p:cNvSpPr txBox="1"/>
+          <p:nvPr/>
+        </p:nvSpPr>
+        <p:spPr>
+          <a:xfrm>
+            <a:off x="960120" y="5596128"/>
+            <a:ext cx="10241280" cy="640080"/>
+          </a:xfrm>
+          <a:prstGeom prst="rect">
+            <a:avLst/>
+          </a:prstGeom>
+          <a:noFill/>
+        </p:spPr>
+        <p:txBody>
+          <a:bodyPr wrap="square" lIns="0" rIns="0" tIns="0" bIns="0">
+            <a:spAutoFit/>
+          </a:bodyPr>
+          <a:lstStyle/>
+          <a:p>
+            <a:pPr>
+              <a:defRPr sz="850" b="1">
+                <a:solidFill>
+                  <a:srgbClr val="38BDF8"/>
+                </a:solidFill>
+              </a:defRPr>
+            </a:pPr>
+            <a:r>
+              <a:t>UNIFIED DATA PIPELINE FLOW</a:t>
+            </a:r>
+          </a:p>
+          <a:p>
+            <a:pPr>
+              <a:spcBef>
+                <a:spcPts val="200"/>
+              </a:spcBef>
+              <a:defRPr sz="950" b="1">
+                <a:solidFill>
+                  <a:srgbClr val="FFFFFF"/>
+                </a:solidFill>
+              </a:defRPr>
+            </a:pPr>
+            <a:r>
+              <a:t>Sub-Millisecond SOE Inputs ➔ GPS-Synchronized Event Stream ➔ Dynamic Flood &amp; Chattering Suppression ➔ Automated Shelving &amp; Operator Dispatch</a:t>
+            </a:r>
+          </a:p>
+        </p:txBody>
+      </p:sp>
+    </p:spTree>
+  </p:cSld>
+  <p:clrMapOvr>
+    <a:masterClrMapping/>
+  </p:clrMapOvr>
+</p:sld>
+</file>
+
+<file path=ppt/slides/slide7.xml><?xml version="1.0" encoding="utf-8"?>
+<p:sld xmlns:a="http://schemas.openxmlformats.org/drawingml/2006/main" xmlns:p="http://schemas.openxmlformats.org/presentationml/2006/main" xmlns:r="http://schemas.openxmlformats.org/officeDocument/2006/relationships">
+  <p:cSld>
+    <p:spTree>
+      <p:nvGrpSpPr>
+        <p:cNvPr id="1" name=""/>
+        <p:cNvGrpSpPr/>
+        <p:nvPr/>
+      </p:nvGrpSpPr>
+      <p:grpSpPr/>
+      <p:sp>
+        <p:nvSpPr>
+          <p:cNvPr id="2" name="Rectangle 1"/>
+          <p:cNvSpPr/>
+          <p:nvPr/>
+        </p:nvSpPr>
+        <p:spPr>
+          <a:xfrm>
+            <a:off x="0" y="0"/>
+            <a:ext cx="12191695" cy="6858000"/>
+          </a:xfrm>
+          <a:prstGeom prst="rect">
+            <a:avLst/>
+          </a:prstGeom>
+          <a:solidFill>
+            <a:srgbClr val="0B0F17"/>
+          </a:solidFill>
+          <a:ln>
+            <a:noFill/>
+          </a:ln>
+        </p:spPr>
+        <p:style>
+          <a:lnRef idx="1">
+            <a:schemeClr val="accent1"/>
+          </a:lnRef>
+          <a:fillRef idx="3">
+            <a:schemeClr val="accent1"/>
+          </a:fillRef>
+          <a:effectRef idx="2">
+            <a:schemeClr val="accent1"/>
+          </a:effectRef>
+          <a:fontRef idx="minor">
+            <a:schemeClr val="lt1"/>
+          </a:fontRef>
+        </p:style>
+        <p:txBody>
+          <a:bodyPr rtlCol="0" anchor="ctr"/>
+          <a:lstStyle/>
+          <a:p>
+            <a:pPr algn="ctr"/>
+          </a:p>
+        </p:txBody>
+      </p:sp>
+      <p:sp>
+        <p:nvSpPr>
+          <p:cNvPr id="3" name="Rectangle 2"/>
+          <p:cNvSpPr/>
+          <p:nvPr/>
+        </p:nvSpPr>
+        <p:spPr>
+          <a:xfrm>
+            <a:off x="731520" y="365760"/>
+            <a:ext cx="10728655" cy="18288"/>
+          </a:xfrm>
+          <a:prstGeom prst="rect">
+            <a:avLst/>
+          </a:prstGeom>
+          <a:solidFill>
+            <a:srgbClr val="38BDF8"/>
+          </a:solidFill>
+          <a:ln>
+            <a:solidFill>
+              <a:srgbClr val="38BDF8"/>
+            </a:solidFill>
+          </a:ln>
+        </p:spPr>
+        <p:style>
+          <a:lnRef idx="1">
+            <a:schemeClr val="accent1"/>
+          </a:lnRef>
+          <a:fillRef idx="3">
+            <a:schemeClr val="accent1"/>
+          </a:fillRef>
+          <a:effectRef idx="2">
+            <a:schemeClr val="accent1"/>
+          </a:effectRef>
+          <a:fontRef idx="minor">
+            <a:schemeClr val="lt1"/>
+          </a:fontRef>
+        </p:style>
+        <p:txBody>
+          <a:bodyPr rtlCol="0" anchor="ctr"/>
+          <a:lstStyle/>
+          <a:p>
+            <a:pPr algn="ctr"/>
+          </a:p>
+        </p:txBody>
+      </p:sp>
+      <p:sp>
+        <p:nvSpPr>
+          <p:cNvPr id="4" name="TextBox 3"/>
+          <p:cNvSpPr txBox="1"/>
+          <p:nvPr/>
+        </p:nvSpPr>
+        <p:spPr>
+          <a:xfrm>
+            <a:off x="731520" y="438912"/>
+            <a:ext cx="8229600" cy="274320"/>
+          </a:xfrm>
+          <a:prstGeom prst="rect">
+            <a:avLst/>
+          </a:prstGeom>
+          <a:noFill/>
+        </p:spPr>
+        <p:txBody>
+          <a:bodyPr wrap="square" lIns="0" rIns="0" tIns="0" bIns="0">
+            <a:spAutoFit/>
+          </a:bodyPr>
+          <a:lstStyle/>
+          <a:p>
+            <a:pPr>
+              <a:defRPr sz="950" b="1">
+                <a:solidFill>
+                  <a:srgbClr val="38BDF8"/>
+                </a:solidFill>
+              </a:defRPr>
+            </a:pPr>
+            <a:r>
+              <a:t>TERRESTRIAL PLATFORM  |  TERRAALARM  |  DEPLOYMENT &amp; SI VALUE</a:t>
+            </a:r>
+          </a:p>
+        </p:txBody>
+      </p:sp>
+      <p:sp>
+        <p:nvSpPr>
+          <p:cNvPr id="5" name="TextBox 4"/>
+          <p:cNvSpPr txBox="1"/>
+          <p:nvPr/>
+        </p:nvSpPr>
+        <p:spPr>
+          <a:xfrm>
+            <a:off x="731520" y="731520"/>
+            <a:ext cx="9601200" cy="777240"/>
+          </a:xfrm>
+          <a:prstGeom prst="rect">
+            <a:avLst/>
+          </a:prstGeom>
+          <a:noFill/>
+        </p:spPr>
+        <p:txBody>
+          <a:bodyPr wrap="square" lIns="0" rIns="0" tIns="0" bIns="0">
+            <a:spAutoFit/>
+          </a:bodyPr>
+          <a:lstStyle/>
+          <a:p>
+            <a:pPr>
+              <a:defRPr sz="1900" b="1">
+                <a:solidFill>
+                  <a:srgbClr val="FFFFFF"/>
+                </a:solidFill>
+              </a:defRPr>
+            </a:pPr>
+            <a:r>
+              <a:t>System Integrator Deployment Framework &amp; Commercial Model</a:t>
+            </a:r>
+          </a:p>
+          <a:p>
+            <a:pPr>
+              <a:spcBef>
+                <a:spcPts val="300"/>
+              </a:spcBef>
+              <a:defRPr sz="1050">
+                <a:solidFill>
+                  <a:srgbClr val="94A3B8"/>
+                </a:solidFill>
+              </a:defRPr>
+            </a:pPr>
+            <a:r>
+              <a:t>Zero rip-and-replace turnkey onboarding with recurring enterprise margins and co-selling enablement.</a:t>
+            </a:r>
+          </a:p>
+        </p:txBody>
+      </p:sp>
+      <p:pic>
+        <p:nvPicPr>
+          <p:cNvPr id="6" name="Picture 5" descr="tp_logo_white.png"/>
+          <p:cNvPicPr>
+            <a:picLocks noChangeAspect="1"/>
+          </p:cNvPicPr>
+          <p:nvPr/>
+        </p:nvPicPr>
+        <p:blipFill>
+          <a:blip r:embed="rId2"/>
+          <a:stretch>
+            <a:fillRect/>
+          </a:stretch>
+        </p:blipFill>
+        <p:spPr>
+          <a:xfrm>
+            <a:off x="10469880" y="411480"/>
+            <a:ext cx="987552" cy="384048"/>
+          </a:xfrm>
+          <a:prstGeom prst="rect">
+            <a:avLst/>
+          </a:prstGeom>
+        </p:spPr>
+      </p:pic>
+      <p:sp>
+        <p:nvSpPr>
+          <p:cNvPr id="7" name="Rounded Rectangle 6"/>
+          <p:cNvSpPr/>
+          <p:nvPr/>
+        </p:nvSpPr>
+        <p:spPr>
+          <a:xfrm>
+            <a:off x="731520" y="1691640"/>
+            <a:ext cx="3429000" cy="2651760"/>
+          </a:xfrm>
+          <a:prstGeom prst="roundRect">
+            <a:avLst/>
+          </a:prstGeom>
+          <a:solidFill>
+            <a:srgbClr val="131926"/>
+          </a:solidFill>
+          <a:ln w="12700">
+            <a:solidFill>
+              <a:srgbClr val="28344B"/>
+            </a:solidFill>
+          </a:ln>
+        </p:spPr>
+        <p:style>
+          <a:lnRef idx="1">
+            <a:schemeClr val="accent1"/>
+          </a:lnRef>
+          <a:fillRef idx="3">
+            <a:schemeClr val="accent1"/>
+          </a:fillRef>
+          <a:effectRef idx="2">
+            <a:schemeClr val="accent1"/>
+          </a:effectRef>
+          <a:fontRef idx="minor">
+            <a:schemeClr val="lt1"/>
+          </a:fontRef>
+        </p:style>
+        <p:txBody>
+          <a:bodyPr rtlCol="0" anchor="ctr"/>
+          <a:lstStyle/>
+          <a:p>
+            <a:pPr algn="ctr"/>
+          </a:p>
+        </p:txBody>
+      </p:sp>
+      <p:sp>
+        <p:nvSpPr>
+          <p:cNvPr id="8" name="TextBox 7"/>
+          <p:cNvSpPr txBox="1"/>
+          <p:nvPr/>
+        </p:nvSpPr>
+        <p:spPr>
+          <a:xfrm>
+            <a:off x="914400" y="1856232"/>
+            <a:ext cx="3063240" cy="2322576"/>
+          </a:xfrm>
+          <a:prstGeom prst="rect">
+            <a:avLst/>
+          </a:prstGeom>
+          <a:noFill/>
+        </p:spPr>
+        <p:txBody>
+          <a:bodyPr wrap="square" lIns="0" rIns="0" tIns="0" bIns="0">
+            <a:spAutoFit/>
+          </a:bodyPr>
+          <a:lstStyle/>
+          <a:p>
+            <a:pPr>
+              <a:defRPr sz="850" b="1">
+                <a:solidFill>
+                  <a:srgbClr val="38BDF8"/>
+                </a:solidFill>
+              </a:defRPr>
+            </a:pPr>
+            <a:r>
+              <a:t>PHASE 01 | CONNECTIVITY &amp; AUDIT</a:t>
+            </a:r>
+          </a:p>
+          <a:p>
+            <a:pPr>
+              <a:spcBef>
+                <a:spcPts val="300"/>
+              </a:spcBef>
+              <a:spcAft>
+                <a:spcPts val="600"/>
               </a:spcAft>
-              <a:defRPr sz="1150" b="1">
-                <a:solidFill>
-                  <a:srgbClr val="00D4FF"/>
+              <a:defRPr sz="1200" b="1">
+                <a:solidFill>
+                  <a:srgbClr val="FFFFFF"/>
+                </a:solidFill>
+              </a:defRPr>
+            </a:pPr>
+            <a:r>
+              <a:t>Zero Rip-and-Replace Onboarding</a:t>
+            </a:r>
+          </a:p>
+          <a:p>
+            <a:pPr>
+              <a:defRPr sz="950">
+                <a:solidFill>
+                  <a:srgbClr val="F1F5F9"/>
+                </a:solidFill>
+              </a:defRPr>
+            </a:pPr>
+            <a:r>
+              <a:t>Non-intrusive protocol discovery across field PLCs, RTUs, and historians. Plug-and-play mapping of tags into the unified TPIM semantic namespace without stopping ongoing plant production.</a:t>
+            </a:r>
+          </a:p>
+        </p:txBody>
+      </p:sp>
+      <p:sp>
+        <p:nvSpPr>
+          <p:cNvPr id="9" name="Rounded Rectangle 8"/>
+          <p:cNvSpPr/>
+          <p:nvPr/>
+        </p:nvSpPr>
+        <p:spPr>
+          <a:xfrm>
+            <a:off x="4379976" y="1691640"/>
+            <a:ext cx="3429000" cy="2651760"/>
+          </a:xfrm>
+          <a:prstGeom prst="roundRect">
+            <a:avLst/>
+          </a:prstGeom>
+          <a:solidFill>
+            <a:srgbClr val="131926"/>
+          </a:solidFill>
+          <a:ln w="12700">
+            <a:solidFill>
+              <a:srgbClr val="28344B"/>
+            </a:solidFill>
+          </a:ln>
+        </p:spPr>
+        <p:style>
+          <a:lnRef idx="1">
+            <a:schemeClr val="accent1"/>
+          </a:lnRef>
+          <a:fillRef idx="3">
+            <a:schemeClr val="accent1"/>
+          </a:fillRef>
+          <a:effectRef idx="2">
+            <a:schemeClr val="accent1"/>
+          </a:effectRef>
+          <a:fontRef idx="minor">
+            <a:schemeClr val="lt1"/>
+          </a:fontRef>
+        </p:style>
+        <p:txBody>
+          <a:bodyPr rtlCol="0" anchor="ctr"/>
+          <a:lstStyle/>
+          <a:p>
+            <a:pPr algn="ctr"/>
+          </a:p>
+        </p:txBody>
+      </p:sp>
+      <p:sp>
+        <p:nvSpPr>
+          <p:cNvPr id="10" name="TextBox 9"/>
+          <p:cNvSpPr txBox="1"/>
+          <p:nvPr/>
+        </p:nvSpPr>
+        <p:spPr>
+          <a:xfrm>
+            <a:off x="4562856" y="1856232"/>
+            <a:ext cx="3063240" cy="2322576"/>
+          </a:xfrm>
+          <a:prstGeom prst="rect">
+            <a:avLst/>
+          </a:prstGeom>
+          <a:noFill/>
+        </p:spPr>
+        <p:txBody>
+          <a:bodyPr wrap="square" lIns="0" rIns="0" tIns="0" bIns="0">
+            <a:spAutoFit/>
+          </a:bodyPr>
+          <a:lstStyle/>
+          <a:p>
+            <a:pPr>
+              <a:defRPr sz="850" b="1">
+                <a:solidFill>
+                  <a:srgbClr val="38BDF8"/>
+                </a:solidFill>
+              </a:defRPr>
+            </a:pPr>
+            <a:r>
+              <a:t>PHASE 02 | TWIN CALIBRATION</a:t>
+            </a:r>
+          </a:p>
+          <a:p>
+            <a:pPr>
+              <a:spcBef>
+                <a:spcPts val="300"/>
+              </a:spcBef>
+              <a:spcAft>
+                <a:spcPts val="600"/>
+              </a:spcAft>
+              <a:defRPr sz="1200" b="1">
+                <a:solidFill>
+                  <a:srgbClr val="FFFFFF"/>
+                </a:solidFill>
+              </a:defRPr>
+            </a:pPr>
+            <a:r>
+              <a:t>Physics-Model Synchronization</a:t>
+            </a:r>
+          </a:p>
+          <a:p>
+            <a:pPr>
+              <a:defRPr sz="950">
+                <a:solidFill>
+                  <a:srgbClr val="F1F5F9"/>
+                </a:solidFill>
+              </a:defRPr>
+            </a:pPr>
+            <a:r>
+              <a:t>Deploy high-frequency Edge Gateway on premise. Calibrate first-principles thermodynamic and kinematic models against historical telemetry to achieve 99.4%+ deterministic accuracy.</a:t>
+            </a:r>
+          </a:p>
+        </p:txBody>
+      </p:sp>
+      <p:sp>
+        <p:nvSpPr>
+          <p:cNvPr id="11" name="Rounded Rectangle 10"/>
+          <p:cNvSpPr/>
+          <p:nvPr/>
+        </p:nvSpPr>
+        <p:spPr>
+          <a:xfrm>
+            <a:off x="8028432" y="1691640"/>
+            <a:ext cx="3429000" cy="2651760"/>
+          </a:xfrm>
+          <a:prstGeom prst="roundRect">
+            <a:avLst/>
+          </a:prstGeom>
+          <a:solidFill>
+            <a:srgbClr val="131926"/>
+          </a:solidFill>
+          <a:ln w="12700">
+            <a:solidFill>
+              <a:srgbClr val="28344B"/>
+            </a:solidFill>
+          </a:ln>
+        </p:spPr>
+        <p:style>
+          <a:lnRef idx="1">
+            <a:schemeClr val="accent1"/>
+          </a:lnRef>
+          <a:fillRef idx="3">
+            <a:schemeClr val="accent1"/>
+          </a:fillRef>
+          <a:effectRef idx="2">
+            <a:schemeClr val="accent1"/>
+          </a:effectRef>
+          <a:fontRef idx="minor">
+            <a:schemeClr val="lt1"/>
+          </a:fontRef>
+        </p:style>
+        <p:txBody>
+          <a:bodyPr rtlCol="0" anchor="ctr"/>
+          <a:lstStyle/>
+          <a:p>
+            <a:pPr algn="ctr"/>
+          </a:p>
+        </p:txBody>
+      </p:sp>
+      <p:sp>
+        <p:nvSpPr>
+          <p:cNvPr id="12" name="TextBox 11"/>
+          <p:cNvSpPr txBox="1"/>
+          <p:nvPr/>
+        </p:nvSpPr>
+        <p:spPr>
+          <a:xfrm>
+            <a:off x="8211312" y="1856232"/>
+            <a:ext cx="3063240" cy="2322576"/>
+          </a:xfrm>
+          <a:prstGeom prst="rect">
+            <a:avLst/>
+          </a:prstGeom>
+          <a:noFill/>
+        </p:spPr>
+        <p:txBody>
+          <a:bodyPr wrap="square" lIns="0" rIns="0" tIns="0" bIns="0">
+            <a:spAutoFit/>
+          </a:bodyPr>
+          <a:lstStyle/>
+          <a:p>
+            <a:pPr>
+              <a:defRPr sz="850" b="1">
+                <a:solidFill>
+                  <a:srgbClr val="38BDF8"/>
+                </a:solidFill>
+              </a:defRPr>
+            </a:pPr>
+            <a:r>
+              <a:t>PHASE 03 | AUTONOMOUS GO-LIVE</a:t>
+            </a:r>
+          </a:p>
+          <a:p>
+            <a:pPr>
+              <a:spcBef>
+                <a:spcPts val="300"/>
+              </a:spcBef>
+              <a:spcAft>
+                <a:spcPts val="600"/>
+              </a:spcAft>
+              <a:defRPr sz="1200" b="1">
+                <a:solidFill>
+                  <a:srgbClr val="FFFFFF"/>
+                </a:solidFill>
+              </a:defRPr>
+            </a:pPr>
+            <a:r>
+              <a:t>Closed-Loop Setpoint Actuation</a:t>
+            </a:r>
+          </a:p>
+          <a:p>
+            <a:pPr>
+              <a:defRPr sz="950">
+                <a:solidFill>
+                  <a:srgbClr val="F1F5F9"/>
+                </a:solidFill>
+              </a:defRPr>
+            </a:pPr>
+            <a:r>
+              <a:t>Supervisory closed-loop setpoint dispatch with bumpless transfer. Comprehensive ISA-101 verified cockpit handoff with continuous SI recurring monitoring and support tiers.</a:t>
+            </a:r>
+          </a:p>
+        </p:txBody>
+      </p:sp>
+      <p:sp>
+        <p:nvSpPr>
+          <p:cNvPr id="13" name="Rounded Rectangle 12"/>
+          <p:cNvSpPr/>
+          <p:nvPr/>
+        </p:nvSpPr>
+        <p:spPr>
+          <a:xfrm>
+            <a:off x="731520" y="4526280"/>
+            <a:ext cx="10728655" cy="1828800"/>
+          </a:xfrm>
+          <a:prstGeom prst="roundRect">
+            <a:avLst/>
+          </a:prstGeom>
+          <a:solidFill>
+            <a:srgbClr val="131926"/>
+          </a:solidFill>
+          <a:ln w="12700">
+            <a:solidFill>
+              <a:srgbClr val="38BDF8"/>
+            </a:solidFill>
+          </a:ln>
+        </p:spPr>
+        <p:style>
+          <a:lnRef idx="1">
+            <a:schemeClr val="accent1"/>
+          </a:lnRef>
+          <a:fillRef idx="3">
+            <a:schemeClr val="accent1"/>
+          </a:fillRef>
+          <a:effectRef idx="2">
+            <a:schemeClr val="accent1"/>
+          </a:effectRef>
+          <a:fontRef idx="minor">
+            <a:schemeClr val="lt1"/>
+          </a:fontRef>
+        </p:style>
+        <p:txBody>
+          <a:bodyPr rtlCol="0" anchor="ctr"/>
+          <a:lstStyle/>
+          <a:p>
+            <a:pPr algn="ctr"/>
+          </a:p>
+        </p:txBody>
+      </p:sp>
+      <p:sp>
+        <p:nvSpPr>
+          <p:cNvPr id="14" name="TextBox 13"/>
+          <p:cNvSpPr txBox="1"/>
+          <p:nvPr/>
+        </p:nvSpPr>
+        <p:spPr>
+          <a:xfrm>
+            <a:off x="960120" y="4663440"/>
+            <a:ext cx="10241280" cy="1554480"/>
+          </a:xfrm>
+          <a:prstGeom prst="rect">
+            <a:avLst/>
+          </a:prstGeom>
+          <a:noFill/>
+        </p:spPr>
+        <p:txBody>
+          <a:bodyPr wrap="square" lIns="0" rIns="0" tIns="0" bIns="0">
+            <a:spAutoFit/>
+          </a:bodyPr>
+          <a:lstStyle/>
+          <a:p>
+            <a:pPr>
+              <a:defRPr sz="1000" b="1">
+                <a:solidFill>
+                  <a:srgbClr val="38BDF8"/>
                 </a:solidFill>
               </a:defRPr>
             </a:pPr>
@@ -6303,14 +9065,47 @@
           </a:p>
           <a:p>
             <a:pPr>
-              <a:defRPr sz="1300" b="1">
-                <a:solidFill>
-                  <a:srgbClr val="FFFFFF"/>
-                </a:solidFill>
-              </a:defRPr>
-            </a:pPr>
-            <a:r>
-              <a:t>High recurring annual software margins (ARR)  |  Turnkey deployment in days, not months  |  Full co-selling &amp; pre-sales engineering support  |  Certified partner portal at platform.tpcloud.tech</a:t>
+              <a:spcBef>
+                <a:spcPts val="300"/>
+              </a:spcBef>
+              <a:defRPr sz="950">
+                <a:solidFill>
+                  <a:srgbClr val="F1F5F9"/>
+                </a:solidFill>
+              </a:defRPr>
+            </a:pPr>
+            <a:r>
+              <a:t>• High-Margin Software Recurring Revenue: Earn 25%–35% continuous recurring margin on every TerraAlarm software deployment, maintenance tier, and AI compute instance.</a:t>
+            </a:r>
+          </a:p>
+          <a:p>
+            <a:pPr>
+              <a:spcBef>
+                <a:spcPts val="300"/>
+              </a:spcBef>
+              <a:defRPr sz="950">
+                <a:solidFill>
+                  <a:srgbClr val="F1F5F9"/>
+                </a:solidFill>
+              </a:defRPr>
+            </a:pPr>
+            <a:r>
+              <a:t>• Turnkey Engineering Velocity: Deploy within 7 to 14 days leveraging pre-trained neural networks and automated semantic tag mapping, avoiding expensive months-long custom PLC code rewrites.</a:t>
+            </a:r>
+          </a:p>
+          <a:p>
+            <a:pPr>
+              <a:spcBef>
+                <a:spcPts val="300"/>
+              </a:spcBef>
+              <a:defRPr sz="950">
+                <a:solidFill>
+                  <a:srgbClr val="F1F5F9"/>
+                </a:solidFill>
+              </a:defRPr>
+            </a:pPr>
+            <a:r>
+              <a:t>• Enterprise Co-Selling &amp; Ecosystem: Access joint executive pipeline opportunities, certified engineering documentation, and board-level C-Suite presentation toolkits.</a:t>
             </a:r>
           </a:p>
         </p:txBody>
@@ -6641,4 +9436,324 @@
   </a:objectDefaults>
   <a:extraClrSchemeLst/>
 </a:theme>
+</file>
+
+<file path=ppt/theme/theme2.xml><?xml version="1.0" encoding="utf-8"?>
+<a:theme xmlns:a="http://schemas.openxmlformats.org/drawingml/2006/main" name="Office Theme">
+  <a:themeElements>
+    <a:clrScheme name="Office">
+      <a:dk1>
+        <a:sysClr val="windowText" lastClr="000000"/>
+      </a:dk1>
+      <a:lt1>
+        <a:sysClr val="window" lastClr="FFFFFF"/>
+      </a:lt1>
+      <a:dk2>
+        <a:srgbClr val="1F497D"/>
+      </a:dk2>
+      <a:lt2>
+        <a:srgbClr val="EEECE1"/>
+      </a:lt2>
+      <a:accent1>
+        <a:srgbClr val="4F81BD"/>
+      </a:accent1>
+      <a:accent2>
+        <a:srgbClr val="C0504D"/>
+      </a:accent2>
+      <a:accent3>
+        <a:srgbClr val="9BBB59"/>
+      </a:accent3>
+      <a:accent4>
+        <a:srgbClr val="8064A2"/>
+      </a:accent4>
+      <a:accent5>
+        <a:srgbClr val="4BACC6"/>
+      </a:accent5>
+      <a:accent6>
+        <a:srgbClr val="F79646"/>
+      </a:accent6>
+      <a:hlink>
+        <a:srgbClr val="0000FF"/>
+      </a:hlink>
+      <a:folHlink>
+        <a:srgbClr val="800080"/>
+      </a:folHlink>
+    </a:clrScheme>
+    <a:fontScheme name="Office">
+      <a:majorFont>
+        <a:latin typeface="Calibri"/>
+        <a:ea typeface=""/>
+        <a:cs typeface=""/>
+        <a:font script="Jpan" typeface="ＭＳ Ｐゴシック"/>
+        <a:font script="Hang" typeface="맑은 고딕"/>
+        <a:font script="Hans" typeface="宋体"/>
+        <a:font script="Hant" typeface="新細明體"/>
+        <a:font script="Arab" typeface="Times New Roman"/>
+        <a:font script="Hebr" typeface="Times New Roman"/>
+        <a:font script="Thai" typeface="Angsana New"/>
+        <a:font script="Ethi" typeface="Nyala"/>
+        <a:font script="Beng" typeface="Vrinda"/>
+        <a:font script="Gujr" typeface="Shruti"/>
+        <a:font script="Khmr" typeface="MoolBoran"/>
+        <a:font script="Knda" typeface="Tunga"/>
+        <a:font script="Guru" typeface="Raavi"/>
+        <a:font script="Cans" typeface="Euphemia"/>
+        <a:font script="Cher" typeface="Plantagenet Cherokee"/>
+        <a:font script="Yiii" typeface="Microsoft Yi Baiti"/>
+        <a:font script="Tibt" typeface="Microsoft Himalaya"/>
+        <a:font script="Thaa" typeface="MV Boli"/>
+        <a:font script="Deva" typeface="Mangal"/>
+        <a:font script="Telu" typeface="Gautami"/>
+        <a:font script="Taml" typeface="Latha"/>
+        <a:font script="Syrc" typeface="Estrangelo Edessa"/>
+        <a:font script="Orya" typeface="Kalinga"/>
+        <a:font script="Mlym" typeface="Kartika"/>
+        <a:font script="Laoo" typeface="DokChampa"/>
+        <a:font script="Sinh" typeface="Iskoola Pota"/>
+        <a:font script="Mong" typeface="Mongolian Baiti"/>
+        <a:font script="Viet" typeface="Times New Roman"/>
+        <a:font script="Uigh" typeface="Microsoft Uighur"/>
+        <a:font script="Geor" typeface="Sylfaen"/>
+      </a:majorFont>
+      <a:minorFont>
+        <a:latin typeface="Calibri"/>
+        <a:ea typeface=""/>
+        <a:cs typeface=""/>
+        <a:font script="Jpan" typeface="ＭＳ Ｐゴシック"/>
+        <a:font script="Hang" typeface="맑은 고딕"/>
+        <a:font script="Hans" typeface="宋体"/>
+        <a:font script="Hant" typeface="新細明體"/>
+        <a:font script="Arab" typeface="Arial"/>
+        <a:font script="Hebr" typeface="Arial"/>
+        <a:font script="Thai" typeface="Cordia New"/>
+        <a:font script="Ethi" typeface="Nyala"/>
+        <a:font script="Beng" typeface="Vrinda"/>
+        <a:font script="Gujr" typeface="Shruti"/>
+        <a:font script="Khmr" typeface="DaunPenh"/>
+        <a:font script="Knda" typeface="Tunga"/>
+        <a:font script="Guru" typeface="Raavi"/>
+        <a:font script="Cans" typeface="Euphemia"/>
+        <a:font script="Cher" typeface="Plantagenet Cherokee"/>
+        <a:font script="Yiii" typeface="Microsoft Yi Baiti"/>
+        <a:font script="Tibt" typeface="Microsoft Himalaya"/>
+        <a:font script="Thaa" typeface="MV Boli"/>
+        <a:font script="Deva" typeface="Mangal"/>
+        <a:font script="Telu" typeface="Gautami"/>
+        <a:font script="Taml" typeface="Latha"/>
+        <a:font script="Syrc" typeface="Estrangelo Edessa"/>
+        <a:font script="Orya" typeface="Kalinga"/>
+        <a:font script="Mlym" typeface="Kartika"/>
+        <a:font script="Laoo" typeface="DokChampa"/>
+        <a:font script="Sinh" typeface="Iskoola Pota"/>
+        <a:font script="Mong" typeface="Mongolian Baiti"/>
+        <a:font script="Viet" typeface="Arial"/>
+        <a:font script="Uigh" typeface="Microsoft Uighur"/>
+        <a:font script="Geor" typeface="Sylfaen"/>
+      </a:minorFont>
+    </a:fontScheme>
+    <a:fmtScheme name="Office">
+      <a:fillStyleLst>
+        <a:solidFill>
+          <a:schemeClr val="phClr"/>
+        </a:solidFill>
+        <a:gradFill rotWithShape="1">
+          <a:gsLst>
+            <a:gs pos="0">
+              <a:schemeClr val="phClr">
+                <a:tint val="50000"/>
+                <a:satMod val="300000"/>
+              </a:schemeClr>
+            </a:gs>
+            <a:gs pos="35000">
+              <a:schemeClr val="phClr">
+                <a:tint val="37000"/>
+                <a:satMod val="300000"/>
+              </a:schemeClr>
+            </a:gs>
+            <a:gs pos="100000">
+              <a:schemeClr val="phClr">
+                <a:tint val="15000"/>
+                <a:satMod val="350000"/>
+              </a:schemeClr>
+            </a:gs>
+          </a:gsLst>
+          <a:lin ang="16200000" scaled="1"/>
+        </a:gradFill>
+        <a:gradFill rotWithShape="1">
+          <a:gsLst>
+            <a:gs pos="0">
+              <a:schemeClr val="phClr">
+                <a:tint val="100000"/>
+                <a:shade val="100000"/>
+                <a:satMod val="130000"/>
+              </a:schemeClr>
+            </a:gs>
+            <a:gs pos="100000">
+              <a:schemeClr val="phClr">
+                <a:tint val="50000"/>
+                <a:shade val="100000"/>
+                <a:satMod val="350000"/>
+              </a:schemeClr>
+            </a:gs>
+          </a:gsLst>
+          <a:lin ang="16200000" scaled="0"/>
+        </a:gradFill>
+      </a:fillStyleLst>
+      <a:lnStyleLst>
+        <a:ln w="9525" cap="flat" cmpd="sng" algn="ctr">
+          <a:solidFill>
+            <a:schemeClr val="phClr">
+              <a:shade val="95000"/>
+              <a:satMod val="105000"/>
+            </a:schemeClr>
+          </a:solidFill>
+          <a:prstDash val="solid"/>
+        </a:ln>
+        <a:ln w="25400" cap="flat" cmpd="sng" algn="ctr">
+          <a:solidFill>
+            <a:schemeClr val="phClr"/>
+          </a:solidFill>
+          <a:prstDash val="solid"/>
+        </a:ln>
+        <a:ln w="38100" cap="flat" cmpd="sng" algn="ctr">
+          <a:solidFill>
+            <a:schemeClr val="phClr"/>
+          </a:solidFill>
+          <a:prstDash val="solid"/>
+        </a:ln>
+      </a:lnStyleLst>
+      <a:effectStyleLst>
+        <a:effectStyle>
+          <a:effectLst>
+            <a:outerShdw blurRad="40000" dist="20000" dir="5400000" rotWithShape="0">
+              <a:srgbClr val="000000">
+                <a:alpha val="38000"/>
+              </a:srgbClr>
+            </a:outerShdw>
+          </a:effectLst>
+        </a:effectStyle>
+        <a:effectStyle>
+          <a:effectLst>
+            <a:outerShdw blurRad="40000" dist="23000" dir="5400000" rotWithShape="0">
+              <a:srgbClr val="000000">
+                <a:alpha val="35000"/>
+              </a:srgbClr>
+            </a:outerShdw>
+          </a:effectLst>
+        </a:effectStyle>
+        <a:effectStyle>
+          <a:effectLst>
+            <a:outerShdw blurRad="40000" dist="23000" dir="5400000" rotWithShape="0">
+              <a:srgbClr val="000000">
+                <a:alpha val="35000"/>
+              </a:srgbClr>
+            </a:outerShdw>
+          </a:effectLst>
+          <a:scene3d>
+            <a:camera prst="orthographicFront">
+              <a:rot lat="0" lon="0" rev="0"/>
+            </a:camera>
+            <a:lightRig rig="threePt" dir="t">
+              <a:rot lat="0" lon="0" rev="1200000"/>
+            </a:lightRig>
+          </a:scene3d>
+          <a:sp3d>
+            <a:bevelT w="63500" h="25400"/>
+          </a:sp3d>
+        </a:effectStyle>
+      </a:effectStyleLst>
+      <a:bgFillStyleLst>
+        <a:solidFill>
+          <a:schemeClr val="phClr"/>
+        </a:solidFill>
+        <a:gradFill rotWithShape="1">
+          <a:gsLst>
+            <a:gs pos="0">
+              <a:schemeClr val="phClr">
+                <a:tint val="40000"/>
+                <a:satMod val="350000"/>
+              </a:schemeClr>
+            </a:gs>
+            <a:gs pos="40000">
+              <a:schemeClr val="phClr">
+                <a:tint val="45000"/>
+                <a:shade val="99000"/>
+                <a:satMod val="350000"/>
+              </a:schemeClr>
+            </a:gs>
+            <a:gs pos="100000">
+              <a:schemeClr val="phClr">
+                <a:shade val="20000"/>
+                <a:satMod val="255000"/>
+              </a:schemeClr>
+            </a:gs>
+          </a:gsLst>
+          <a:path path="circle">
+            <a:fillToRect l="50000" t="-80000" r="50000" b="180000"/>
+          </a:path>
+        </a:gradFill>
+        <a:gradFill rotWithShape="1">
+          <a:gsLst>
+            <a:gs pos="0">
+              <a:schemeClr val="phClr">
+                <a:tint val="80000"/>
+                <a:satMod val="300000"/>
+              </a:schemeClr>
+            </a:gs>
+            <a:gs pos="100000">
+              <a:schemeClr val="phClr">
+                <a:shade val="30000"/>
+                <a:satMod val="200000"/>
+              </a:schemeClr>
+            </a:gs>
+          </a:gsLst>
+          <a:path path="circle">
+            <a:fillToRect l="50000" t="50000" r="50000" b="50000"/>
+          </a:path>
+        </a:gradFill>
+      </a:bgFillStyleLst>
+    </a:fmtScheme>
+  </a:themeElements>
+  <a:objectDefaults>
+    <a:spDef>
+      <a:spPr/>
+      <a:bodyPr/>
+      <a:lstStyle/>
+      <a:style>
+        <a:lnRef idx="1">
+          <a:schemeClr val="accent1"/>
+        </a:lnRef>
+        <a:fillRef idx="3">
+          <a:schemeClr val="accent1"/>
+        </a:fillRef>
+        <a:effectRef idx="2">
+          <a:schemeClr val="accent1"/>
+        </a:effectRef>
+        <a:fontRef idx="minor">
+          <a:schemeClr val="lt1"/>
+        </a:fontRef>
+      </a:style>
+    </a:spDef>
+    <a:lnDef>
+      <a:spPr/>
+      <a:bodyPr/>
+      <a:lstStyle/>
+      <a:style>
+        <a:lnRef idx="2">
+          <a:schemeClr val="accent1"/>
+        </a:lnRef>
+        <a:fillRef idx="0">
+          <a:schemeClr val="accent1"/>
+        </a:fillRef>
+        <a:effectRef idx="1">
+          <a:schemeClr val="accent1"/>
+        </a:effectRef>
+        <a:fontRef idx="minor">
+          <a:schemeClr val="tx1"/>
+        </a:fontRef>
+      </a:style>
+    </a:lnDef>
+  </a:objectDefaults>
+  <a:extraClrSchemeLst/>
+</a:theme>
 </file>